--- a/examples/figures/wind_forecasting_figs [Autosaved].pptx
+++ b/examples/figures/wind_forecasting_figs [Autosaved].pptx
@@ -5,14 +5,15 @@
     <p:sldMasterId id="2147483660" r:id="rId1"/>
   </p:sldMasterIdLst>
   <p:notesMasterIdLst>
-    <p:notesMasterId r:id="rId7"/>
+    <p:notesMasterId r:id="rId8"/>
   </p:notesMasterIdLst>
   <p:sldIdLst>
     <p:sldId id="256" r:id="rId2"/>
     <p:sldId id="257" r:id="rId3"/>
-    <p:sldId id="259" r:id="rId4"/>
-    <p:sldId id="258" r:id="rId5"/>
-    <p:sldId id="260" r:id="rId6"/>
+    <p:sldId id="261" r:id="rId4"/>
+    <p:sldId id="259" r:id="rId5"/>
+    <p:sldId id="258" r:id="rId6"/>
+    <p:sldId id="260" r:id="rId7"/>
   </p:sldIdLst>
   <p:sldSz cx="12192000" cy="12188825"/>
   <p:notesSz cx="6858000" cy="9144000"/>
@@ -201,7 +202,7 @@
           <a:p>
             <a:fld id="{3380F61D-5888-4F45-B58C-AFF11477949F}" type="datetimeFigureOut">
               <a:rPr lang="en-US" smtClean="0"/>
-              <a:t>5/27/25</a:t>
+              <a:t>6/18/25</a:t>
             </a:fld>
             <a:endParaRPr lang="en-US"/>
           </a:p>
@@ -560,6 +561,114 @@
         <p:cNvPr id="1" name="">
           <a:extLst>
             <a:ext uri="{FF2B5EF4-FFF2-40B4-BE49-F238E27FC236}">
+              <a16:creationId xmlns:a16="http://schemas.microsoft.com/office/drawing/2014/main" id="{FE2178B6-3140-261B-DA0D-82CB0FE40463}"/>
+            </a:ext>
+          </a:extLst>
+        </p:cNvPr>
+        <p:cNvGrpSpPr/>
+        <p:nvPr/>
+      </p:nvGrpSpPr>
+      <p:grpSpPr>
+        <a:xfrm>
+          <a:off x="0" y="0"/>
+          <a:ext cx="0" cy="0"/>
+          <a:chOff x="0" y="0"/>
+          <a:chExt cx="0" cy="0"/>
+        </a:xfrm>
+      </p:grpSpPr>
+      <p:sp>
+        <p:nvSpPr>
+          <p:cNvPr id="2" name="Slide Image Placeholder 1">
+            <a:extLst>
+              <a:ext uri="{FF2B5EF4-FFF2-40B4-BE49-F238E27FC236}">
+                <a16:creationId xmlns:a16="http://schemas.microsoft.com/office/drawing/2014/main" id="{F983DA7F-04D5-3537-BB3D-CDE2DB5DD5FD}"/>
+              </a:ext>
+            </a:extLst>
+          </p:cNvPr>
+          <p:cNvSpPr>
+            <a:spLocks noGrp="1" noRot="1" noChangeAspect="1"/>
+          </p:cNvSpPr>
+          <p:nvPr>
+            <p:ph type="sldImg"/>
+          </p:nvPr>
+        </p:nvSpPr>
+        <p:spPr/>
+      </p:sp>
+      <p:sp>
+        <p:nvSpPr>
+          <p:cNvPr id="3" name="Notes Placeholder 2">
+            <a:extLst>
+              <a:ext uri="{FF2B5EF4-FFF2-40B4-BE49-F238E27FC236}">
+                <a16:creationId xmlns:a16="http://schemas.microsoft.com/office/drawing/2014/main" id="{1139E9B2-C66E-9896-6467-FF0E0467C397}"/>
+              </a:ext>
+            </a:extLst>
+          </p:cNvPr>
+          <p:cNvSpPr>
+            <a:spLocks noGrp="1"/>
+          </p:cNvSpPr>
+          <p:nvPr>
+            <p:ph type="body" idx="1"/>
+          </p:nvPr>
+        </p:nvSpPr>
+        <p:spPr/>
+        <p:txBody>
+          <a:bodyPr/>
+          <a:lstStyle/>
+          <a:p>
+            <a:endParaRPr lang="en-US" dirty="0"/>
+          </a:p>
+        </p:txBody>
+      </p:sp>
+      <p:sp>
+        <p:nvSpPr>
+          <p:cNvPr id="4" name="Slide Number Placeholder 3">
+            <a:extLst>
+              <a:ext uri="{FF2B5EF4-FFF2-40B4-BE49-F238E27FC236}">
+                <a16:creationId xmlns:a16="http://schemas.microsoft.com/office/drawing/2014/main" id="{3AC1D8CF-37CC-98C8-C85B-6F5371520C5A}"/>
+              </a:ext>
+            </a:extLst>
+          </p:cNvPr>
+          <p:cNvSpPr>
+            <a:spLocks noGrp="1"/>
+          </p:cNvSpPr>
+          <p:nvPr>
+            <p:ph type="sldNum" sz="quarter" idx="5"/>
+          </p:nvPr>
+        </p:nvSpPr>
+        <p:spPr/>
+        <p:txBody>
+          <a:bodyPr/>
+          <a:lstStyle/>
+          <a:p>
+            <a:fld id="{49DBF009-32B7-474B-98BB-6B0A10F59D6A}" type="slidenum">
+              <a:rPr lang="en-US" smtClean="0"/>
+              <a:t>3</a:t>
+            </a:fld>
+            <a:endParaRPr lang="en-US"/>
+          </a:p>
+        </p:txBody>
+      </p:sp>
+    </p:spTree>
+    <p:extLst>
+      <p:ext uri="{BB962C8B-B14F-4D97-AF65-F5344CB8AC3E}">
+        <p14:creationId xmlns:p14="http://schemas.microsoft.com/office/powerpoint/2010/main" val="1529380521"/>
+      </p:ext>
+    </p:extLst>
+  </p:cSld>
+  <p:clrMapOvr>
+    <a:masterClrMapping/>
+  </p:clrMapOvr>
+</p:notes>
+</file>
+
+<file path=ppt/notesSlides/notesSlide3.xml><?xml version="1.0" encoding="utf-8"?>
+<p:notes xmlns:a="http://schemas.openxmlformats.org/drawingml/2006/main" xmlns:r="http://schemas.openxmlformats.org/officeDocument/2006/relationships" xmlns:p="http://schemas.openxmlformats.org/presentationml/2006/main">
+  <p:cSld>
+    <p:spTree>
+      <p:nvGrpSpPr>
+        <p:cNvPr id="1" name="">
+          <a:extLst>
+            <a:ext uri="{FF2B5EF4-FFF2-40B4-BE49-F238E27FC236}">
               <a16:creationId xmlns:a16="http://schemas.microsoft.com/office/drawing/2014/main" id="{02260655-8E7B-07B7-24A8-C7B47A5638DD}"/>
             </a:ext>
           </a:extLst>
@@ -641,7 +750,7 @@
           <a:p>
             <a:fld id="{49DBF009-32B7-474B-98BB-6B0A10F59D6A}" type="slidenum">
               <a:rPr lang="en-US" smtClean="0"/>
-              <a:t>3</a:t>
+              <a:t>4</a:t>
             </a:fld>
             <a:endParaRPr lang="en-US"/>
           </a:p>
@@ -791,7 +900,7 @@
           <a:p>
             <a:fld id="{09A208B9-A1FD-A545-84FD-D19EFD3032C3}" type="datetimeFigureOut">
               <a:rPr lang="en-US" smtClean="0"/>
-              <a:t>5/27/25</a:t>
+              <a:t>6/18/25</a:t>
             </a:fld>
             <a:endParaRPr lang="en-US"/>
           </a:p>
@@ -961,7 +1070,7 @@
           <a:p>
             <a:fld id="{09A208B9-A1FD-A545-84FD-D19EFD3032C3}" type="datetimeFigureOut">
               <a:rPr lang="en-US" smtClean="0"/>
-              <a:t>5/27/25</a:t>
+              <a:t>6/18/25</a:t>
             </a:fld>
             <a:endParaRPr lang="en-US"/>
           </a:p>
@@ -1141,7 +1250,7 @@
           <a:p>
             <a:fld id="{09A208B9-A1FD-A545-84FD-D19EFD3032C3}" type="datetimeFigureOut">
               <a:rPr lang="en-US" smtClean="0"/>
-              <a:t>5/27/25</a:t>
+              <a:t>6/18/25</a:t>
             </a:fld>
             <a:endParaRPr lang="en-US"/>
           </a:p>
@@ -1311,7 +1420,7 @@
           <a:p>
             <a:fld id="{09A208B9-A1FD-A545-84FD-D19EFD3032C3}" type="datetimeFigureOut">
               <a:rPr lang="en-US" smtClean="0"/>
-              <a:t>5/27/25</a:t>
+              <a:t>6/18/25</a:t>
             </a:fld>
             <a:endParaRPr lang="en-US"/>
           </a:p>
@@ -1557,7 +1666,7 @@
           <a:p>
             <a:fld id="{09A208B9-A1FD-A545-84FD-D19EFD3032C3}" type="datetimeFigureOut">
               <a:rPr lang="en-US" smtClean="0"/>
-              <a:t>5/27/25</a:t>
+              <a:t>6/18/25</a:t>
             </a:fld>
             <a:endParaRPr lang="en-US"/>
           </a:p>
@@ -1789,7 +1898,7 @@
           <a:p>
             <a:fld id="{09A208B9-A1FD-A545-84FD-D19EFD3032C3}" type="datetimeFigureOut">
               <a:rPr lang="en-US" smtClean="0"/>
-              <a:t>5/27/25</a:t>
+              <a:t>6/18/25</a:t>
             </a:fld>
             <a:endParaRPr lang="en-US"/>
           </a:p>
@@ -2156,7 +2265,7 @@
           <a:p>
             <a:fld id="{09A208B9-A1FD-A545-84FD-D19EFD3032C3}" type="datetimeFigureOut">
               <a:rPr lang="en-US" smtClean="0"/>
-              <a:t>5/27/25</a:t>
+              <a:t>6/18/25</a:t>
             </a:fld>
             <a:endParaRPr lang="en-US"/>
           </a:p>
@@ -2274,7 +2383,7 @@
           <a:p>
             <a:fld id="{09A208B9-A1FD-A545-84FD-D19EFD3032C3}" type="datetimeFigureOut">
               <a:rPr lang="en-US" smtClean="0"/>
-              <a:t>5/27/25</a:t>
+              <a:t>6/18/25</a:t>
             </a:fld>
             <a:endParaRPr lang="en-US"/>
           </a:p>
@@ -2369,7 +2478,7 @@
           <a:p>
             <a:fld id="{09A208B9-A1FD-A545-84FD-D19EFD3032C3}" type="datetimeFigureOut">
               <a:rPr lang="en-US" smtClean="0"/>
-              <a:t>5/27/25</a:t>
+              <a:t>6/18/25</a:t>
             </a:fld>
             <a:endParaRPr lang="en-US"/>
           </a:p>
@@ -2646,7 +2755,7 @@
           <a:p>
             <a:fld id="{09A208B9-A1FD-A545-84FD-D19EFD3032C3}" type="datetimeFigureOut">
               <a:rPr lang="en-US" smtClean="0"/>
-              <a:t>5/27/25</a:t>
+              <a:t>6/18/25</a:t>
             </a:fld>
             <a:endParaRPr lang="en-US"/>
           </a:p>
@@ -2903,7 +3012,7 @@
           <a:p>
             <a:fld id="{09A208B9-A1FD-A545-84FD-D19EFD3032C3}" type="datetimeFigureOut">
               <a:rPr lang="en-US" smtClean="0"/>
-              <a:t>5/27/25</a:t>
+              <a:t>6/18/25</a:t>
             </a:fld>
             <a:endParaRPr lang="en-US"/>
           </a:p>
@@ -3116,7 +3225,7 @@
           <a:p>
             <a:fld id="{09A208B9-A1FD-A545-84FD-D19EFD3032C3}" type="datetimeFigureOut">
               <a:rPr lang="en-US" smtClean="0"/>
-              <a:t>5/27/25</a:t>
+              <a:t>6/18/25</a:t>
             </a:fld>
             <a:endParaRPr lang="en-US"/>
           </a:p>
@@ -4081,7 +4190,7 @@
                   <a:srgbClr val="C00000"/>
                 </a:solidFill>
                 <a:prstDash val="sysDash"/>
-                <a:headEnd type="none"/>
+                <a:headEnd type="triangle"/>
                 <a:tailEnd type="none"/>
               </a:ln>
             </p:spPr>
@@ -7357,6 +7466,2221 @@
         <p:cNvPr id="1" name="">
           <a:extLst>
             <a:ext uri="{FF2B5EF4-FFF2-40B4-BE49-F238E27FC236}">
+              <a16:creationId xmlns:a16="http://schemas.microsoft.com/office/drawing/2014/main" id="{8EA15F76-B4E8-2E75-E0B2-95CECA2A60D8}"/>
+            </a:ext>
+          </a:extLst>
+        </p:cNvPr>
+        <p:cNvGrpSpPr/>
+        <p:nvPr/>
+      </p:nvGrpSpPr>
+      <p:grpSpPr>
+        <a:xfrm>
+          <a:off x="0" y="0"/>
+          <a:ext cx="0" cy="0"/>
+          <a:chOff x="0" y="0"/>
+          <a:chExt cx="0" cy="0"/>
+        </a:xfrm>
+      </p:grpSpPr>
+      <p:sp>
+        <p:nvSpPr>
+          <p:cNvPr id="15" name="TextBox 14">
+            <a:extLst>
+              <a:ext uri="{FF2B5EF4-FFF2-40B4-BE49-F238E27FC236}">
+                <a16:creationId xmlns:a16="http://schemas.microsoft.com/office/drawing/2014/main" id="{6019C22B-2B66-0190-473F-E1CD5D233279}"/>
+              </a:ext>
+            </a:extLst>
+          </p:cNvPr>
+          <p:cNvSpPr txBox="1"/>
+          <p:nvPr/>
+        </p:nvSpPr>
+        <p:spPr>
+          <a:xfrm>
+            <a:off x="6108585" y="1806370"/>
+            <a:ext cx="3270708" cy="1200329"/>
+          </a:xfrm>
+          <a:prstGeom prst="rect">
+            <a:avLst/>
+          </a:prstGeom>
+          <a:noFill/>
+        </p:spPr>
+        <p:txBody>
+          <a:bodyPr wrap="square" rtlCol="0">
+            <a:spAutoFit/>
+          </a:bodyPr>
+          <a:lstStyle/>
+          <a:p>
+            <a:r>
+              <a:rPr lang="en-US" dirty="0"/>
+              <a:t>Green – removing data</a:t>
+            </a:r>
+          </a:p>
+          <a:p>
+            <a:r>
+              <a:rPr lang="en-US" dirty="0"/>
+              <a:t>Purple – filling data</a:t>
+            </a:r>
+          </a:p>
+          <a:p>
+            <a:r>
+              <a:rPr lang="en-US" dirty="0"/>
+              <a:t>Blue – changing data</a:t>
+            </a:r>
+          </a:p>
+          <a:p>
+            <a:r>
+              <a:rPr lang="en-US" dirty="0"/>
+              <a:t>Orange – rearranging in time</a:t>
+            </a:r>
+          </a:p>
+        </p:txBody>
+      </p:sp>
+      <p:sp>
+        <p:nvSpPr>
+          <p:cNvPr id="3" name="TextBox 2">
+            <a:extLst>
+              <a:ext uri="{FF2B5EF4-FFF2-40B4-BE49-F238E27FC236}">
+                <a16:creationId xmlns:a16="http://schemas.microsoft.com/office/drawing/2014/main" id="{49EE2871-4AD1-F7E7-7294-BF5CC3354503}"/>
+              </a:ext>
+            </a:extLst>
+          </p:cNvPr>
+          <p:cNvSpPr txBox="1"/>
+          <p:nvPr/>
+        </p:nvSpPr>
+        <p:spPr>
+          <a:xfrm>
+            <a:off x="2460178" y="2479690"/>
+            <a:ext cx="6096000" cy="369332"/>
+          </a:xfrm>
+          <a:prstGeom prst="rect">
+            <a:avLst/>
+          </a:prstGeom>
+          <a:noFill/>
+        </p:spPr>
+        <p:txBody>
+          <a:bodyPr wrap="square">
+            <a:spAutoFit/>
+          </a:bodyPr>
+          <a:lstStyle/>
+          <a:p>
+            <a:r>
+              <a:rPr lang="en-US" dirty="0"/>
+              <a:t>Power-Wind Speed Window Filter</a:t>
+            </a:r>
+          </a:p>
+        </p:txBody>
+      </p:sp>
+      <p:grpSp>
+        <p:nvGrpSpPr>
+          <p:cNvPr id="27" name="Group 26">
+            <a:extLst>
+              <a:ext uri="{FF2B5EF4-FFF2-40B4-BE49-F238E27FC236}">
+                <a16:creationId xmlns:a16="http://schemas.microsoft.com/office/drawing/2014/main" id="{5D726E19-CBAE-EE7A-E7CC-52A9B46A8BFE}"/>
+              </a:ext>
+            </a:extLst>
+          </p:cNvPr>
+          <p:cNvGrpSpPr/>
+          <p:nvPr/>
+        </p:nvGrpSpPr>
+        <p:grpSpPr>
+          <a:xfrm>
+            <a:off x="1877654" y="4577441"/>
+            <a:ext cx="7135910" cy="3038747"/>
+            <a:chOff x="1877654" y="4577441"/>
+            <a:chExt cx="7135910" cy="3038747"/>
+          </a:xfrm>
+        </p:grpSpPr>
+        <p:sp>
+          <p:nvSpPr>
+            <p:cNvPr id="45" name="Right Arrow 44">
+              <a:extLst>
+                <a:ext uri="{FF2B5EF4-FFF2-40B4-BE49-F238E27FC236}">
+                  <a16:creationId xmlns:a16="http://schemas.microsoft.com/office/drawing/2014/main" id="{74BB7962-ABD6-B3A6-5007-73432A8772BC}"/>
+                </a:ext>
+              </a:extLst>
+            </p:cNvPr>
+            <p:cNvSpPr/>
+            <p:nvPr/>
+          </p:nvSpPr>
+          <p:spPr>
+            <a:xfrm rot="5400000" flipV="1">
+              <a:off x="8625449" y="6958659"/>
+              <a:ext cx="402336" cy="112247"/>
+            </a:xfrm>
+            <a:prstGeom prst="rightArrow">
+              <a:avLst/>
+            </a:prstGeom>
+          </p:spPr>
+          <p:style>
+            <a:lnRef idx="2">
+              <a:schemeClr val="dk1">
+                <a:shade val="15000"/>
+              </a:schemeClr>
+            </a:lnRef>
+            <a:fillRef idx="1">
+              <a:schemeClr val="dk1"/>
+            </a:fillRef>
+            <a:effectRef idx="0">
+              <a:schemeClr val="dk1"/>
+            </a:effectRef>
+            <a:fontRef idx="minor">
+              <a:schemeClr val="lt1"/>
+            </a:fontRef>
+          </p:style>
+          <p:txBody>
+            <a:bodyPr rtlCol="0" anchor="ctr"/>
+            <a:lstStyle/>
+            <a:p>
+              <a:pPr algn="ctr"/>
+              <a:endParaRPr lang="en-US" dirty="0"/>
+            </a:p>
+          </p:txBody>
+        </p:sp>
+        <p:sp>
+          <p:nvSpPr>
+            <p:cNvPr id="46" name="Right Arrow 45">
+              <a:extLst>
+                <a:ext uri="{FF2B5EF4-FFF2-40B4-BE49-F238E27FC236}">
+                  <a16:creationId xmlns:a16="http://schemas.microsoft.com/office/drawing/2014/main" id="{77AE162D-2AE0-3568-4F23-1875D20D94E7}"/>
+                </a:ext>
+              </a:extLst>
+            </p:cNvPr>
+            <p:cNvSpPr/>
+            <p:nvPr/>
+          </p:nvSpPr>
+          <p:spPr>
+            <a:xfrm rot="5400000" flipV="1">
+              <a:off x="8380900" y="6952589"/>
+              <a:ext cx="402336" cy="112247"/>
+            </a:xfrm>
+            <a:prstGeom prst="rightArrow">
+              <a:avLst/>
+            </a:prstGeom>
+          </p:spPr>
+          <p:style>
+            <a:lnRef idx="2">
+              <a:schemeClr val="dk1">
+                <a:shade val="15000"/>
+              </a:schemeClr>
+            </a:lnRef>
+            <a:fillRef idx="1">
+              <a:schemeClr val="dk1"/>
+            </a:fillRef>
+            <a:effectRef idx="0">
+              <a:schemeClr val="dk1"/>
+            </a:effectRef>
+            <a:fontRef idx="minor">
+              <a:schemeClr val="lt1"/>
+            </a:fontRef>
+          </p:style>
+          <p:txBody>
+            <a:bodyPr rtlCol="0" anchor="ctr"/>
+            <a:lstStyle/>
+            <a:p>
+              <a:pPr algn="ctr"/>
+              <a:endParaRPr lang="en-US" dirty="0"/>
+            </a:p>
+          </p:txBody>
+        </p:sp>
+        <p:sp>
+          <p:nvSpPr>
+            <p:cNvPr id="47" name="Right Arrow 46">
+              <a:extLst>
+                <a:ext uri="{FF2B5EF4-FFF2-40B4-BE49-F238E27FC236}">
+                  <a16:creationId xmlns:a16="http://schemas.microsoft.com/office/drawing/2014/main" id="{65B62B68-89EF-6BA8-94C6-6850921FCB2B}"/>
+                </a:ext>
+              </a:extLst>
+            </p:cNvPr>
+            <p:cNvSpPr/>
+            <p:nvPr/>
+          </p:nvSpPr>
+          <p:spPr>
+            <a:xfrm rot="5400000" flipV="1">
+              <a:off x="7162636" y="6958658"/>
+              <a:ext cx="402336" cy="112247"/>
+            </a:xfrm>
+            <a:prstGeom prst="rightArrow">
+              <a:avLst/>
+            </a:prstGeom>
+          </p:spPr>
+          <p:style>
+            <a:lnRef idx="2">
+              <a:schemeClr val="dk1">
+                <a:shade val="15000"/>
+              </a:schemeClr>
+            </a:lnRef>
+            <a:fillRef idx="1">
+              <a:schemeClr val="dk1"/>
+            </a:fillRef>
+            <a:effectRef idx="0">
+              <a:schemeClr val="dk1"/>
+            </a:effectRef>
+            <a:fontRef idx="minor">
+              <a:schemeClr val="lt1"/>
+            </a:fontRef>
+          </p:style>
+          <p:txBody>
+            <a:bodyPr rtlCol="0" anchor="ctr"/>
+            <a:lstStyle/>
+            <a:p>
+              <a:pPr algn="ctr"/>
+              <a:endParaRPr lang="en-US" dirty="0"/>
+            </a:p>
+          </p:txBody>
+        </p:sp>
+        <p:sp>
+          <p:nvSpPr>
+            <p:cNvPr id="2" name="Rectangle 1">
+              <a:extLst>
+                <a:ext uri="{FF2B5EF4-FFF2-40B4-BE49-F238E27FC236}">
+                  <a16:creationId xmlns:a16="http://schemas.microsoft.com/office/drawing/2014/main" id="{5837D225-8D35-7E67-7606-0856608CB1FA}"/>
+                </a:ext>
+              </a:extLst>
+            </p:cNvPr>
+            <p:cNvSpPr/>
+            <p:nvPr/>
+          </p:nvSpPr>
+          <p:spPr>
+            <a:xfrm>
+              <a:off x="4473455" y="6227718"/>
+              <a:ext cx="1561651" cy="601883"/>
+            </a:xfrm>
+            <a:prstGeom prst="rect">
+              <a:avLst/>
+            </a:prstGeom>
+            <a:solidFill>
+              <a:srgbClr val="00B0F0"/>
+            </a:solidFill>
+            <a:ln w="9525"/>
+            <a:effectLst>
+              <a:outerShdw blurRad="50800" dist="38100" dir="8100000" algn="tr" rotWithShape="0">
+                <a:prstClr val="black">
+                  <a:alpha val="40000"/>
+                </a:prstClr>
+              </a:outerShdw>
+            </a:effectLst>
+          </p:spPr>
+          <p:style>
+            <a:lnRef idx="2">
+              <a:schemeClr val="accent4">
+                <a:shade val="15000"/>
+              </a:schemeClr>
+            </a:lnRef>
+            <a:fillRef idx="1">
+              <a:schemeClr val="accent4"/>
+            </a:fillRef>
+            <a:effectRef idx="0">
+              <a:schemeClr val="accent4"/>
+            </a:effectRef>
+            <a:fontRef idx="minor">
+              <a:schemeClr val="lt1"/>
+            </a:fontRef>
+          </p:style>
+          <p:txBody>
+            <a:bodyPr rtlCol="0" anchor="ctr"/>
+            <a:lstStyle/>
+            <a:p>
+              <a:pPr algn="ctr"/>
+              <a:r>
+                <a:rPr lang="en-US" dirty="0">
+                  <a:latin typeface="Modern No. 20" panose="02070704070505020303" pitchFamily="18" charset="77"/>
+                </a:rPr>
+                <a:t>Normalization</a:t>
+              </a:r>
+            </a:p>
+          </p:txBody>
+        </p:sp>
+        <p:sp>
+          <p:nvSpPr>
+            <p:cNvPr id="21" name="Right Arrow 20">
+              <a:extLst>
+                <a:ext uri="{FF2B5EF4-FFF2-40B4-BE49-F238E27FC236}">
+                  <a16:creationId xmlns:a16="http://schemas.microsoft.com/office/drawing/2014/main" id="{FCA604B4-3235-2933-13FD-34F799EC6BCE}"/>
+                </a:ext>
+              </a:extLst>
+            </p:cNvPr>
+            <p:cNvSpPr/>
+            <p:nvPr/>
+          </p:nvSpPr>
+          <p:spPr>
+            <a:xfrm>
+              <a:off x="5163308" y="4832973"/>
+              <a:ext cx="201021" cy="107992"/>
+            </a:xfrm>
+            <a:prstGeom prst="rightArrow">
+              <a:avLst/>
+            </a:prstGeom>
+          </p:spPr>
+          <p:style>
+            <a:lnRef idx="2">
+              <a:schemeClr val="dk1">
+                <a:shade val="15000"/>
+              </a:schemeClr>
+            </a:lnRef>
+            <a:fillRef idx="1">
+              <a:schemeClr val="dk1"/>
+            </a:fillRef>
+            <a:effectRef idx="0">
+              <a:schemeClr val="dk1"/>
+            </a:effectRef>
+            <a:fontRef idx="minor">
+              <a:schemeClr val="lt1"/>
+            </a:fontRef>
+          </p:style>
+          <p:txBody>
+            <a:bodyPr rtlCol="0" anchor="ctr"/>
+            <a:lstStyle/>
+            <a:p>
+              <a:pPr algn="ctr"/>
+              <a:endParaRPr lang="en-US" dirty="0"/>
+            </a:p>
+          </p:txBody>
+        </p:sp>
+        <p:sp>
+          <p:nvSpPr>
+            <p:cNvPr id="20" name="Right Arrow 19">
+              <a:extLst>
+                <a:ext uri="{FF2B5EF4-FFF2-40B4-BE49-F238E27FC236}">
+                  <a16:creationId xmlns:a16="http://schemas.microsoft.com/office/drawing/2014/main" id="{D9482A8A-83EF-1D6D-97FA-E01B2393D9DB}"/>
+                </a:ext>
+              </a:extLst>
+            </p:cNvPr>
+            <p:cNvSpPr/>
+            <p:nvPr/>
+          </p:nvSpPr>
+          <p:spPr>
+            <a:xfrm>
+              <a:off x="3992661" y="4822992"/>
+              <a:ext cx="201021" cy="107992"/>
+            </a:xfrm>
+            <a:prstGeom prst="rightArrow">
+              <a:avLst/>
+            </a:prstGeom>
+          </p:spPr>
+          <p:style>
+            <a:lnRef idx="2">
+              <a:schemeClr val="dk1">
+                <a:shade val="15000"/>
+              </a:schemeClr>
+            </a:lnRef>
+            <a:fillRef idx="1">
+              <a:schemeClr val="dk1"/>
+            </a:fillRef>
+            <a:effectRef idx="0">
+              <a:schemeClr val="dk1"/>
+            </a:effectRef>
+            <a:fontRef idx="minor">
+              <a:schemeClr val="lt1"/>
+            </a:fontRef>
+          </p:style>
+          <p:txBody>
+            <a:bodyPr rtlCol="0" anchor="ctr"/>
+            <a:lstStyle/>
+            <a:p>
+              <a:pPr algn="ctr"/>
+              <a:endParaRPr lang="en-US" dirty="0"/>
+            </a:p>
+          </p:txBody>
+        </p:sp>
+        <p:sp>
+          <p:nvSpPr>
+            <p:cNvPr id="19" name="Right Arrow 18">
+              <a:extLst>
+                <a:ext uri="{FF2B5EF4-FFF2-40B4-BE49-F238E27FC236}">
+                  <a16:creationId xmlns:a16="http://schemas.microsoft.com/office/drawing/2014/main" id="{BF749671-7734-41D2-4CCC-E04F9540E66C}"/>
+                </a:ext>
+              </a:extLst>
+            </p:cNvPr>
+            <p:cNvSpPr/>
+            <p:nvPr/>
+          </p:nvSpPr>
+          <p:spPr>
+            <a:xfrm>
+              <a:off x="2738487" y="4839680"/>
+              <a:ext cx="201021" cy="107992"/>
+            </a:xfrm>
+            <a:prstGeom prst="rightArrow">
+              <a:avLst/>
+            </a:prstGeom>
+          </p:spPr>
+          <p:style>
+            <a:lnRef idx="2">
+              <a:schemeClr val="dk1">
+                <a:shade val="15000"/>
+              </a:schemeClr>
+            </a:lnRef>
+            <a:fillRef idx="1">
+              <a:schemeClr val="dk1"/>
+            </a:fillRef>
+            <a:effectRef idx="0">
+              <a:schemeClr val="dk1"/>
+            </a:effectRef>
+            <a:fontRef idx="minor">
+              <a:schemeClr val="lt1"/>
+            </a:fontRef>
+          </p:style>
+          <p:txBody>
+            <a:bodyPr rtlCol="0" anchor="ctr"/>
+            <a:lstStyle/>
+            <a:p>
+              <a:pPr algn="ctr"/>
+              <a:endParaRPr lang="en-US" dirty="0"/>
+            </a:p>
+          </p:txBody>
+        </p:sp>
+        <p:sp>
+          <p:nvSpPr>
+            <p:cNvPr id="4" name="Parallelogram 3">
+              <a:extLst>
+                <a:ext uri="{FF2B5EF4-FFF2-40B4-BE49-F238E27FC236}">
+                  <a16:creationId xmlns:a16="http://schemas.microsoft.com/office/drawing/2014/main" id="{7D53A578-421B-7EA6-780E-C09CFBBD58E3}"/>
+                </a:ext>
+              </a:extLst>
+            </p:cNvPr>
+            <p:cNvSpPr/>
+            <p:nvPr/>
+          </p:nvSpPr>
+          <p:spPr>
+            <a:xfrm>
+              <a:off x="1877654" y="4593409"/>
+              <a:ext cx="972273" cy="567159"/>
+            </a:xfrm>
+            <a:prstGeom prst="parallelogram">
+              <a:avLst/>
+            </a:prstGeom>
+            <a:ln w="9525">
+              <a:solidFill>
+                <a:schemeClr val="tx1"/>
+              </a:solidFill>
+            </a:ln>
+            <a:effectLst>
+              <a:outerShdw blurRad="50800" dist="38100" dir="5400000" algn="t" rotWithShape="0">
+                <a:prstClr val="black">
+                  <a:alpha val="40000"/>
+                </a:prstClr>
+              </a:outerShdw>
+            </a:effectLst>
+          </p:spPr>
+          <p:style>
+            <a:lnRef idx="2">
+              <a:schemeClr val="accent1">
+                <a:shade val="15000"/>
+              </a:schemeClr>
+            </a:lnRef>
+            <a:fillRef idx="1">
+              <a:schemeClr val="accent1"/>
+            </a:fillRef>
+            <a:effectRef idx="0">
+              <a:schemeClr val="accent1"/>
+            </a:effectRef>
+            <a:fontRef idx="minor">
+              <a:schemeClr val="lt1"/>
+            </a:fontRef>
+          </p:style>
+          <p:txBody>
+            <a:bodyPr rtlCol="0" anchor="ctr"/>
+            <a:lstStyle/>
+            <a:p>
+              <a:pPr algn="ctr"/>
+              <a:r>
+                <a:rPr lang="en-US" dirty="0">
+                  <a:latin typeface="Modern No. 20" panose="02070704070505020303" pitchFamily="18" charset="77"/>
+                </a:rPr>
+                <a:t>Raw Data</a:t>
+              </a:r>
+            </a:p>
+          </p:txBody>
+        </p:sp>
+        <p:sp>
+          <p:nvSpPr>
+            <p:cNvPr id="5" name="Rectangle 4">
+              <a:extLst>
+                <a:ext uri="{FF2B5EF4-FFF2-40B4-BE49-F238E27FC236}">
+                  <a16:creationId xmlns:a16="http://schemas.microsoft.com/office/drawing/2014/main" id="{4E03B906-23A4-B9F5-AA88-39F3784A4E6F}"/>
+                </a:ext>
+              </a:extLst>
+            </p:cNvPr>
+            <p:cNvSpPr/>
+            <p:nvPr/>
+          </p:nvSpPr>
+          <p:spPr>
+            <a:xfrm>
+              <a:off x="2950439" y="4592735"/>
+              <a:ext cx="1090087" cy="601883"/>
+            </a:xfrm>
+            <a:prstGeom prst="rect">
+              <a:avLst/>
+            </a:prstGeom>
+            <a:ln w="9525">
+              <a:solidFill>
+                <a:schemeClr val="tx1"/>
+              </a:solidFill>
+            </a:ln>
+            <a:effectLst>
+              <a:outerShdw blurRad="50800" dist="38100" dir="5400000" algn="t" rotWithShape="0">
+                <a:prstClr val="black">
+                  <a:alpha val="40000"/>
+                </a:prstClr>
+              </a:outerShdw>
+            </a:effectLst>
+          </p:spPr>
+          <p:style>
+            <a:lnRef idx="3">
+              <a:schemeClr val="lt1"/>
+            </a:lnRef>
+            <a:fillRef idx="1">
+              <a:schemeClr val="accent2"/>
+            </a:fillRef>
+            <a:effectRef idx="1">
+              <a:schemeClr val="accent2"/>
+            </a:effectRef>
+            <a:fontRef idx="minor">
+              <a:schemeClr val="lt1"/>
+            </a:fontRef>
+          </p:style>
+          <p:txBody>
+            <a:bodyPr rtlCol="0" anchor="ctr"/>
+            <a:lstStyle/>
+            <a:p>
+              <a:pPr algn="ctr"/>
+              <a:r>
+                <a:rPr lang="en-US" dirty="0">
+                  <a:latin typeface="Modern No. 20" panose="02070704070505020303" pitchFamily="18" charset="77"/>
+                </a:rPr>
+                <a:t>Resample</a:t>
+              </a:r>
+            </a:p>
+          </p:txBody>
+        </p:sp>
+        <p:sp>
+          <p:nvSpPr>
+            <p:cNvPr id="7" name="Rectangle 6">
+              <a:extLst>
+                <a:ext uri="{FF2B5EF4-FFF2-40B4-BE49-F238E27FC236}">
+                  <a16:creationId xmlns:a16="http://schemas.microsoft.com/office/drawing/2014/main" id="{1E31545C-D432-F926-83B1-FF10CB78C8EE}"/>
+                </a:ext>
+              </a:extLst>
+            </p:cNvPr>
+            <p:cNvSpPr/>
+            <p:nvPr/>
+          </p:nvSpPr>
+          <p:spPr>
+            <a:xfrm>
+              <a:off x="4214205" y="4577441"/>
+              <a:ext cx="979716" cy="601883"/>
+            </a:xfrm>
+            <a:prstGeom prst="rect">
+              <a:avLst/>
+            </a:prstGeom>
+            <a:ln w="9525">
+              <a:solidFill>
+                <a:schemeClr val="tx1"/>
+              </a:solidFill>
+            </a:ln>
+            <a:effectLst>
+              <a:outerShdw blurRad="50800" dist="38100" dir="5400000" algn="t" rotWithShape="0">
+                <a:prstClr val="black">
+                  <a:alpha val="40000"/>
+                </a:prstClr>
+              </a:outerShdw>
+            </a:effectLst>
+          </p:spPr>
+          <p:style>
+            <a:lnRef idx="3">
+              <a:schemeClr val="lt1"/>
+            </a:lnRef>
+            <a:fillRef idx="1">
+              <a:schemeClr val="accent5"/>
+            </a:fillRef>
+            <a:effectRef idx="1">
+              <a:schemeClr val="accent5"/>
+            </a:effectRef>
+            <a:fontRef idx="minor">
+              <a:schemeClr val="lt1"/>
+            </a:fontRef>
+          </p:style>
+          <p:txBody>
+            <a:bodyPr rtlCol="0" anchor="ctr"/>
+            <a:lstStyle/>
+            <a:p>
+              <a:pPr algn="ctr"/>
+              <a:r>
+                <a:rPr lang="en-US" dirty="0">
+                  <a:latin typeface="Modern No. 20" panose="02070704070505020303" pitchFamily="18" charset="77"/>
+                </a:rPr>
+                <a:t>Forward Fill</a:t>
+              </a:r>
+            </a:p>
+          </p:txBody>
+        </p:sp>
+        <p:sp>
+          <p:nvSpPr>
+            <p:cNvPr id="8" name="Rectangle 7">
+              <a:extLst>
+                <a:ext uri="{FF2B5EF4-FFF2-40B4-BE49-F238E27FC236}">
+                  <a16:creationId xmlns:a16="http://schemas.microsoft.com/office/drawing/2014/main" id="{6CE38BC2-A4C1-9F3B-7596-BA17612E8A19}"/>
+                </a:ext>
+              </a:extLst>
+            </p:cNvPr>
+            <p:cNvSpPr/>
+            <p:nvPr/>
+          </p:nvSpPr>
+          <p:spPr>
+            <a:xfrm>
+              <a:off x="5367599" y="4580050"/>
+              <a:ext cx="1481972" cy="601883"/>
+            </a:xfrm>
+            <a:prstGeom prst="rect">
+              <a:avLst/>
+            </a:prstGeom>
+            <a:solidFill>
+              <a:srgbClr val="00B050"/>
+            </a:solidFill>
+            <a:ln>
+              <a:solidFill>
+                <a:schemeClr val="tx1"/>
+              </a:solidFill>
+            </a:ln>
+            <a:effectLst>
+              <a:outerShdw blurRad="50800" dist="38100" dir="5400000" algn="t" rotWithShape="0">
+                <a:prstClr val="black">
+                  <a:alpha val="40000"/>
+                </a:prstClr>
+              </a:outerShdw>
+            </a:effectLst>
+          </p:spPr>
+          <p:style>
+            <a:lnRef idx="0">
+              <a:schemeClr val="accent6"/>
+            </a:lnRef>
+            <a:fillRef idx="3">
+              <a:schemeClr val="accent6"/>
+            </a:fillRef>
+            <a:effectRef idx="3">
+              <a:schemeClr val="accent6"/>
+            </a:effectRef>
+            <a:fontRef idx="minor">
+              <a:schemeClr val="lt1"/>
+            </a:fontRef>
+          </p:style>
+          <p:txBody>
+            <a:bodyPr rtlCol="0" anchor="ctr"/>
+            <a:lstStyle/>
+            <a:p>
+              <a:pPr algn="ctr"/>
+              <a:r>
+                <a:rPr lang="en-US" dirty="0">
+                  <a:latin typeface="Modern No. 20" panose="02070704070505020303" pitchFamily="18" charset="77"/>
+                </a:rPr>
+                <a:t>Unresponsive Sensor Filter</a:t>
+              </a:r>
+            </a:p>
+          </p:txBody>
+        </p:sp>
+        <p:sp>
+          <p:nvSpPr>
+            <p:cNvPr id="9" name="Rectangle 8">
+              <a:extLst>
+                <a:ext uri="{FF2B5EF4-FFF2-40B4-BE49-F238E27FC236}">
+                  <a16:creationId xmlns:a16="http://schemas.microsoft.com/office/drawing/2014/main" id="{6D61E86F-BC0D-5201-A39D-5D8787471CFB}"/>
+                </a:ext>
+              </a:extLst>
+            </p:cNvPr>
+            <p:cNvSpPr/>
+            <p:nvPr/>
+          </p:nvSpPr>
+          <p:spPr>
+            <a:xfrm>
+              <a:off x="5212993" y="5397496"/>
+              <a:ext cx="2213817" cy="601883"/>
+            </a:xfrm>
+            <a:prstGeom prst="rect">
+              <a:avLst/>
+            </a:prstGeom>
+            <a:solidFill>
+              <a:srgbClr val="00B0F0"/>
+            </a:solidFill>
+            <a:ln>
+              <a:solidFill>
+                <a:schemeClr val="tx1"/>
+              </a:solidFill>
+            </a:ln>
+          </p:spPr>
+          <p:style>
+            <a:lnRef idx="0">
+              <a:schemeClr val="accent4"/>
+            </a:lnRef>
+            <a:fillRef idx="3">
+              <a:schemeClr val="accent4"/>
+            </a:fillRef>
+            <a:effectRef idx="3">
+              <a:schemeClr val="accent4"/>
+            </a:effectRef>
+            <a:fontRef idx="minor">
+              <a:schemeClr val="lt1"/>
+            </a:fontRef>
+          </p:style>
+          <p:txBody>
+            <a:bodyPr rtlCol="0" anchor="ctr"/>
+            <a:lstStyle/>
+            <a:p>
+              <a:pPr algn="ctr"/>
+              <a:r>
+                <a:rPr lang="en-US" dirty="0">
+                  <a:latin typeface="Modern No. 20" panose="02070704070505020303" pitchFamily="18" charset="77"/>
+                </a:rPr>
+                <a:t>Nacelle/Wind Direction Calibration</a:t>
+              </a:r>
+            </a:p>
+          </p:txBody>
+        </p:sp>
+        <p:sp>
+          <p:nvSpPr>
+            <p:cNvPr id="11" name="Rectangle 10">
+              <a:extLst>
+                <a:ext uri="{FF2B5EF4-FFF2-40B4-BE49-F238E27FC236}">
+                  <a16:creationId xmlns:a16="http://schemas.microsoft.com/office/drawing/2014/main" id="{6168D909-95AE-2B73-A25D-4C636B2F2BB8}"/>
+                </a:ext>
+              </a:extLst>
+            </p:cNvPr>
+            <p:cNvSpPr/>
+            <p:nvPr/>
+          </p:nvSpPr>
+          <p:spPr>
+            <a:xfrm>
+              <a:off x="7649860" y="5397340"/>
+              <a:ext cx="1360716" cy="601883"/>
+            </a:xfrm>
+            <a:prstGeom prst="rect">
+              <a:avLst/>
+            </a:prstGeom>
+            <a:solidFill>
+              <a:srgbClr val="00B050"/>
+            </a:solidFill>
+            <a:ln>
+              <a:solidFill>
+                <a:schemeClr val="tx1"/>
+              </a:solidFill>
+            </a:ln>
+            <a:effectLst>
+              <a:outerShdw blurRad="50800" dist="38100" dir="5400000" algn="t" rotWithShape="0">
+                <a:prstClr val="black">
+                  <a:alpha val="40000"/>
+                </a:prstClr>
+              </a:outerShdw>
+            </a:effectLst>
+          </p:spPr>
+          <p:style>
+            <a:lnRef idx="0">
+              <a:schemeClr val="accent6"/>
+            </a:lnRef>
+            <a:fillRef idx="3">
+              <a:schemeClr val="accent6"/>
+            </a:fillRef>
+            <a:effectRef idx="3">
+              <a:schemeClr val="accent6"/>
+            </a:effectRef>
+            <a:fontRef idx="minor">
+              <a:schemeClr val="lt1"/>
+            </a:fontRef>
+          </p:style>
+          <p:txBody>
+            <a:bodyPr rtlCol="0" anchor="ctr"/>
+            <a:lstStyle/>
+            <a:p>
+              <a:pPr algn="ctr"/>
+              <a:r>
+                <a:rPr lang="en-US" dirty="0">
+                  <a:latin typeface="Modern No. 20" panose="02070704070505020303" pitchFamily="18" charset="77"/>
+                </a:rPr>
+                <a:t>Power Curve Filter</a:t>
+              </a:r>
+            </a:p>
+          </p:txBody>
+        </p:sp>
+        <p:sp>
+          <p:nvSpPr>
+            <p:cNvPr id="12" name="Rectangle 11">
+              <a:extLst>
+                <a:ext uri="{FF2B5EF4-FFF2-40B4-BE49-F238E27FC236}">
+                  <a16:creationId xmlns:a16="http://schemas.microsoft.com/office/drawing/2014/main" id="{25C864B5-7436-591F-BFE0-D123C4A26E2A}"/>
+                </a:ext>
+              </a:extLst>
+            </p:cNvPr>
+            <p:cNvSpPr/>
+            <p:nvPr/>
+          </p:nvSpPr>
+          <p:spPr>
+            <a:xfrm>
+              <a:off x="3745413" y="5394041"/>
+              <a:ext cx="1240971" cy="601883"/>
+            </a:xfrm>
+            <a:prstGeom prst="rect">
+              <a:avLst/>
+            </a:prstGeom>
+            <a:solidFill>
+              <a:srgbClr val="00B0F0"/>
+            </a:solidFill>
+            <a:ln w="9525"/>
+            <a:effectLst>
+              <a:outerShdw blurRad="50800" dist="38100" dir="8100000" algn="tr" rotWithShape="0">
+                <a:prstClr val="black">
+                  <a:alpha val="40000"/>
+                </a:prstClr>
+              </a:outerShdw>
+            </a:effectLst>
+          </p:spPr>
+          <p:style>
+            <a:lnRef idx="2">
+              <a:schemeClr val="accent4">
+                <a:shade val="15000"/>
+              </a:schemeClr>
+            </a:lnRef>
+            <a:fillRef idx="1">
+              <a:schemeClr val="accent4"/>
+            </a:fillRef>
+            <a:effectRef idx="0">
+              <a:schemeClr val="accent4"/>
+            </a:effectRef>
+            <a:fontRef idx="minor">
+              <a:schemeClr val="lt1"/>
+            </a:fontRef>
+          </p:style>
+          <p:txBody>
+            <a:bodyPr rtlCol="0" anchor="ctr"/>
+            <a:lstStyle/>
+            <a:p>
+              <a:pPr algn="ctr"/>
+              <a:r>
+                <a:rPr lang="en-US" dirty="0">
+                  <a:latin typeface="Modern No. 20" panose="02070704070505020303" pitchFamily="18" charset="77"/>
+                </a:rPr>
+                <a:t>Feature Transform</a:t>
+              </a:r>
+            </a:p>
+          </p:txBody>
+        </p:sp>
+        <p:sp>
+          <p:nvSpPr>
+            <p:cNvPr id="13" name="Rectangle 12">
+              <a:extLst>
+                <a:ext uri="{FF2B5EF4-FFF2-40B4-BE49-F238E27FC236}">
+                  <a16:creationId xmlns:a16="http://schemas.microsoft.com/office/drawing/2014/main" id="{15DCBF3C-4818-A567-AA68-38450C85A81E}"/>
+                </a:ext>
+              </a:extLst>
+            </p:cNvPr>
+            <p:cNvSpPr/>
+            <p:nvPr/>
+          </p:nvSpPr>
+          <p:spPr>
+            <a:xfrm>
+              <a:off x="2433426" y="5392877"/>
+              <a:ext cx="1090087" cy="601883"/>
+            </a:xfrm>
+            <a:prstGeom prst="rect">
+              <a:avLst/>
+            </a:prstGeom>
+            <a:solidFill>
+              <a:srgbClr val="00B050"/>
+            </a:solidFill>
+            <a:ln>
+              <a:solidFill>
+                <a:schemeClr val="tx1"/>
+              </a:solidFill>
+            </a:ln>
+            <a:effectLst>
+              <a:outerShdw blurRad="50800" dist="38100" dir="5400000" algn="t" rotWithShape="0">
+                <a:prstClr val="black">
+                  <a:alpha val="40000"/>
+                </a:prstClr>
+              </a:outerShdw>
+            </a:effectLst>
+          </p:spPr>
+          <p:style>
+            <a:lnRef idx="0">
+              <a:schemeClr val="accent6"/>
+            </a:lnRef>
+            <a:fillRef idx="3">
+              <a:schemeClr val="accent6"/>
+            </a:fillRef>
+            <a:effectRef idx="3">
+              <a:schemeClr val="accent6"/>
+            </a:effectRef>
+            <a:fontRef idx="minor">
+              <a:schemeClr val="lt1"/>
+            </a:fontRef>
+          </p:style>
+          <p:txBody>
+            <a:bodyPr rtlCol="0" anchor="ctr"/>
+            <a:lstStyle/>
+            <a:p>
+              <a:pPr algn="ctr"/>
+              <a:r>
+                <a:rPr lang="en-US" dirty="0">
+                  <a:latin typeface="Modern No. 20" panose="02070704070505020303" pitchFamily="18" charset="77"/>
+                </a:rPr>
+                <a:t>Std. Dev. Filter</a:t>
+              </a:r>
+            </a:p>
+          </p:txBody>
+        </p:sp>
+        <p:sp>
+          <p:nvSpPr>
+            <p:cNvPr id="14" name="Rectangle 13">
+              <a:extLst>
+                <a:ext uri="{FF2B5EF4-FFF2-40B4-BE49-F238E27FC236}">
+                  <a16:creationId xmlns:a16="http://schemas.microsoft.com/office/drawing/2014/main" id="{5F8962CF-A596-DE58-D3FF-4F144CBAB695}"/>
+                </a:ext>
+              </a:extLst>
+            </p:cNvPr>
+            <p:cNvSpPr/>
+            <p:nvPr/>
+          </p:nvSpPr>
+          <p:spPr>
+            <a:xfrm>
+              <a:off x="2444583" y="6222971"/>
+              <a:ext cx="678762" cy="601883"/>
+            </a:xfrm>
+            <a:prstGeom prst="rect">
+              <a:avLst/>
+            </a:prstGeom>
+            <a:solidFill>
+              <a:schemeClr val="accent2"/>
+            </a:solidFill>
+            <a:ln w="9525">
+              <a:solidFill>
+                <a:schemeClr val="tx1"/>
+              </a:solidFill>
+            </a:ln>
+            <a:effectLst>
+              <a:outerShdw blurRad="50800" dist="38100" dir="5400000" algn="t" rotWithShape="0">
+                <a:prstClr val="black">
+                  <a:alpha val="40000"/>
+                </a:prstClr>
+              </a:outerShdw>
+            </a:effectLst>
+          </p:spPr>
+          <p:style>
+            <a:lnRef idx="3">
+              <a:schemeClr val="lt1"/>
+            </a:lnRef>
+            <a:fillRef idx="1">
+              <a:schemeClr val="accent2"/>
+            </a:fillRef>
+            <a:effectRef idx="1">
+              <a:schemeClr val="accent2"/>
+            </a:effectRef>
+            <a:fontRef idx="minor">
+              <a:schemeClr val="lt1"/>
+            </a:fontRef>
+          </p:style>
+          <p:txBody>
+            <a:bodyPr rtlCol="0" anchor="ctr"/>
+            <a:lstStyle/>
+            <a:p>
+              <a:pPr algn="ctr"/>
+              <a:r>
+                <a:rPr lang="en-US" dirty="0">
+                  <a:latin typeface="Modern No. 20" panose="02070704070505020303" pitchFamily="18" charset="77"/>
+                </a:rPr>
+                <a:t>Split</a:t>
+              </a:r>
+            </a:p>
+          </p:txBody>
+        </p:sp>
+        <p:sp>
+          <p:nvSpPr>
+            <p:cNvPr id="16" name="Rectangle 15">
+              <a:extLst>
+                <a:ext uri="{FF2B5EF4-FFF2-40B4-BE49-F238E27FC236}">
+                  <a16:creationId xmlns:a16="http://schemas.microsoft.com/office/drawing/2014/main" id="{103FE0D4-F03B-04E3-7BAF-C8E49650A04A}"/>
+                </a:ext>
+              </a:extLst>
+            </p:cNvPr>
+            <p:cNvSpPr/>
+            <p:nvPr/>
+          </p:nvSpPr>
+          <p:spPr>
+            <a:xfrm>
+              <a:off x="3355209" y="6222971"/>
+              <a:ext cx="886382" cy="601883"/>
+            </a:xfrm>
+            <a:prstGeom prst="rect">
+              <a:avLst/>
+            </a:prstGeom>
+            <a:ln w="9525">
+              <a:solidFill>
+                <a:schemeClr val="tx1"/>
+              </a:solidFill>
+            </a:ln>
+            <a:effectLst>
+              <a:outerShdw blurRad="50800" dist="38100" dir="5400000" algn="t" rotWithShape="0">
+                <a:prstClr val="black">
+                  <a:alpha val="40000"/>
+                </a:prstClr>
+              </a:outerShdw>
+            </a:effectLst>
+          </p:spPr>
+          <p:style>
+            <a:lnRef idx="3">
+              <a:schemeClr val="lt1"/>
+            </a:lnRef>
+            <a:fillRef idx="1">
+              <a:schemeClr val="accent5"/>
+            </a:fillRef>
+            <a:effectRef idx="1">
+              <a:schemeClr val="accent5"/>
+            </a:effectRef>
+            <a:fontRef idx="minor">
+              <a:schemeClr val="lt1"/>
+            </a:fontRef>
+          </p:style>
+          <p:txBody>
+            <a:bodyPr rtlCol="0" anchor="ctr"/>
+            <a:lstStyle/>
+            <a:p>
+              <a:pPr algn="ctr"/>
+              <a:r>
+                <a:rPr lang="en-US" dirty="0">
+                  <a:latin typeface="Modern No. 20" panose="02070704070505020303" pitchFamily="18" charset="77"/>
+                </a:rPr>
+                <a:t>Impute</a:t>
+              </a:r>
+            </a:p>
+          </p:txBody>
+        </p:sp>
+        <p:sp>
+          <p:nvSpPr>
+            <p:cNvPr id="22" name="Right Arrow 21">
+              <a:extLst>
+                <a:ext uri="{FF2B5EF4-FFF2-40B4-BE49-F238E27FC236}">
+                  <a16:creationId xmlns:a16="http://schemas.microsoft.com/office/drawing/2014/main" id="{57F7326B-1492-C626-4A06-277FFA3015B0}"/>
+                </a:ext>
+              </a:extLst>
+            </p:cNvPr>
+            <p:cNvSpPr/>
+            <p:nvPr/>
+          </p:nvSpPr>
+          <p:spPr>
+            <a:xfrm rot="5400000">
+              <a:off x="8229707" y="5225839"/>
+              <a:ext cx="201021" cy="107992"/>
+            </a:xfrm>
+            <a:prstGeom prst="rightArrow">
+              <a:avLst/>
+            </a:prstGeom>
+          </p:spPr>
+          <p:style>
+            <a:lnRef idx="2">
+              <a:schemeClr val="dk1">
+                <a:shade val="15000"/>
+              </a:schemeClr>
+            </a:lnRef>
+            <a:fillRef idx="1">
+              <a:schemeClr val="dk1"/>
+            </a:fillRef>
+            <a:effectRef idx="0">
+              <a:schemeClr val="dk1"/>
+            </a:effectRef>
+            <a:fontRef idx="minor">
+              <a:schemeClr val="lt1"/>
+            </a:fontRef>
+          </p:style>
+          <p:txBody>
+            <a:bodyPr rtlCol="0" anchor="ctr"/>
+            <a:lstStyle/>
+            <a:p>
+              <a:pPr algn="ctr"/>
+              <a:endParaRPr lang="en-US" dirty="0"/>
+            </a:p>
+          </p:txBody>
+        </p:sp>
+        <p:sp>
+          <p:nvSpPr>
+            <p:cNvPr id="24" name="Right Arrow 23">
+              <a:extLst>
+                <a:ext uri="{FF2B5EF4-FFF2-40B4-BE49-F238E27FC236}">
+                  <a16:creationId xmlns:a16="http://schemas.microsoft.com/office/drawing/2014/main" id="{01A552C4-11C1-C6D1-7BEC-4343962CAF3C}"/>
+                </a:ext>
+              </a:extLst>
+            </p:cNvPr>
+            <p:cNvSpPr/>
+            <p:nvPr/>
+          </p:nvSpPr>
+          <p:spPr>
+            <a:xfrm rot="10800000">
+              <a:off x="7440888" y="5649078"/>
+              <a:ext cx="201021" cy="107992"/>
+            </a:xfrm>
+            <a:prstGeom prst="rightArrow">
+              <a:avLst/>
+            </a:prstGeom>
+          </p:spPr>
+          <p:style>
+            <a:lnRef idx="2">
+              <a:schemeClr val="dk1">
+                <a:shade val="15000"/>
+              </a:schemeClr>
+            </a:lnRef>
+            <a:fillRef idx="1">
+              <a:schemeClr val="dk1"/>
+            </a:fillRef>
+            <a:effectRef idx="0">
+              <a:schemeClr val="dk1"/>
+            </a:effectRef>
+            <a:fontRef idx="minor">
+              <a:schemeClr val="lt1"/>
+            </a:fontRef>
+          </p:style>
+          <p:txBody>
+            <a:bodyPr rtlCol="0" anchor="ctr"/>
+            <a:lstStyle/>
+            <a:p>
+              <a:pPr algn="ctr"/>
+              <a:endParaRPr lang="en-US" dirty="0"/>
+            </a:p>
+          </p:txBody>
+        </p:sp>
+        <p:sp>
+          <p:nvSpPr>
+            <p:cNvPr id="18" name="Rectangle 17">
+              <a:extLst>
+                <a:ext uri="{FF2B5EF4-FFF2-40B4-BE49-F238E27FC236}">
+                  <a16:creationId xmlns:a16="http://schemas.microsoft.com/office/drawing/2014/main" id="{C635E028-E91F-E003-0CBC-F5915DA665C0}"/>
+                </a:ext>
+              </a:extLst>
+            </p:cNvPr>
+            <p:cNvSpPr/>
+            <p:nvPr/>
+          </p:nvSpPr>
+          <p:spPr>
+            <a:xfrm>
+              <a:off x="1976611" y="7094202"/>
+              <a:ext cx="502256" cy="199821"/>
+            </a:xfrm>
+            <a:prstGeom prst="rect">
+              <a:avLst/>
+            </a:prstGeom>
+            <a:solidFill>
+              <a:srgbClr val="00B050"/>
+            </a:solidFill>
+            <a:ln>
+              <a:solidFill>
+                <a:schemeClr val="tx1"/>
+              </a:solidFill>
+            </a:ln>
+          </p:spPr>
+          <p:style>
+            <a:lnRef idx="0">
+              <a:schemeClr val="accent6"/>
+            </a:lnRef>
+            <a:fillRef idx="3">
+              <a:schemeClr val="accent6"/>
+            </a:fillRef>
+            <a:effectRef idx="3">
+              <a:schemeClr val="accent6"/>
+            </a:effectRef>
+            <a:fontRef idx="minor">
+              <a:schemeClr val="lt1"/>
+            </a:fontRef>
+          </p:style>
+          <p:txBody>
+            <a:bodyPr rtlCol="0" anchor="ctr"/>
+            <a:lstStyle/>
+            <a:p>
+              <a:pPr algn="ctr"/>
+              <a:endParaRPr lang="en-US" dirty="0">
+                <a:latin typeface="Modern No. 20" panose="02070704070505020303" pitchFamily="18" charset="77"/>
+              </a:endParaRPr>
+            </a:p>
+          </p:txBody>
+        </p:sp>
+        <p:sp>
+          <p:nvSpPr>
+            <p:cNvPr id="29" name="Rectangle 28">
+              <a:extLst>
+                <a:ext uri="{FF2B5EF4-FFF2-40B4-BE49-F238E27FC236}">
+                  <a16:creationId xmlns:a16="http://schemas.microsoft.com/office/drawing/2014/main" id="{841AC02D-5CF9-5809-2758-0DC6EB012667}"/>
+                </a:ext>
+              </a:extLst>
+            </p:cNvPr>
+            <p:cNvSpPr/>
+            <p:nvPr/>
+          </p:nvSpPr>
+          <p:spPr>
+            <a:xfrm>
+              <a:off x="1976610" y="7349013"/>
+              <a:ext cx="502257" cy="199821"/>
+            </a:xfrm>
+            <a:prstGeom prst="rect">
+              <a:avLst/>
+            </a:prstGeom>
+            <a:ln w="9525">
+              <a:solidFill>
+                <a:schemeClr val="tx1"/>
+              </a:solidFill>
+            </a:ln>
+            <a:effectLst>
+              <a:outerShdw blurRad="50800" dist="38100" dir="5400000" algn="t" rotWithShape="0">
+                <a:prstClr val="black">
+                  <a:alpha val="40000"/>
+                </a:prstClr>
+              </a:outerShdw>
+            </a:effectLst>
+          </p:spPr>
+          <p:style>
+            <a:lnRef idx="3">
+              <a:schemeClr val="lt1"/>
+            </a:lnRef>
+            <a:fillRef idx="1">
+              <a:schemeClr val="accent2"/>
+            </a:fillRef>
+            <a:effectRef idx="1">
+              <a:schemeClr val="accent2"/>
+            </a:effectRef>
+            <a:fontRef idx="minor">
+              <a:schemeClr val="lt1"/>
+            </a:fontRef>
+          </p:style>
+          <p:txBody>
+            <a:bodyPr rtlCol="0" anchor="ctr"/>
+            <a:lstStyle/>
+            <a:p>
+              <a:pPr algn="ctr"/>
+              <a:endParaRPr lang="en-US" dirty="0">
+                <a:latin typeface="Modern No. 20" panose="02070704070505020303" pitchFamily="18" charset="77"/>
+              </a:endParaRPr>
+            </a:p>
+          </p:txBody>
+        </p:sp>
+        <p:sp>
+          <p:nvSpPr>
+            <p:cNvPr id="30" name="Rectangle 29">
+              <a:extLst>
+                <a:ext uri="{FF2B5EF4-FFF2-40B4-BE49-F238E27FC236}">
+                  <a16:creationId xmlns:a16="http://schemas.microsoft.com/office/drawing/2014/main" id="{082C0DED-F960-FCAB-9ECF-8B8276DFDE2D}"/>
+                </a:ext>
+              </a:extLst>
+            </p:cNvPr>
+            <p:cNvSpPr/>
+            <p:nvPr/>
+          </p:nvSpPr>
+          <p:spPr>
+            <a:xfrm>
+              <a:off x="4140026" y="7094202"/>
+              <a:ext cx="502256" cy="199821"/>
+            </a:xfrm>
+            <a:prstGeom prst="rect">
+              <a:avLst/>
+            </a:prstGeom>
+            <a:ln w="9525">
+              <a:solidFill>
+                <a:schemeClr val="tx1"/>
+              </a:solidFill>
+            </a:ln>
+            <a:effectLst>
+              <a:outerShdw blurRad="50800" dist="38100" dir="5400000" algn="t" rotWithShape="0">
+                <a:prstClr val="black">
+                  <a:alpha val="40000"/>
+                </a:prstClr>
+              </a:outerShdw>
+            </a:effectLst>
+          </p:spPr>
+          <p:style>
+            <a:lnRef idx="3">
+              <a:schemeClr val="lt1"/>
+            </a:lnRef>
+            <a:fillRef idx="1">
+              <a:schemeClr val="accent5"/>
+            </a:fillRef>
+            <a:effectRef idx="1">
+              <a:schemeClr val="accent5"/>
+            </a:effectRef>
+            <a:fontRef idx="minor">
+              <a:schemeClr val="lt1"/>
+            </a:fontRef>
+          </p:style>
+          <p:txBody>
+            <a:bodyPr rtlCol="0" anchor="ctr"/>
+            <a:lstStyle/>
+            <a:p>
+              <a:pPr algn="ctr"/>
+              <a:endParaRPr lang="en-US" dirty="0">
+                <a:latin typeface="Modern No. 20" panose="02070704070505020303" pitchFamily="18" charset="77"/>
+              </a:endParaRPr>
+            </a:p>
+          </p:txBody>
+        </p:sp>
+        <p:sp>
+          <p:nvSpPr>
+            <p:cNvPr id="31" name="Rectangle 30">
+              <a:extLst>
+                <a:ext uri="{FF2B5EF4-FFF2-40B4-BE49-F238E27FC236}">
+                  <a16:creationId xmlns:a16="http://schemas.microsoft.com/office/drawing/2014/main" id="{109C8E18-356E-C7F8-5C4D-B49F04E320F9}"/>
+                </a:ext>
+              </a:extLst>
+            </p:cNvPr>
+            <p:cNvSpPr/>
+            <p:nvPr/>
+          </p:nvSpPr>
+          <p:spPr>
+            <a:xfrm>
+              <a:off x="4140025" y="7349013"/>
+              <a:ext cx="502258" cy="199821"/>
+            </a:xfrm>
+            <a:prstGeom prst="rect">
+              <a:avLst/>
+            </a:prstGeom>
+            <a:solidFill>
+              <a:srgbClr val="00B0F0"/>
+            </a:solidFill>
+            <a:ln>
+              <a:solidFill>
+                <a:schemeClr val="tx1"/>
+              </a:solidFill>
+            </a:ln>
+          </p:spPr>
+          <p:style>
+            <a:lnRef idx="0">
+              <a:schemeClr val="accent4"/>
+            </a:lnRef>
+            <a:fillRef idx="3">
+              <a:schemeClr val="accent4"/>
+            </a:fillRef>
+            <a:effectRef idx="3">
+              <a:schemeClr val="accent4"/>
+            </a:effectRef>
+            <a:fontRef idx="minor">
+              <a:schemeClr val="lt1"/>
+            </a:fontRef>
+          </p:style>
+          <p:txBody>
+            <a:bodyPr rtlCol="0" anchor="ctr"/>
+            <a:lstStyle/>
+            <a:p>
+              <a:pPr algn="ctr"/>
+              <a:endParaRPr lang="en-US" dirty="0">
+                <a:latin typeface="Modern No. 20" panose="02070704070505020303" pitchFamily="18" charset="77"/>
+              </a:endParaRPr>
+            </a:p>
+          </p:txBody>
+        </p:sp>
+        <p:sp>
+          <p:nvSpPr>
+            <p:cNvPr id="32" name="TextBox 31">
+              <a:extLst>
+                <a:ext uri="{FF2B5EF4-FFF2-40B4-BE49-F238E27FC236}">
+                  <a16:creationId xmlns:a16="http://schemas.microsoft.com/office/drawing/2014/main" id="{C3308D90-37D9-8CE3-63E1-18C82C0AF46E}"/>
+                </a:ext>
+              </a:extLst>
+            </p:cNvPr>
+            <p:cNvSpPr txBox="1"/>
+            <p:nvPr/>
+          </p:nvSpPr>
+          <p:spPr>
+            <a:xfrm>
+              <a:off x="2460178" y="7040224"/>
+              <a:ext cx="1303562" cy="307777"/>
+            </a:xfrm>
+            <a:prstGeom prst="rect">
+              <a:avLst/>
+            </a:prstGeom>
+            <a:noFill/>
+          </p:spPr>
+          <p:txBody>
+            <a:bodyPr wrap="none" rtlCol="0">
+              <a:spAutoFit/>
+            </a:bodyPr>
+            <a:lstStyle/>
+            <a:p>
+              <a:r>
+                <a:rPr lang="en-US" sz="1400" dirty="0">
+                  <a:latin typeface="Modern No. 20" panose="02070704070505020303" pitchFamily="18" charset="77"/>
+                </a:rPr>
+                <a:t>Removing Data</a:t>
+              </a:r>
+            </a:p>
+          </p:txBody>
+        </p:sp>
+        <p:sp>
+          <p:nvSpPr>
+            <p:cNvPr id="33" name="TextBox 32">
+              <a:extLst>
+                <a:ext uri="{FF2B5EF4-FFF2-40B4-BE49-F238E27FC236}">
+                  <a16:creationId xmlns:a16="http://schemas.microsoft.com/office/drawing/2014/main" id="{3B49EBBB-0D79-7709-9FAC-2E41BE9EADA9}"/>
+                </a:ext>
+              </a:extLst>
+            </p:cNvPr>
+            <p:cNvSpPr txBox="1"/>
+            <p:nvPr/>
+          </p:nvSpPr>
+          <p:spPr>
+            <a:xfrm>
+              <a:off x="2466091" y="7295035"/>
+              <a:ext cx="1713931" cy="307777"/>
+            </a:xfrm>
+            <a:prstGeom prst="rect">
+              <a:avLst/>
+            </a:prstGeom>
+            <a:noFill/>
+          </p:spPr>
+          <p:txBody>
+            <a:bodyPr wrap="none" rtlCol="0">
+              <a:spAutoFit/>
+            </a:bodyPr>
+            <a:lstStyle/>
+            <a:p>
+              <a:r>
+                <a:rPr lang="en-US" sz="1400" dirty="0">
+                  <a:latin typeface="Modern No. 20" panose="02070704070505020303" pitchFamily="18" charset="77"/>
+                </a:rPr>
+                <a:t>Rearranging in Time</a:t>
+              </a:r>
+            </a:p>
+          </p:txBody>
+        </p:sp>
+        <p:sp>
+          <p:nvSpPr>
+            <p:cNvPr id="34" name="TextBox 33">
+              <a:extLst>
+                <a:ext uri="{FF2B5EF4-FFF2-40B4-BE49-F238E27FC236}">
+                  <a16:creationId xmlns:a16="http://schemas.microsoft.com/office/drawing/2014/main" id="{B9C90A28-1771-647C-D83D-BE8D3A201966}"/>
+                </a:ext>
+              </a:extLst>
+            </p:cNvPr>
+            <p:cNvSpPr txBox="1"/>
+            <p:nvPr/>
+          </p:nvSpPr>
+          <p:spPr>
+            <a:xfrm>
+              <a:off x="4642281" y="7040224"/>
+              <a:ext cx="1096775" cy="307777"/>
+            </a:xfrm>
+            <a:prstGeom prst="rect">
+              <a:avLst/>
+            </a:prstGeom>
+            <a:noFill/>
+          </p:spPr>
+          <p:txBody>
+            <a:bodyPr wrap="none" rtlCol="0">
+              <a:spAutoFit/>
+            </a:bodyPr>
+            <a:lstStyle/>
+            <a:p>
+              <a:r>
+                <a:rPr lang="en-US" sz="1400" dirty="0">
+                  <a:latin typeface="Modern No. 20" panose="02070704070505020303" pitchFamily="18" charset="77"/>
+                </a:rPr>
+                <a:t>Filling Data</a:t>
+              </a:r>
+            </a:p>
+          </p:txBody>
+        </p:sp>
+        <p:sp>
+          <p:nvSpPr>
+            <p:cNvPr id="35" name="TextBox 34">
+              <a:extLst>
+                <a:ext uri="{FF2B5EF4-FFF2-40B4-BE49-F238E27FC236}">
+                  <a16:creationId xmlns:a16="http://schemas.microsoft.com/office/drawing/2014/main" id="{14FA03F5-5821-0A24-1630-CD53670E2858}"/>
+                </a:ext>
+              </a:extLst>
+            </p:cNvPr>
+            <p:cNvSpPr txBox="1"/>
+            <p:nvPr/>
+          </p:nvSpPr>
+          <p:spPr>
+            <a:xfrm>
+              <a:off x="4642280" y="7295035"/>
+              <a:ext cx="1269899" cy="307777"/>
+            </a:xfrm>
+            <a:prstGeom prst="rect">
+              <a:avLst/>
+            </a:prstGeom>
+            <a:noFill/>
+          </p:spPr>
+          <p:txBody>
+            <a:bodyPr wrap="none" rtlCol="0">
+              <a:spAutoFit/>
+            </a:bodyPr>
+            <a:lstStyle/>
+            <a:p>
+              <a:r>
+                <a:rPr lang="en-US" sz="1400" dirty="0">
+                  <a:latin typeface="Modern No. 20" panose="02070704070505020303" pitchFamily="18" charset="77"/>
+                </a:rPr>
+                <a:t>Changing Data</a:t>
+              </a:r>
+            </a:p>
+          </p:txBody>
+        </p:sp>
+        <p:sp>
+          <p:nvSpPr>
+            <p:cNvPr id="39" name="Parallelogram 38">
+              <a:extLst>
+                <a:ext uri="{FF2B5EF4-FFF2-40B4-BE49-F238E27FC236}">
+                  <a16:creationId xmlns:a16="http://schemas.microsoft.com/office/drawing/2014/main" id="{53EB4C7A-8C88-1682-C667-1AEACD6F74DD}"/>
+                </a:ext>
+              </a:extLst>
+            </p:cNvPr>
+            <p:cNvSpPr/>
+            <p:nvPr/>
+          </p:nvSpPr>
+          <p:spPr>
+            <a:xfrm>
+              <a:off x="6180806" y="6248552"/>
+              <a:ext cx="2829770" cy="567159"/>
+            </a:xfrm>
+            <a:prstGeom prst="parallelogram">
+              <a:avLst/>
+            </a:prstGeom>
+            <a:ln w="9525">
+              <a:solidFill>
+                <a:schemeClr val="tx1"/>
+              </a:solidFill>
+            </a:ln>
+            <a:effectLst>
+              <a:outerShdw blurRad="50800" dist="38100" dir="5400000" algn="t" rotWithShape="0">
+                <a:prstClr val="black">
+                  <a:alpha val="40000"/>
+                </a:prstClr>
+              </a:outerShdw>
+            </a:effectLst>
+          </p:spPr>
+          <p:style>
+            <a:lnRef idx="2">
+              <a:schemeClr val="accent1">
+                <a:shade val="15000"/>
+              </a:schemeClr>
+            </a:lnRef>
+            <a:fillRef idx="1">
+              <a:schemeClr val="accent1"/>
+            </a:fillRef>
+            <a:effectRef idx="0">
+              <a:schemeClr val="accent1"/>
+            </a:effectRef>
+            <a:fontRef idx="minor">
+              <a:schemeClr val="lt1"/>
+            </a:fontRef>
+          </p:style>
+          <p:txBody>
+            <a:bodyPr rtlCol="0" anchor="ctr"/>
+            <a:lstStyle/>
+            <a:p>
+              <a:pPr algn="ctr"/>
+              <a:r>
+                <a:rPr lang="en-US" dirty="0">
+                  <a:latin typeface="Modern No. 20" panose="02070704070505020303" pitchFamily="18" charset="77"/>
+                </a:rPr>
+                <a:t>Filtered, Continuous Data</a:t>
+              </a:r>
+            </a:p>
+          </p:txBody>
+        </p:sp>
+        <p:sp>
+          <p:nvSpPr>
+            <p:cNvPr id="6" name="Rectangle 5">
+              <a:extLst>
+                <a:ext uri="{FF2B5EF4-FFF2-40B4-BE49-F238E27FC236}">
+                  <a16:creationId xmlns:a16="http://schemas.microsoft.com/office/drawing/2014/main" id="{74037322-70D7-48D0-D0DE-2FE4126AC0BA}"/>
+                </a:ext>
+              </a:extLst>
+            </p:cNvPr>
+            <p:cNvSpPr/>
+            <p:nvPr/>
+          </p:nvSpPr>
+          <p:spPr>
+            <a:xfrm>
+              <a:off x="7064273" y="4582432"/>
+              <a:ext cx="1949291" cy="601883"/>
+            </a:xfrm>
+            <a:prstGeom prst="rect">
+              <a:avLst/>
+            </a:prstGeom>
+            <a:solidFill>
+              <a:srgbClr val="00B050"/>
+            </a:solidFill>
+            <a:ln>
+              <a:solidFill>
+                <a:schemeClr val="tx1"/>
+              </a:solidFill>
+            </a:ln>
+            <a:effectLst>
+              <a:outerShdw blurRad="50800" dist="38100" dir="5400000" algn="t" rotWithShape="0">
+                <a:prstClr val="black">
+                  <a:alpha val="40000"/>
+                </a:prstClr>
+              </a:outerShdw>
+            </a:effectLst>
+          </p:spPr>
+          <p:style>
+            <a:lnRef idx="0">
+              <a:schemeClr val="accent6"/>
+            </a:lnRef>
+            <a:fillRef idx="3">
+              <a:schemeClr val="accent6"/>
+            </a:fillRef>
+            <a:effectRef idx="3">
+              <a:schemeClr val="accent6"/>
+            </a:effectRef>
+            <a:fontRef idx="minor">
+              <a:schemeClr val="lt1"/>
+            </a:fontRef>
+          </p:style>
+          <p:txBody>
+            <a:bodyPr rtlCol="0" anchor="ctr"/>
+            <a:lstStyle/>
+            <a:p>
+              <a:pPr algn="ctr"/>
+              <a:r>
+                <a:rPr lang="en-US" dirty="0">
+                  <a:latin typeface="Modern No. 20" panose="02070704070505020303" pitchFamily="18" charset="77"/>
+                </a:rPr>
+                <a:t>Power-Wind Mag. Window Filter</a:t>
+              </a:r>
+            </a:p>
+          </p:txBody>
+        </p:sp>
+        <p:sp>
+          <p:nvSpPr>
+            <p:cNvPr id="17" name="Right Arrow 16">
+              <a:extLst>
+                <a:ext uri="{FF2B5EF4-FFF2-40B4-BE49-F238E27FC236}">
+                  <a16:creationId xmlns:a16="http://schemas.microsoft.com/office/drawing/2014/main" id="{260F1507-2FEA-10CA-1310-43AEF5602BE3}"/>
+                </a:ext>
+              </a:extLst>
+            </p:cNvPr>
+            <p:cNvSpPr/>
+            <p:nvPr/>
+          </p:nvSpPr>
+          <p:spPr>
+            <a:xfrm rot="10800000">
+              <a:off x="4996164" y="5641377"/>
+              <a:ext cx="201021" cy="107992"/>
+            </a:xfrm>
+            <a:prstGeom prst="rightArrow">
+              <a:avLst/>
+            </a:prstGeom>
+          </p:spPr>
+          <p:style>
+            <a:lnRef idx="2">
+              <a:schemeClr val="dk1">
+                <a:shade val="15000"/>
+              </a:schemeClr>
+            </a:lnRef>
+            <a:fillRef idx="1">
+              <a:schemeClr val="dk1"/>
+            </a:fillRef>
+            <a:effectRef idx="0">
+              <a:schemeClr val="dk1"/>
+            </a:effectRef>
+            <a:fontRef idx="minor">
+              <a:schemeClr val="lt1"/>
+            </a:fontRef>
+          </p:style>
+          <p:txBody>
+            <a:bodyPr rtlCol="0" anchor="ctr"/>
+            <a:lstStyle/>
+            <a:p>
+              <a:pPr algn="ctr"/>
+              <a:endParaRPr lang="en-US" dirty="0"/>
+            </a:p>
+          </p:txBody>
+        </p:sp>
+        <p:sp>
+          <p:nvSpPr>
+            <p:cNvPr id="41" name="Right Arrow 40">
+              <a:extLst>
+                <a:ext uri="{FF2B5EF4-FFF2-40B4-BE49-F238E27FC236}">
+                  <a16:creationId xmlns:a16="http://schemas.microsoft.com/office/drawing/2014/main" id="{C2C2BE35-5223-100E-0735-B3642E93D93E}"/>
+                </a:ext>
+              </a:extLst>
+            </p:cNvPr>
+            <p:cNvSpPr/>
+            <p:nvPr/>
+          </p:nvSpPr>
+          <p:spPr>
+            <a:xfrm>
+              <a:off x="6849594" y="4828724"/>
+              <a:ext cx="201021" cy="107992"/>
+            </a:xfrm>
+            <a:prstGeom prst="rightArrow">
+              <a:avLst/>
+            </a:prstGeom>
+          </p:spPr>
+          <p:style>
+            <a:lnRef idx="2">
+              <a:schemeClr val="dk1">
+                <a:shade val="15000"/>
+              </a:schemeClr>
+            </a:lnRef>
+            <a:fillRef idx="1">
+              <a:schemeClr val="dk1"/>
+            </a:fillRef>
+            <a:effectRef idx="0">
+              <a:schemeClr val="dk1"/>
+            </a:effectRef>
+            <a:fontRef idx="minor">
+              <a:schemeClr val="lt1"/>
+            </a:fontRef>
+          </p:style>
+          <p:txBody>
+            <a:bodyPr rtlCol="0" anchor="ctr"/>
+            <a:lstStyle/>
+            <a:p>
+              <a:pPr algn="ctr"/>
+              <a:endParaRPr lang="en-US" dirty="0"/>
+            </a:p>
+          </p:txBody>
+        </p:sp>
+        <p:sp>
+          <p:nvSpPr>
+            <p:cNvPr id="42" name="Right Arrow 41">
+              <a:extLst>
+                <a:ext uri="{FF2B5EF4-FFF2-40B4-BE49-F238E27FC236}">
+                  <a16:creationId xmlns:a16="http://schemas.microsoft.com/office/drawing/2014/main" id="{61835A66-A0D1-AA89-E4DF-39FD41464ABE}"/>
+                </a:ext>
+              </a:extLst>
+            </p:cNvPr>
+            <p:cNvSpPr/>
+            <p:nvPr/>
+          </p:nvSpPr>
+          <p:spPr>
+            <a:xfrm rot="10800000">
+              <a:off x="3534788" y="5635009"/>
+              <a:ext cx="201021" cy="107992"/>
+            </a:xfrm>
+            <a:prstGeom prst="rightArrow">
+              <a:avLst/>
+            </a:prstGeom>
+          </p:spPr>
+          <p:style>
+            <a:lnRef idx="2">
+              <a:schemeClr val="dk1">
+                <a:shade val="15000"/>
+              </a:schemeClr>
+            </a:lnRef>
+            <a:fillRef idx="1">
+              <a:schemeClr val="dk1"/>
+            </a:fillRef>
+            <a:effectRef idx="0">
+              <a:schemeClr val="dk1"/>
+            </a:effectRef>
+            <a:fontRef idx="minor">
+              <a:schemeClr val="lt1"/>
+            </a:fontRef>
+          </p:style>
+          <p:txBody>
+            <a:bodyPr rtlCol="0" anchor="ctr"/>
+            <a:lstStyle/>
+            <a:p>
+              <a:pPr algn="ctr"/>
+              <a:endParaRPr lang="en-US" dirty="0"/>
+            </a:p>
+          </p:txBody>
+        </p:sp>
+        <p:sp>
+          <p:nvSpPr>
+            <p:cNvPr id="43" name="Right Arrow 42">
+              <a:extLst>
+                <a:ext uri="{FF2B5EF4-FFF2-40B4-BE49-F238E27FC236}">
+                  <a16:creationId xmlns:a16="http://schemas.microsoft.com/office/drawing/2014/main" id="{EAD007AC-7608-44BB-6664-8A2C91BD517B}"/>
+                </a:ext>
+              </a:extLst>
+            </p:cNvPr>
+            <p:cNvSpPr/>
+            <p:nvPr/>
+          </p:nvSpPr>
+          <p:spPr>
+            <a:xfrm>
+              <a:off x="4254537" y="6468805"/>
+              <a:ext cx="201021" cy="107992"/>
+            </a:xfrm>
+            <a:prstGeom prst="rightArrow">
+              <a:avLst/>
+            </a:prstGeom>
+          </p:spPr>
+          <p:style>
+            <a:lnRef idx="2">
+              <a:schemeClr val="dk1">
+                <a:shade val="15000"/>
+              </a:schemeClr>
+            </a:lnRef>
+            <a:fillRef idx="1">
+              <a:schemeClr val="dk1"/>
+            </a:fillRef>
+            <a:effectRef idx="0">
+              <a:schemeClr val="dk1"/>
+            </a:effectRef>
+            <a:fontRef idx="minor">
+              <a:schemeClr val="lt1"/>
+            </a:fontRef>
+          </p:style>
+          <p:txBody>
+            <a:bodyPr rtlCol="0" anchor="ctr"/>
+            <a:lstStyle/>
+            <a:p>
+              <a:pPr algn="ctr"/>
+              <a:endParaRPr lang="en-US" dirty="0"/>
+            </a:p>
+          </p:txBody>
+        </p:sp>
+        <p:sp>
+          <p:nvSpPr>
+            <p:cNvPr id="44" name="Right Arrow 43">
+              <a:extLst>
+                <a:ext uri="{FF2B5EF4-FFF2-40B4-BE49-F238E27FC236}">
+                  <a16:creationId xmlns:a16="http://schemas.microsoft.com/office/drawing/2014/main" id="{B5EA8046-3D6A-40C7-7C68-A7E22EC4124E}"/>
+                </a:ext>
+              </a:extLst>
+            </p:cNvPr>
+            <p:cNvSpPr/>
+            <p:nvPr/>
+          </p:nvSpPr>
+          <p:spPr>
+            <a:xfrm rot="5400000">
+              <a:off x="2683453" y="6054870"/>
+              <a:ext cx="201021" cy="107992"/>
+            </a:xfrm>
+            <a:prstGeom prst="rightArrow">
+              <a:avLst/>
+            </a:prstGeom>
+          </p:spPr>
+          <p:style>
+            <a:lnRef idx="2">
+              <a:schemeClr val="dk1">
+                <a:shade val="15000"/>
+              </a:schemeClr>
+            </a:lnRef>
+            <a:fillRef idx="1">
+              <a:schemeClr val="dk1"/>
+            </a:fillRef>
+            <a:effectRef idx="0">
+              <a:schemeClr val="dk1"/>
+            </a:effectRef>
+            <a:fontRef idx="minor">
+              <a:schemeClr val="lt1"/>
+            </a:fontRef>
+          </p:style>
+          <p:txBody>
+            <a:bodyPr rtlCol="0" anchor="ctr"/>
+            <a:lstStyle/>
+            <a:p>
+              <a:pPr algn="ctr"/>
+              <a:endParaRPr lang="en-US" dirty="0"/>
+            </a:p>
+          </p:txBody>
+        </p:sp>
+        <p:sp>
+          <p:nvSpPr>
+            <p:cNvPr id="10" name="Right Arrow 9">
+              <a:extLst>
+                <a:ext uri="{FF2B5EF4-FFF2-40B4-BE49-F238E27FC236}">
+                  <a16:creationId xmlns:a16="http://schemas.microsoft.com/office/drawing/2014/main" id="{E75E70E0-D231-834F-C65C-9D3CD17006D1}"/>
+                </a:ext>
+              </a:extLst>
+            </p:cNvPr>
+            <p:cNvSpPr/>
+            <p:nvPr/>
+          </p:nvSpPr>
+          <p:spPr>
+            <a:xfrm>
+              <a:off x="3141242" y="6469916"/>
+              <a:ext cx="201021" cy="107992"/>
+            </a:xfrm>
+            <a:prstGeom prst="rightArrow">
+              <a:avLst/>
+            </a:prstGeom>
+          </p:spPr>
+          <p:style>
+            <a:lnRef idx="2">
+              <a:schemeClr val="dk1">
+                <a:shade val="15000"/>
+              </a:schemeClr>
+            </a:lnRef>
+            <a:fillRef idx="1">
+              <a:schemeClr val="dk1"/>
+            </a:fillRef>
+            <a:effectRef idx="0">
+              <a:schemeClr val="dk1"/>
+            </a:effectRef>
+            <a:fontRef idx="minor">
+              <a:schemeClr val="lt1"/>
+            </a:fontRef>
+          </p:style>
+          <p:txBody>
+            <a:bodyPr rtlCol="0" anchor="ctr"/>
+            <a:lstStyle/>
+            <a:p>
+              <a:pPr algn="ctr"/>
+              <a:endParaRPr lang="en-US" dirty="0"/>
+            </a:p>
+          </p:txBody>
+        </p:sp>
+        <p:sp>
+          <p:nvSpPr>
+            <p:cNvPr id="37" name="Parallelogram 36">
+              <a:extLst>
+                <a:ext uri="{FF2B5EF4-FFF2-40B4-BE49-F238E27FC236}">
+                  <a16:creationId xmlns:a16="http://schemas.microsoft.com/office/drawing/2014/main" id="{679DA1A1-2A56-389D-1074-3007B72A1335}"/>
+                </a:ext>
+              </a:extLst>
+            </p:cNvPr>
+            <p:cNvSpPr/>
+            <p:nvPr/>
+          </p:nvSpPr>
+          <p:spPr>
+            <a:xfrm>
+              <a:off x="6178396" y="7232140"/>
+              <a:ext cx="2258568" cy="384048"/>
+            </a:xfrm>
+            <a:prstGeom prst="parallelogram">
+              <a:avLst/>
+            </a:prstGeom>
+            <a:ln w="9525">
+              <a:solidFill>
+                <a:schemeClr val="tx1"/>
+              </a:solidFill>
+            </a:ln>
+            <a:effectLst>
+              <a:outerShdw blurRad="50800" dist="38100" dir="5400000" algn="t" rotWithShape="0">
+                <a:prstClr val="black">
+                  <a:alpha val="40000"/>
+                </a:prstClr>
+              </a:outerShdw>
+            </a:effectLst>
+          </p:spPr>
+          <p:style>
+            <a:lnRef idx="2">
+              <a:schemeClr val="accent1">
+                <a:shade val="15000"/>
+              </a:schemeClr>
+            </a:lnRef>
+            <a:fillRef idx="1">
+              <a:schemeClr val="accent1"/>
+            </a:fillRef>
+            <a:effectRef idx="0">
+              <a:schemeClr val="accent1"/>
+            </a:effectRef>
+            <a:fontRef idx="minor">
+              <a:schemeClr val="lt1"/>
+            </a:fontRef>
+          </p:style>
+          <p:txBody>
+            <a:bodyPr rtlCol="0" anchor="ctr"/>
+            <a:lstStyle/>
+            <a:p>
+              <a:pPr algn="ctr"/>
+              <a:r>
+                <a:rPr lang="en-US" sz="1600" dirty="0">
+                  <a:latin typeface="Modern No. 20" panose="02070704070505020303" pitchFamily="18" charset="77"/>
+                </a:rPr>
+                <a:t>Training</a:t>
+              </a:r>
+              <a:endParaRPr lang="en-US" dirty="0">
+                <a:latin typeface="Modern No. 20" panose="02070704070505020303" pitchFamily="18" charset="77"/>
+              </a:endParaRPr>
+            </a:p>
+          </p:txBody>
+        </p:sp>
+        <p:sp>
+          <p:nvSpPr>
+            <p:cNvPr id="38" name="Parallelogram 37">
+              <a:extLst>
+                <a:ext uri="{FF2B5EF4-FFF2-40B4-BE49-F238E27FC236}">
+                  <a16:creationId xmlns:a16="http://schemas.microsoft.com/office/drawing/2014/main" id="{2AFFDC40-085D-6576-A9E5-FFC2546D13CE}"/>
+                </a:ext>
+              </a:extLst>
+            </p:cNvPr>
+            <p:cNvSpPr/>
+            <p:nvPr/>
+          </p:nvSpPr>
+          <p:spPr>
+            <a:xfrm>
+              <a:off x="8404612" y="7225890"/>
+              <a:ext cx="283464" cy="388962"/>
+            </a:xfrm>
+            <a:prstGeom prst="parallelogram">
+              <a:avLst/>
+            </a:prstGeom>
+            <a:ln w="9525">
+              <a:solidFill>
+                <a:schemeClr val="tx1"/>
+              </a:solidFill>
+            </a:ln>
+            <a:effectLst>
+              <a:outerShdw blurRad="50800" dist="38100" dir="5400000" algn="t" rotWithShape="0">
+                <a:prstClr val="black">
+                  <a:alpha val="40000"/>
+                </a:prstClr>
+              </a:outerShdw>
+            </a:effectLst>
+          </p:spPr>
+          <p:style>
+            <a:lnRef idx="2">
+              <a:schemeClr val="accent1">
+                <a:shade val="15000"/>
+              </a:schemeClr>
+            </a:lnRef>
+            <a:fillRef idx="1">
+              <a:schemeClr val="accent1"/>
+            </a:fillRef>
+            <a:effectRef idx="0">
+              <a:schemeClr val="accent1"/>
+            </a:effectRef>
+            <a:fontRef idx="minor">
+              <a:schemeClr val="lt1"/>
+            </a:fontRef>
+          </p:style>
+          <p:txBody>
+            <a:bodyPr rtlCol="0" anchor="ctr"/>
+            <a:lstStyle/>
+            <a:p>
+              <a:pPr algn="ctr"/>
+              <a:r>
+                <a:rPr lang="en-US" sz="1600" dirty="0">
+                  <a:latin typeface="Modern No. 20" panose="02070704070505020303" pitchFamily="18" charset="77"/>
+                </a:rPr>
+                <a:t>V</a:t>
+              </a:r>
+              <a:endParaRPr lang="en-US" dirty="0">
+                <a:latin typeface="Modern No. 20" panose="02070704070505020303" pitchFamily="18" charset="77"/>
+              </a:endParaRPr>
+            </a:p>
+          </p:txBody>
+        </p:sp>
+        <p:sp>
+          <p:nvSpPr>
+            <p:cNvPr id="40" name="Parallelogram 39">
+              <a:extLst>
+                <a:ext uri="{FF2B5EF4-FFF2-40B4-BE49-F238E27FC236}">
+                  <a16:creationId xmlns:a16="http://schemas.microsoft.com/office/drawing/2014/main" id="{6F9E6FD2-60E3-5653-90B5-75AE7967BBF5}"/>
+                </a:ext>
+              </a:extLst>
+            </p:cNvPr>
+            <p:cNvSpPr/>
+            <p:nvPr/>
+          </p:nvSpPr>
+          <p:spPr>
+            <a:xfrm>
+              <a:off x="8658860" y="7232140"/>
+              <a:ext cx="283464" cy="380491"/>
+            </a:xfrm>
+            <a:prstGeom prst="parallelogram">
+              <a:avLst/>
+            </a:prstGeom>
+            <a:ln w="9525">
+              <a:solidFill>
+                <a:schemeClr val="tx1"/>
+              </a:solidFill>
+            </a:ln>
+            <a:effectLst>
+              <a:outerShdw blurRad="50800" dist="38100" dir="5400000" algn="t" rotWithShape="0">
+                <a:prstClr val="black">
+                  <a:alpha val="40000"/>
+                </a:prstClr>
+              </a:outerShdw>
+            </a:effectLst>
+          </p:spPr>
+          <p:style>
+            <a:lnRef idx="2">
+              <a:schemeClr val="accent1">
+                <a:shade val="15000"/>
+              </a:schemeClr>
+            </a:lnRef>
+            <a:fillRef idx="1">
+              <a:schemeClr val="accent1"/>
+            </a:fillRef>
+            <a:effectRef idx="0">
+              <a:schemeClr val="accent1"/>
+            </a:effectRef>
+            <a:fontRef idx="minor">
+              <a:schemeClr val="lt1"/>
+            </a:fontRef>
+          </p:style>
+          <p:txBody>
+            <a:bodyPr rtlCol="0" anchor="ctr"/>
+            <a:lstStyle/>
+            <a:p>
+              <a:pPr algn="ctr"/>
+              <a:r>
+                <a:rPr lang="en-US" sz="1600" dirty="0">
+                  <a:latin typeface="Modern No. 20" panose="02070704070505020303" pitchFamily="18" charset="77"/>
+                </a:rPr>
+                <a:t>T</a:t>
+              </a:r>
+              <a:endParaRPr lang="en-US" dirty="0">
+                <a:latin typeface="Modern No. 20" panose="02070704070505020303" pitchFamily="18" charset="77"/>
+              </a:endParaRPr>
+            </a:p>
+          </p:txBody>
+        </p:sp>
+        <p:sp>
+          <p:nvSpPr>
+            <p:cNvPr id="25" name="Right Arrow 24">
+              <a:extLst>
+                <a:ext uri="{FF2B5EF4-FFF2-40B4-BE49-F238E27FC236}">
+                  <a16:creationId xmlns:a16="http://schemas.microsoft.com/office/drawing/2014/main" id="{9EFB3E00-75E1-2827-6DF7-A80496959A81}"/>
+                </a:ext>
+              </a:extLst>
+            </p:cNvPr>
+            <p:cNvSpPr/>
+            <p:nvPr/>
+          </p:nvSpPr>
+          <p:spPr>
+            <a:xfrm>
+              <a:off x="6040351" y="6468805"/>
+              <a:ext cx="201021" cy="107992"/>
+            </a:xfrm>
+            <a:prstGeom prst="rightArrow">
+              <a:avLst/>
+            </a:prstGeom>
+          </p:spPr>
+          <p:style>
+            <a:lnRef idx="2">
+              <a:schemeClr val="dk1">
+                <a:shade val="15000"/>
+              </a:schemeClr>
+            </a:lnRef>
+            <a:fillRef idx="1">
+              <a:schemeClr val="dk1"/>
+            </a:fillRef>
+            <a:effectRef idx="0">
+              <a:schemeClr val="dk1"/>
+            </a:effectRef>
+            <a:fontRef idx="minor">
+              <a:schemeClr val="lt1"/>
+            </a:fontRef>
+          </p:style>
+          <p:txBody>
+            <a:bodyPr rtlCol="0" anchor="ctr"/>
+            <a:lstStyle/>
+            <a:p>
+              <a:pPr algn="ctr"/>
+              <a:endParaRPr lang="en-US" dirty="0"/>
+            </a:p>
+          </p:txBody>
+        </p:sp>
+      </p:grpSp>
+    </p:spTree>
+    <p:extLst>
+      <p:ext uri="{BB962C8B-B14F-4D97-AF65-F5344CB8AC3E}">
+        <p14:creationId xmlns:p14="http://schemas.microsoft.com/office/powerpoint/2010/main" val="1338289331"/>
+      </p:ext>
+    </p:extLst>
+  </p:cSld>
+  <p:clrMapOvr>
+    <a:masterClrMapping/>
+  </p:clrMapOvr>
+</p:sld>
+</file>
+
+<file path=ppt/slides/slide4.xml><?xml version="1.0" encoding="utf-8"?>
+<p:sld xmlns:a="http://schemas.openxmlformats.org/drawingml/2006/main" xmlns:r="http://schemas.openxmlformats.org/officeDocument/2006/relationships" xmlns:p="http://schemas.openxmlformats.org/presentationml/2006/main">
+  <p:cSld>
+    <p:spTree>
+      <p:nvGrpSpPr>
+        <p:cNvPr id="1" name="">
+          <a:extLst>
+            <a:ext uri="{FF2B5EF4-FFF2-40B4-BE49-F238E27FC236}">
               <a16:creationId xmlns:a16="http://schemas.microsoft.com/office/drawing/2014/main" id="{AC20E498-BC00-8D85-72B4-FFBD2E381A59}"/>
             </a:ext>
           </a:extLst>
@@ -9183,7 +11507,7 @@
 </p:sld>
 </file>
 
-<file path=ppt/slides/slide4.xml><?xml version="1.0" encoding="utf-8"?>
+<file path=ppt/slides/slide5.xml><?xml version="1.0" encoding="utf-8"?>
 <p:sld xmlns:a="http://schemas.openxmlformats.org/drawingml/2006/main" xmlns:r="http://schemas.openxmlformats.org/officeDocument/2006/relationships" xmlns:p="http://schemas.openxmlformats.org/presentationml/2006/main">
   <p:cSld>
     <p:spTree>
@@ -9653,8 +11977,8 @@
             </a:p>
           </p:txBody>
         </p:sp>
-        <mc:AlternateContent xmlns:mc="http://schemas.openxmlformats.org/markup-compatibility/2006">
-          <mc:Choice xmlns:a14="http://schemas.microsoft.com/office/drawing/2010/main" Requires="a14">
+        <mc:AlternateContent xmlns:mc="http://schemas.openxmlformats.org/markup-compatibility/2006" xmlns:a14="http://schemas.microsoft.com/office/drawing/2010/main">
+          <mc:Choice Requires="a14">
             <p:sp>
               <p:nvSpPr>
                 <p:cNvPr id="6" name="Parallelogram 5">
@@ -9762,7 +12086,7 @@
               </p:txBody>
             </p:sp>
           </mc:Choice>
-          <mc:Fallback>
+          <mc:Fallback xmlns="">
             <p:sp>
               <p:nvSpPr>
                 <p:cNvPr id="6" name="Parallelogram 5">
@@ -10489,8 +12813,8 @@
             </a:p>
           </p:txBody>
         </p:sp>
-        <mc:AlternateContent xmlns:mc="http://schemas.openxmlformats.org/markup-compatibility/2006">
-          <mc:Choice xmlns:a14="http://schemas.microsoft.com/office/drawing/2010/main" Requires="a14">
+        <mc:AlternateContent xmlns:mc="http://schemas.openxmlformats.org/markup-compatibility/2006" xmlns:a14="http://schemas.microsoft.com/office/drawing/2010/main">
+          <mc:Choice Requires="a14">
             <p:sp>
               <p:nvSpPr>
                 <p:cNvPr id="18" name="Parallelogram 17">
@@ -10589,7 +12913,7 @@
               </p:txBody>
             </p:sp>
           </mc:Choice>
-          <mc:Fallback>
+          <mc:Fallback xmlns="">
             <p:sp>
               <p:nvSpPr>
                 <p:cNvPr id="18" name="Parallelogram 17">
@@ -10646,8 +12970,8 @@
             </p:sp>
           </mc:Fallback>
         </mc:AlternateContent>
-        <mc:AlternateContent xmlns:mc="http://schemas.openxmlformats.org/markup-compatibility/2006">
-          <mc:Choice xmlns:a14="http://schemas.microsoft.com/office/drawing/2010/main" Requires="a14">
+        <mc:AlternateContent xmlns:mc="http://schemas.openxmlformats.org/markup-compatibility/2006" xmlns:a14="http://schemas.microsoft.com/office/drawing/2010/main">
+          <mc:Choice Requires="a14">
             <p:sp>
               <p:nvSpPr>
                 <p:cNvPr id="19" name="Parallelogram 18">
@@ -10746,7 +13070,7 @@
               </p:txBody>
             </p:sp>
           </mc:Choice>
-          <mc:Fallback>
+          <mc:Fallback xmlns="">
             <p:sp>
               <p:nvSpPr>
                 <p:cNvPr id="19" name="Parallelogram 18">
@@ -10864,8 +13188,8 @@
             </a:p>
           </p:txBody>
         </p:sp>
-        <mc:AlternateContent xmlns:mc="http://schemas.openxmlformats.org/markup-compatibility/2006">
-          <mc:Choice xmlns:a14="http://schemas.microsoft.com/office/drawing/2010/main" Requires="a14">
+        <mc:AlternateContent xmlns:mc="http://schemas.openxmlformats.org/markup-compatibility/2006" xmlns:a14="http://schemas.microsoft.com/office/drawing/2010/main">
+          <mc:Choice Requires="a14">
             <p:sp>
               <p:nvSpPr>
                 <p:cNvPr id="21" name="Parallelogram 20">
@@ -10964,7 +13288,7 @@
               </p:txBody>
             </p:sp>
           </mc:Choice>
-          <mc:Fallback>
+          <mc:Fallback xmlns="">
             <p:sp>
               <p:nvSpPr>
                 <p:cNvPr id="21" name="Parallelogram 20">
@@ -12563,8 +14887,8 @@
             </a:fontRef>
           </p:style>
         </p:cxnSp>
-        <mc:AlternateContent xmlns:mc="http://schemas.openxmlformats.org/markup-compatibility/2006">
-          <mc:Choice xmlns:a14="http://schemas.microsoft.com/office/drawing/2010/main" Requires="a14">
+        <mc:AlternateContent xmlns:mc="http://schemas.openxmlformats.org/markup-compatibility/2006" xmlns:a14="http://schemas.microsoft.com/office/drawing/2010/main">
+          <mc:Choice Requires="a14">
             <p:sp>
               <p:nvSpPr>
                 <p:cNvPr id="223" name="Parallelogram 222">
@@ -12675,7 +14999,7 @@
               </p:txBody>
             </p:sp>
           </mc:Choice>
-          <mc:Fallback>
+          <mc:Fallback xmlns="">
             <p:sp>
               <p:nvSpPr>
                 <p:cNvPr id="223" name="Parallelogram 222">
@@ -12784,8 +15108,8 @@
             </a:p>
           </p:txBody>
         </p:sp>
-        <mc:AlternateContent xmlns:mc="http://schemas.openxmlformats.org/markup-compatibility/2006">
-          <mc:Choice xmlns:a14="http://schemas.microsoft.com/office/drawing/2010/main" Requires="a14">
+        <mc:AlternateContent xmlns:mc="http://schemas.openxmlformats.org/markup-compatibility/2006" xmlns:a14="http://schemas.microsoft.com/office/drawing/2010/main">
+          <mc:Choice Requires="a14">
             <p:sp>
               <p:nvSpPr>
                 <p:cNvPr id="239" name="TextBox 238">
@@ -12911,7 +15235,7 @@
               </p:txBody>
             </p:sp>
           </mc:Choice>
-          <mc:Fallback>
+          <mc:Fallback xmlns="">
             <p:sp>
               <p:nvSpPr>
                 <p:cNvPr id="239" name="TextBox 238">
@@ -12956,8 +15280,8 @@
             </p:sp>
           </mc:Fallback>
         </mc:AlternateContent>
-        <mc:AlternateContent xmlns:mc="http://schemas.openxmlformats.org/markup-compatibility/2006">
-          <mc:Choice xmlns:a14="http://schemas.microsoft.com/office/drawing/2010/main" Requires="a14">
+        <mc:AlternateContent xmlns:mc="http://schemas.openxmlformats.org/markup-compatibility/2006" xmlns:a14="http://schemas.microsoft.com/office/drawing/2010/main">
+          <mc:Choice Requires="a14">
             <p:sp>
               <p:nvSpPr>
                 <p:cNvPr id="242" name="TextBox 241">
@@ -13083,7 +15407,7 @@
               </p:txBody>
             </p:sp>
           </mc:Choice>
-          <mc:Fallback>
+          <mc:Fallback xmlns="">
             <p:sp>
               <p:nvSpPr>
                 <p:cNvPr id="242" name="TextBox 241">
@@ -13168,8 +15492,8 @@
             </a:p>
           </p:txBody>
         </p:sp>
-        <mc:AlternateContent xmlns:mc="http://schemas.openxmlformats.org/markup-compatibility/2006">
-          <mc:Choice xmlns:a14="http://schemas.microsoft.com/office/drawing/2010/main" Requires="a14">
+        <mc:AlternateContent xmlns:mc="http://schemas.openxmlformats.org/markup-compatibility/2006" xmlns:a14="http://schemas.microsoft.com/office/drawing/2010/main">
+          <mc:Choice Requires="a14">
             <p:sp>
               <p:nvSpPr>
                 <p:cNvPr id="249" name="TextBox 248">
@@ -13295,7 +15619,7 @@
               </p:txBody>
             </p:sp>
           </mc:Choice>
-          <mc:Fallback>
+          <mc:Fallback xmlns="">
             <p:sp>
               <p:nvSpPr>
                 <p:cNvPr id="249" name="TextBox 248">
@@ -13340,8 +15664,8 @@
             </p:sp>
           </mc:Fallback>
         </mc:AlternateContent>
-        <mc:AlternateContent xmlns:mc="http://schemas.openxmlformats.org/markup-compatibility/2006">
-          <mc:Choice xmlns:a14="http://schemas.microsoft.com/office/drawing/2010/main" Requires="a14">
+        <mc:AlternateContent xmlns:mc="http://schemas.openxmlformats.org/markup-compatibility/2006" xmlns:a14="http://schemas.microsoft.com/office/drawing/2010/main">
+          <mc:Choice Requires="a14">
             <p:sp>
               <p:nvSpPr>
                 <p:cNvPr id="250" name="TextBox 249">
@@ -13467,7 +15791,7 @@
               </p:txBody>
             </p:sp>
           </mc:Choice>
-          <mc:Fallback>
+          <mc:Fallback xmlns="">
             <p:sp>
               <p:nvSpPr>
                 <p:cNvPr id="250" name="TextBox 249">
@@ -13512,8 +15836,8 @@
             </p:sp>
           </mc:Fallback>
         </mc:AlternateContent>
-        <mc:AlternateContent xmlns:mc="http://schemas.openxmlformats.org/markup-compatibility/2006">
-          <mc:Choice xmlns:a14="http://schemas.microsoft.com/office/drawing/2010/main" Requires="a14">
+        <mc:AlternateContent xmlns:mc="http://schemas.openxmlformats.org/markup-compatibility/2006" xmlns:a14="http://schemas.microsoft.com/office/drawing/2010/main">
+          <mc:Choice Requires="a14">
             <p:sp>
               <p:nvSpPr>
                 <p:cNvPr id="253" name="TextBox 252">
@@ -13639,7 +15963,7 @@
               </p:txBody>
             </p:sp>
           </mc:Choice>
-          <mc:Fallback>
+          <mc:Fallback xmlns="">
             <p:sp>
               <p:nvSpPr>
                 <p:cNvPr id="253" name="TextBox 252">
@@ -13684,8 +16008,8 @@
             </p:sp>
           </mc:Fallback>
         </mc:AlternateContent>
-        <mc:AlternateContent xmlns:mc="http://schemas.openxmlformats.org/markup-compatibility/2006">
-          <mc:Choice xmlns:a14="http://schemas.microsoft.com/office/drawing/2010/main" Requires="a14">
+        <mc:AlternateContent xmlns:mc="http://schemas.openxmlformats.org/markup-compatibility/2006" xmlns:a14="http://schemas.microsoft.com/office/drawing/2010/main">
+          <mc:Choice Requires="a14">
             <p:sp>
               <p:nvSpPr>
                 <p:cNvPr id="254" name="TextBox 253">
@@ -13811,7 +16135,7 @@
               </p:txBody>
             </p:sp>
           </mc:Choice>
-          <mc:Fallback>
+          <mc:Fallback xmlns="">
             <p:sp>
               <p:nvSpPr>
                 <p:cNvPr id="254" name="TextBox 253">
@@ -13900,8 +16224,8 @@
             </a:fontRef>
           </p:style>
         </p:cxnSp>
-        <mc:AlternateContent xmlns:mc="http://schemas.openxmlformats.org/markup-compatibility/2006">
-          <mc:Choice xmlns:a14="http://schemas.microsoft.com/office/drawing/2010/main" Requires="a14">
+        <mc:AlternateContent xmlns:mc="http://schemas.openxmlformats.org/markup-compatibility/2006" xmlns:a14="http://schemas.microsoft.com/office/drawing/2010/main">
+          <mc:Choice Requires="a14">
             <p:sp>
               <p:nvSpPr>
                 <p:cNvPr id="264" name="TextBox 263">
@@ -14027,7 +16351,7 @@
               </p:txBody>
             </p:sp>
           </mc:Choice>
-          <mc:Fallback>
+          <mc:Fallback xmlns="">
             <p:sp>
               <p:nvSpPr>
                 <p:cNvPr id="264" name="TextBox 263">
@@ -14437,7 +16761,7 @@
 </p:sld>
 </file>
 
-<file path=ppt/slides/slide5.xml><?xml version="1.0" encoding="utf-8"?>
+<file path=ppt/slides/slide6.xml><?xml version="1.0" encoding="utf-8"?>
 <p:sld xmlns:a="http://schemas.openxmlformats.org/drawingml/2006/main" xmlns:r="http://schemas.openxmlformats.org/officeDocument/2006/relationships" xmlns:p="http://schemas.openxmlformats.org/presentationml/2006/main">
   <p:cSld>
     <p:spTree>

--- a/examples/figures/wind_forecasting_figs [Autosaved].pptx
+++ b/examples/figures/wind_forecasting_figs [Autosaved].pptx
@@ -5,15 +5,16 @@
     <p:sldMasterId id="2147483660" r:id="rId1"/>
   </p:sldMasterIdLst>
   <p:notesMasterIdLst>
-    <p:notesMasterId r:id="rId8"/>
+    <p:notesMasterId r:id="rId9"/>
   </p:notesMasterIdLst>
   <p:sldIdLst>
     <p:sldId id="256" r:id="rId2"/>
     <p:sldId id="257" r:id="rId3"/>
-    <p:sldId id="261" r:id="rId4"/>
-    <p:sldId id="259" r:id="rId5"/>
-    <p:sldId id="258" r:id="rId6"/>
-    <p:sldId id="260" r:id="rId7"/>
+    <p:sldId id="262" r:id="rId4"/>
+    <p:sldId id="261" r:id="rId5"/>
+    <p:sldId id="259" r:id="rId6"/>
+    <p:sldId id="258" r:id="rId7"/>
+    <p:sldId id="260" r:id="rId8"/>
   </p:sldIdLst>
   <p:sldSz cx="12192000" cy="12188825"/>
   <p:notesSz cx="6858000" cy="9144000"/>
@@ -202,7 +203,7 @@
           <a:p>
             <a:fld id="{3380F61D-5888-4F45-B58C-AFF11477949F}" type="datetimeFigureOut">
               <a:rPr lang="en-US" smtClean="0"/>
-              <a:t>6/18/25</a:t>
+              <a:t>10/16/25</a:t>
             </a:fld>
             <a:endParaRPr lang="en-US"/>
           </a:p>
@@ -561,6 +562,114 @@
         <p:cNvPr id="1" name="">
           <a:extLst>
             <a:ext uri="{FF2B5EF4-FFF2-40B4-BE49-F238E27FC236}">
+              <a16:creationId xmlns:a16="http://schemas.microsoft.com/office/drawing/2014/main" id="{927512EC-C148-FFB2-E768-11DCB65A6197}"/>
+            </a:ext>
+          </a:extLst>
+        </p:cNvPr>
+        <p:cNvGrpSpPr/>
+        <p:nvPr/>
+      </p:nvGrpSpPr>
+      <p:grpSpPr>
+        <a:xfrm>
+          <a:off x="0" y="0"/>
+          <a:ext cx="0" cy="0"/>
+          <a:chOff x="0" y="0"/>
+          <a:chExt cx="0" cy="0"/>
+        </a:xfrm>
+      </p:grpSpPr>
+      <p:sp>
+        <p:nvSpPr>
+          <p:cNvPr id="2" name="Slide Image Placeholder 1">
+            <a:extLst>
+              <a:ext uri="{FF2B5EF4-FFF2-40B4-BE49-F238E27FC236}">
+                <a16:creationId xmlns:a16="http://schemas.microsoft.com/office/drawing/2014/main" id="{AE54F3BC-6DA1-F5B9-E356-26A2D7A28825}"/>
+              </a:ext>
+            </a:extLst>
+          </p:cNvPr>
+          <p:cNvSpPr>
+            <a:spLocks noGrp="1" noRot="1" noChangeAspect="1"/>
+          </p:cNvSpPr>
+          <p:nvPr>
+            <p:ph type="sldImg"/>
+          </p:nvPr>
+        </p:nvSpPr>
+        <p:spPr/>
+      </p:sp>
+      <p:sp>
+        <p:nvSpPr>
+          <p:cNvPr id="3" name="Notes Placeholder 2">
+            <a:extLst>
+              <a:ext uri="{FF2B5EF4-FFF2-40B4-BE49-F238E27FC236}">
+                <a16:creationId xmlns:a16="http://schemas.microsoft.com/office/drawing/2014/main" id="{44899632-5481-D046-A9AB-76CD60FB9E6F}"/>
+              </a:ext>
+            </a:extLst>
+          </p:cNvPr>
+          <p:cNvSpPr>
+            <a:spLocks noGrp="1"/>
+          </p:cNvSpPr>
+          <p:nvPr>
+            <p:ph type="body" idx="1"/>
+          </p:nvPr>
+        </p:nvSpPr>
+        <p:spPr/>
+        <p:txBody>
+          <a:bodyPr/>
+          <a:lstStyle/>
+          <a:p>
+            <a:endParaRPr lang="en-US" dirty="0"/>
+          </a:p>
+        </p:txBody>
+      </p:sp>
+      <p:sp>
+        <p:nvSpPr>
+          <p:cNvPr id="4" name="Slide Number Placeholder 3">
+            <a:extLst>
+              <a:ext uri="{FF2B5EF4-FFF2-40B4-BE49-F238E27FC236}">
+                <a16:creationId xmlns:a16="http://schemas.microsoft.com/office/drawing/2014/main" id="{885FF0DD-A4F7-1DD2-2A92-47C6449E8780}"/>
+              </a:ext>
+            </a:extLst>
+          </p:cNvPr>
+          <p:cNvSpPr>
+            <a:spLocks noGrp="1"/>
+          </p:cNvSpPr>
+          <p:nvPr>
+            <p:ph type="sldNum" sz="quarter" idx="5"/>
+          </p:nvPr>
+        </p:nvSpPr>
+        <p:spPr/>
+        <p:txBody>
+          <a:bodyPr/>
+          <a:lstStyle/>
+          <a:p>
+            <a:fld id="{49DBF009-32B7-474B-98BB-6B0A10F59D6A}" type="slidenum">
+              <a:rPr lang="en-US" smtClean="0"/>
+              <a:t>3</a:t>
+            </a:fld>
+            <a:endParaRPr lang="en-US"/>
+          </a:p>
+        </p:txBody>
+      </p:sp>
+    </p:spTree>
+    <p:extLst>
+      <p:ext uri="{BB962C8B-B14F-4D97-AF65-F5344CB8AC3E}">
+        <p14:creationId xmlns:p14="http://schemas.microsoft.com/office/powerpoint/2010/main" val="627209546"/>
+      </p:ext>
+    </p:extLst>
+  </p:cSld>
+  <p:clrMapOvr>
+    <a:masterClrMapping/>
+  </p:clrMapOvr>
+</p:notes>
+</file>
+
+<file path=ppt/notesSlides/notesSlide3.xml><?xml version="1.0" encoding="utf-8"?>
+<p:notes xmlns:a="http://schemas.openxmlformats.org/drawingml/2006/main" xmlns:r="http://schemas.openxmlformats.org/officeDocument/2006/relationships" xmlns:p="http://schemas.openxmlformats.org/presentationml/2006/main">
+  <p:cSld>
+    <p:spTree>
+      <p:nvGrpSpPr>
+        <p:cNvPr id="1" name="">
+          <a:extLst>
+            <a:ext uri="{FF2B5EF4-FFF2-40B4-BE49-F238E27FC236}">
               <a16:creationId xmlns:a16="http://schemas.microsoft.com/office/drawing/2014/main" id="{FE2178B6-3140-261B-DA0D-82CB0FE40463}"/>
             </a:ext>
           </a:extLst>
@@ -642,7 +751,7 @@
           <a:p>
             <a:fld id="{49DBF009-32B7-474B-98BB-6B0A10F59D6A}" type="slidenum">
               <a:rPr lang="en-US" smtClean="0"/>
-              <a:t>3</a:t>
+              <a:t>4</a:t>
             </a:fld>
             <a:endParaRPr lang="en-US"/>
           </a:p>
@@ -661,7 +770,7 @@
 </p:notes>
 </file>
 
-<file path=ppt/notesSlides/notesSlide3.xml><?xml version="1.0" encoding="utf-8"?>
+<file path=ppt/notesSlides/notesSlide4.xml><?xml version="1.0" encoding="utf-8"?>
 <p:notes xmlns:a="http://schemas.openxmlformats.org/drawingml/2006/main" xmlns:r="http://schemas.openxmlformats.org/officeDocument/2006/relationships" xmlns:p="http://schemas.openxmlformats.org/presentationml/2006/main">
   <p:cSld>
     <p:spTree>
@@ -750,7 +859,7 @@
           <a:p>
             <a:fld id="{49DBF009-32B7-474B-98BB-6B0A10F59D6A}" type="slidenum">
               <a:rPr lang="en-US" smtClean="0"/>
-              <a:t>4</a:t>
+              <a:t>5</a:t>
             </a:fld>
             <a:endParaRPr lang="en-US"/>
           </a:p>
@@ -900,7 +1009,7 @@
           <a:p>
             <a:fld id="{09A208B9-A1FD-A545-84FD-D19EFD3032C3}" type="datetimeFigureOut">
               <a:rPr lang="en-US" smtClean="0"/>
-              <a:t>6/18/25</a:t>
+              <a:t>10/16/25</a:t>
             </a:fld>
             <a:endParaRPr lang="en-US"/>
           </a:p>
@@ -1070,7 +1179,7 @@
           <a:p>
             <a:fld id="{09A208B9-A1FD-A545-84FD-D19EFD3032C3}" type="datetimeFigureOut">
               <a:rPr lang="en-US" smtClean="0"/>
-              <a:t>6/18/25</a:t>
+              <a:t>10/16/25</a:t>
             </a:fld>
             <a:endParaRPr lang="en-US"/>
           </a:p>
@@ -1250,7 +1359,7 @@
           <a:p>
             <a:fld id="{09A208B9-A1FD-A545-84FD-D19EFD3032C3}" type="datetimeFigureOut">
               <a:rPr lang="en-US" smtClean="0"/>
-              <a:t>6/18/25</a:t>
+              <a:t>10/16/25</a:t>
             </a:fld>
             <a:endParaRPr lang="en-US"/>
           </a:p>
@@ -1420,7 +1529,7 @@
           <a:p>
             <a:fld id="{09A208B9-A1FD-A545-84FD-D19EFD3032C3}" type="datetimeFigureOut">
               <a:rPr lang="en-US" smtClean="0"/>
-              <a:t>6/18/25</a:t>
+              <a:t>10/16/25</a:t>
             </a:fld>
             <a:endParaRPr lang="en-US"/>
           </a:p>
@@ -1666,7 +1775,7 @@
           <a:p>
             <a:fld id="{09A208B9-A1FD-A545-84FD-D19EFD3032C3}" type="datetimeFigureOut">
               <a:rPr lang="en-US" smtClean="0"/>
-              <a:t>6/18/25</a:t>
+              <a:t>10/16/25</a:t>
             </a:fld>
             <a:endParaRPr lang="en-US"/>
           </a:p>
@@ -1898,7 +2007,7 @@
           <a:p>
             <a:fld id="{09A208B9-A1FD-A545-84FD-D19EFD3032C3}" type="datetimeFigureOut">
               <a:rPr lang="en-US" smtClean="0"/>
-              <a:t>6/18/25</a:t>
+              <a:t>10/16/25</a:t>
             </a:fld>
             <a:endParaRPr lang="en-US"/>
           </a:p>
@@ -2265,7 +2374,7 @@
           <a:p>
             <a:fld id="{09A208B9-A1FD-A545-84FD-D19EFD3032C3}" type="datetimeFigureOut">
               <a:rPr lang="en-US" smtClean="0"/>
-              <a:t>6/18/25</a:t>
+              <a:t>10/16/25</a:t>
             </a:fld>
             <a:endParaRPr lang="en-US"/>
           </a:p>
@@ -2383,7 +2492,7 @@
           <a:p>
             <a:fld id="{09A208B9-A1FD-A545-84FD-D19EFD3032C3}" type="datetimeFigureOut">
               <a:rPr lang="en-US" smtClean="0"/>
-              <a:t>6/18/25</a:t>
+              <a:t>10/16/25</a:t>
             </a:fld>
             <a:endParaRPr lang="en-US"/>
           </a:p>
@@ -2478,7 +2587,7 @@
           <a:p>
             <a:fld id="{09A208B9-A1FD-A545-84FD-D19EFD3032C3}" type="datetimeFigureOut">
               <a:rPr lang="en-US" smtClean="0"/>
-              <a:t>6/18/25</a:t>
+              <a:t>10/16/25</a:t>
             </a:fld>
             <a:endParaRPr lang="en-US"/>
           </a:p>
@@ -2755,7 +2864,7 @@
           <a:p>
             <a:fld id="{09A208B9-A1FD-A545-84FD-D19EFD3032C3}" type="datetimeFigureOut">
               <a:rPr lang="en-US" smtClean="0"/>
-              <a:t>6/18/25</a:t>
+              <a:t>10/16/25</a:t>
             </a:fld>
             <a:endParaRPr lang="en-US"/>
           </a:p>
@@ -3012,7 +3121,7 @@
           <a:p>
             <a:fld id="{09A208B9-A1FD-A545-84FD-D19EFD3032C3}" type="datetimeFigureOut">
               <a:rPr lang="en-US" smtClean="0"/>
-              <a:t>6/18/25</a:t>
+              <a:t>10/16/25</a:t>
             </a:fld>
             <a:endParaRPr lang="en-US"/>
           </a:p>
@@ -3225,7 +3334,7 @@
           <a:p>
             <a:fld id="{09A208B9-A1FD-A545-84FD-D19EFD3032C3}" type="datetimeFigureOut">
               <a:rPr lang="en-US" smtClean="0"/>
-              <a:t>6/18/25</a:t>
+              <a:t>10/16/25</a:t>
             </a:fld>
             <a:endParaRPr lang="en-US"/>
           </a:p>
@@ -5414,7 +5523,2295 @@
         </p:nvSpPr>
         <p:spPr>
           <a:xfrm>
-            <a:off x="10169634" y="6208623"/>
+            <a:off x="9505605" y="9191309"/>
+            <a:ext cx="1561651" cy="601883"/>
+          </a:xfrm>
+          <a:prstGeom prst="rect">
+            <a:avLst/>
+          </a:prstGeom>
+          <a:solidFill>
+            <a:srgbClr val="00B0F0"/>
+          </a:solidFill>
+          <a:ln w="9525"/>
+          <a:effectLst>
+            <a:outerShdw blurRad="50800" dist="38100" dir="8100000" algn="tr" rotWithShape="0">
+              <a:prstClr val="black">
+                <a:alpha val="40000"/>
+              </a:prstClr>
+            </a:outerShdw>
+          </a:effectLst>
+        </p:spPr>
+        <p:style>
+          <a:lnRef idx="2">
+            <a:schemeClr val="accent4">
+              <a:shade val="15000"/>
+            </a:schemeClr>
+          </a:lnRef>
+          <a:fillRef idx="1">
+            <a:schemeClr val="accent4"/>
+          </a:fillRef>
+          <a:effectRef idx="0">
+            <a:schemeClr val="accent4"/>
+          </a:effectRef>
+          <a:fontRef idx="minor">
+            <a:schemeClr val="lt1"/>
+          </a:fontRef>
+        </p:style>
+        <p:txBody>
+          <a:bodyPr rtlCol="0" anchor="ctr"/>
+          <a:lstStyle/>
+          <a:p>
+            <a:pPr algn="ctr"/>
+            <a:r>
+              <a:rPr lang="en-US" dirty="0">
+                <a:latin typeface="Modern No. 20" panose="02070704070505020303" pitchFamily="18" charset="77"/>
+              </a:rPr>
+              <a:t>Normalization</a:t>
+            </a:r>
+          </a:p>
+        </p:txBody>
+      </p:sp>
+      <p:grpSp>
+        <p:nvGrpSpPr>
+          <p:cNvPr id="28" name="Group 27">
+            <a:extLst>
+              <a:ext uri="{FF2B5EF4-FFF2-40B4-BE49-F238E27FC236}">
+                <a16:creationId xmlns:a16="http://schemas.microsoft.com/office/drawing/2014/main" id="{E887139D-2328-BEF1-7AA4-85DB94FAB879}"/>
+              </a:ext>
+            </a:extLst>
+          </p:cNvPr>
+          <p:cNvGrpSpPr/>
+          <p:nvPr/>
+        </p:nvGrpSpPr>
+        <p:grpSpPr>
+          <a:xfrm>
+            <a:off x="1877654" y="4577441"/>
+            <a:ext cx="7989367" cy="3025371"/>
+            <a:chOff x="1877654" y="4577441"/>
+            <a:chExt cx="7989367" cy="3025371"/>
+          </a:xfrm>
+        </p:grpSpPr>
+        <p:sp>
+          <p:nvSpPr>
+            <p:cNvPr id="21" name="Right Arrow 20">
+              <a:extLst>
+                <a:ext uri="{FF2B5EF4-FFF2-40B4-BE49-F238E27FC236}">
+                  <a16:creationId xmlns:a16="http://schemas.microsoft.com/office/drawing/2014/main" id="{972D87A0-813A-6720-06C8-195C4CEF8F1E}"/>
+                </a:ext>
+              </a:extLst>
+            </p:cNvPr>
+            <p:cNvSpPr/>
+            <p:nvPr/>
+          </p:nvSpPr>
+          <p:spPr>
+            <a:xfrm>
+              <a:off x="5163308" y="4832973"/>
+              <a:ext cx="201021" cy="107992"/>
+            </a:xfrm>
+            <a:prstGeom prst="rightArrow">
+              <a:avLst/>
+            </a:prstGeom>
+          </p:spPr>
+          <p:style>
+            <a:lnRef idx="2">
+              <a:schemeClr val="dk1">
+                <a:shade val="15000"/>
+              </a:schemeClr>
+            </a:lnRef>
+            <a:fillRef idx="1">
+              <a:schemeClr val="dk1"/>
+            </a:fillRef>
+            <a:effectRef idx="0">
+              <a:schemeClr val="dk1"/>
+            </a:effectRef>
+            <a:fontRef idx="minor">
+              <a:schemeClr val="lt1"/>
+            </a:fontRef>
+          </p:style>
+          <p:txBody>
+            <a:bodyPr rtlCol="0" anchor="ctr"/>
+            <a:lstStyle/>
+            <a:p>
+              <a:pPr algn="ctr"/>
+              <a:endParaRPr lang="en-US" dirty="0"/>
+            </a:p>
+          </p:txBody>
+        </p:sp>
+        <p:sp>
+          <p:nvSpPr>
+            <p:cNvPr id="20" name="Right Arrow 19">
+              <a:extLst>
+                <a:ext uri="{FF2B5EF4-FFF2-40B4-BE49-F238E27FC236}">
+                  <a16:creationId xmlns:a16="http://schemas.microsoft.com/office/drawing/2014/main" id="{A2D00AFB-F89B-D8CD-EA56-7595E83F4EFF}"/>
+                </a:ext>
+              </a:extLst>
+            </p:cNvPr>
+            <p:cNvSpPr/>
+            <p:nvPr/>
+          </p:nvSpPr>
+          <p:spPr>
+            <a:xfrm>
+              <a:off x="3992661" y="4822992"/>
+              <a:ext cx="201021" cy="107992"/>
+            </a:xfrm>
+            <a:prstGeom prst="rightArrow">
+              <a:avLst/>
+            </a:prstGeom>
+          </p:spPr>
+          <p:style>
+            <a:lnRef idx="2">
+              <a:schemeClr val="dk1">
+                <a:shade val="15000"/>
+              </a:schemeClr>
+            </a:lnRef>
+            <a:fillRef idx="1">
+              <a:schemeClr val="dk1"/>
+            </a:fillRef>
+            <a:effectRef idx="0">
+              <a:schemeClr val="dk1"/>
+            </a:effectRef>
+            <a:fontRef idx="minor">
+              <a:schemeClr val="lt1"/>
+            </a:fontRef>
+          </p:style>
+          <p:txBody>
+            <a:bodyPr rtlCol="0" anchor="ctr"/>
+            <a:lstStyle/>
+            <a:p>
+              <a:pPr algn="ctr"/>
+              <a:endParaRPr lang="en-US" dirty="0"/>
+            </a:p>
+          </p:txBody>
+        </p:sp>
+        <p:sp>
+          <p:nvSpPr>
+            <p:cNvPr id="19" name="Right Arrow 18">
+              <a:extLst>
+                <a:ext uri="{FF2B5EF4-FFF2-40B4-BE49-F238E27FC236}">
+                  <a16:creationId xmlns:a16="http://schemas.microsoft.com/office/drawing/2014/main" id="{1C6324EA-D5D9-F6BF-0FAF-EDC99A6CDEB3}"/>
+                </a:ext>
+              </a:extLst>
+            </p:cNvPr>
+            <p:cNvSpPr/>
+            <p:nvPr/>
+          </p:nvSpPr>
+          <p:spPr>
+            <a:xfrm>
+              <a:off x="2738487" y="4839680"/>
+              <a:ext cx="201021" cy="107992"/>
+            </a:xfrm>
+            <a:prstGeom prst="rightArrow">
+              <a:avLst/>
+            </a:prstGeom>
+          </p:spPr>
+          <p:style>
+            <a:lnRef idx="2">
+              <a:schemeClr val="dk1">
+                <a:shade val="15000"/>
+              </a:schemeClr>
+            </a:lnRef>
+            <a:fillRef idx="1">
+              <a:schemeClr val="dk1"/>
+            </a:fillRef>
+            <a:effectRef idx="0">
+              <a:schemeClr val="dk1"/>
+            </a:effectRef>
+            <a:fontRef idx="minor">
+              <a:schemeClr val="lt1"/>
+            </a:fontRef>
+          </p:style>
+          <p:txBody>
+            <a:bodyPr rtlCol="0" anchor="ctr"/>
+            <a:lstStyle/>
+            <a:p>
+              <a:pPr algn="ctr"/>
+              <a:endParaRPr lang="en-US" dirty="0"/>
+            </a:p>
+          </p:txBody>
+        </p:sp>
+        <p:sp>
+          <p:nvSpPr>
+            <p:cNvPr id="4" name="Parallelogram 3">
+              <a:extLst>
+                <a:ext uri="{FF2B5EF4-FFF2-40B4-BE49-F238E27FC236}">
+                  <a16:creationId xmlns:a16="http://schemas.microsoft.com/office/drawing/2014/main" id="{6B03AEB8-C88E-C0FB-DA3B-9F1BE318DF69}"/>
+                </a:ext>
+              </a:extLst>
+            </p:cNvPr>
+            <p:cNvSpPr/>
+            <p:nvPr/>
+          </p:nvSpPr>
+          <p:spPr>
+            <a:xfrm>
+              <a:off x="1877654" y="4593409"/>
+              <a:ext cx="972273" cy="567159"/>
+            </a:xfrm>
+            <a:prstGeom prst="parallelogram">
+              <a:avLst/>
+            </a:prstGeom>
+            <a:ln w="9525">
+              <a:solidFill>
+                <a:schemeClr val="tx1"/>
+              </a:solidFill>
+            </a:ln>
+            <a:effectLst>
+              <a:outerShdw blurRad="50800" dist="38100" dir="5400000" algn="t" rotWithShape="0">
+                <a:prstClr val="black">
+                  <a:alpha val="40000"/>
+                </a:prstClr>
+              </a:outerShdw>
+            </a:effectLst>
+          </p:spPr>
+          <p:style>
+            <a:lnRef idx="2">
+              <a:schemeClr val="accent1">
+                <a:shade val="15000"/>
+              </a:schemeClr>
+            </a:lnRef>
+            <a:fillRef idx="1">
+              <a:schemeClr val="accent1"/>
+            </a:fillRef>
+            <a:effectRef idx="0">
+              <a:schemeClr val="accent1"/>
+            </a:effectRef>
+            <a:fontRef idx="minor">
+              <a:schemeClr val="lt1"/>
+            </a:fontRef>
+          </p:style>
+          <p:txBody>
+            <a:bodyPr rtlCol="0" anchor="ctr"/>
+            <a:lstStyle/>
+            <a:p>
+              <a:pPr algn="ctr"/>
+              <a:r>
+                <a:rPr lang="en-US" dirty="0">
+                  <a:latin typeface="Modern No. 20" panose="02070704070505020303" pitchFamily="18" charset="77"/>
+                </a:rPr>
+                <a:t>Raw Data</a:t>
+              </a:r>
+            </a:p>
+          </p:txBody>
+        </p:sp>
+        <p:sp>
+          <p:nvSpPr>
+            <p:cNvPr id="5" name="Rectangle 4">
+              <a:extLst>
+                <a:ext uri="{FF2B5EF4-FFF2-40B4-BE49-F238E27FC236}">
+                  <a16:creationId xmlns:a16="http://schemas.microsoft.com/office/drawing/2014/main" id="{6C6CA136-BDF8-76C8-DDA8-8145CD97CC1B}"/>
+                </a:ext>
+              </a:extLst>
+            </p:cNvPr>
+            <p:cNvSpPr/>
+            <p:nvPr/>
+          </p:nvSpPr>
+          <p:spPr>
+            <a:xfrm>
+              <a:off x="2950439" y="4592735"/>
+              <a:ext cx="1090087" cy="601883"/>
+            </a:xfrm>
+            <a:prstGeom prst="rect">
+              <a:avLst/>
+            </a:prstGeom>
+            <a:ln w="9525">
+              <a:solidFill>
+                <a:schemeClr val="tx1"/>
+              </a:solidFill>
+            </a:ln>
+            <a:effectLst>
+              <a:outerShdw blurRad="50800" dist="38100" dir="5400000" algn="t" rotWithShape="0">
+                <a:prstClr val="black">
+                  <a:alpha val="40000"/>
+                </a:prstClr>
+              </a:outerShdw>
+            </a:effectLst>
+          </p:spPr>
+          <p:style>
+            <a:lnRef idx="3">
+              <a:schemeClr val="lt1"/>
+            </a:lnRef>
+            <a:fillRef idx="1">
+              <a:schemeClr val="accent2"/>
+            </a:fillRef>
+            <a:effectRef idx="1">
+              <a:schemeClr val="accent2"/>
+            </a:effectRef>
+            <a:fontRef idx="minor">
+              <a:schemeClr val="lt1"/>
+            </a:fontRef>
+          </p:style>
+          <p:txBody>
+            <a:bodyPr rtlCol="0" anchor="ctr"/>
+            <a:lstStyle/>
+            <a:p>
+              <a:pPr algn="ctr"/>
+              <a:r>
+                <a:rPr lang="en-US" dirty="0">
+                  <a:latin typeface="Modern No. 20" panose="02070704070505020303" pitchFamily="18" charset="77"/>
+                </a:rPr>
+                <a:t>Resample</a:t>
+              </a:r>
+            </a:p>
+          </p:txBody>
+        </p:sp>
+        <p:sp>
+          <p:nvSpPr>
+            <p:cNvPr id="7" name="Rectangle 6">
+              <a:extLst>
+                <a:ext uri="{FF2B5EF4-FFF2-40B4-BE49-F238E27FC236}">
+                  <a16:creationId xmlns:a16="http://schemas.microsoft.com/office/drawing/2014/main" id="{BDA98530-CC36-DEBA-0FE0-0E5BCEFCB24E}"/>
+                </a:ext>
+              </a:extLst>
+            </p:cNvPr>
+            <p:cNvSpPr/>
+            <p:nvPr/>
+          </p:nvSpPr>
+          <p:spPr>
+            <a:xfrm>
+              <a:off x="4214205" y="4577441"/>
+              <a:ext cx="979716" cy="601883"/>
+            </a:xfrm>
+            <a:prstGeom prst="rect">
+              <a:avLst/>
+            </a:prstGeom>
+            <a:ln w="9525">
+              <a:solidFill>
+                <a:schemeClr val="tx1"/>
+              </a:solidFill>
+            </a:ln>
+            <a:effectLst>
+              <a:outerShdw blurRad="50800" dist="38100" dir="5400000" algn="t" rotWithShape="0">
+                <a:prstClr val="black">
+                  <a:alpha val="40000"/>
+                </a:prstClr>
+              </a:outerShdw>
+            </a:effectLst>
+          </p:spPr>
+          <p:style>
+            <a:lnRef idx="3">
+              <a:schemeClr val="lt1"/>
+            </a:lnRef>
+            <a:fillRef idx="1">
+              <a:schemeClr val="accent5"/>
+            </a:fillRef>
+            <a:effectRef idx="1">
+              <a:schemeClr val="accent5"/>
+            </a:effectRef>
+            <a:fontRef idx="minor">
+              <a:schemeClr val="lt1"/>
+            </a:fontRef>
+          </p:style>
+          <p:txBody>
+            <a:bodyPr rtlCol="0" anchor="ctr"/>
+            <a:lstStyle/>
+            <a:p>
+              <a:pPr algn="ctr"/>
+              <a:r>
+                <a:rPr lang="en-US" dirty="0">
+                  <a:latin typeface="Modern No. 20" panose="02070704070505020303" pitchFamily="18" charset="77"/>
+                </a:rPr>
+                <a:t>Forward Fill</a:t>
+              </a:r>
+            </a:p>
+          </p:txBody>
+        </p:sp>
+        <p:sp>
+          <p:nvSpPr>
+            <p:cNvPr id="8" name="Rectangle 7">
+              <a:extLst>
+                <a:ext uri="{FF2B5EF4-FFF2-40B4-BE49-F238E27FC236}">
+                  <a16:creationId xmlns:a16="http://schemas.microsoft.com/office/drawing/2014/main" id="{6EC75A86-D67A-0F09-3FF1-6FC3754075B2}"/>
+                </a:ext>
+              </a:extLst>
+            </p:cNvPr>
+            <p:cNvSpPr/>
+            <p:nvPr/>
+          </p:nvSpPr>
+          <p:spPr>
+            <a:xfrm>
+              <a:off x="5367599" y="4580050"/>
+              <a:ext cx="1481972" cy="601883"/>
+            </a:xfrm>
+            <a:prstGeom prst="rect">
+              <a:avLst/>
+            </a:prstGeom>
+            <a:solidFill>
+              <a:srgbClr val="00B050"/>
+            </a:solidFill>
+            <a:ln>
+              <a:solidFill>
+                <a:schemeClr val="tx1"/>
+              </a:solidFill>
+            </a:ln>
+            <a:effectLst>
+              <a:outerShdw blurRad="50800" dist="38100" dir="5400000" algn="t" rotWithShape="0">
+                <a:prstClr val="black">
+                  <a:alpha val="40000"/>
+                </a:prstClr>
+              </a:outerShdw>
+            </a:effectLst>
+          </p:spPr>
+          <p:style>
+            <a:lnRef idx="0">
+              <a:schemeClr val="accent6"/>
+            </a:lnRef>
+            <a:fillRef idx="3">
+              <a:schemeClr val="accent6"/>
+            </a:fillRef>
+            <a:effectRef idx="3">
+              <a:schemeClr val="accent6"/>
+            </a:effectRef>
+            <a:fontRef idx="minor">
+              <a:schemeClr val="lt1"/>
+            </a:fontRef>
+          </p:style>
+          <p:txBody>
+            <a:bodyPr rtlCol="0" anchor="ctr"/>
+            <a:lstStyle/>
+            <a:p>
+              <a:pPr algn="ctr"/>
+              <a:r>
+                <a:rPr lang="en-US" dirty="0">
+                  <a:latin typeface="Modern No. 20" panose="02070704070505020303" pitchFamily="18" charset="77"/>
+                </a:rPr>
+                <a:t>Unresponsive Sensor Filter</a:t>
+              </a:r>
+            </a:p>
+          </p:txBody>
+        </p:sp>
+        <p:sp>
+          <p:nvSpPr>
+            <p:cNvPr id="9" name="Rectangle 8">
+              <a:extLst>
+                <a:ext uri="{FF2B5EF4-FFF2-40B4-BE49-F238E27FC236}">
+                  <a16:creationId xmlns:a16="http://schemas.microsoft.com/office/drawing/2014/main" id="{0FBE1F1E-A304-0DA0-ABBB-34D7CA8CF43A}"/>
+                </a:ext>
+              </a:extLst>
+            </p:cNvPr>
+            <p:cNvSpPr/>
+            <p:nvPr/>
+          </p:nvSpPr>
+          <p:spPr>
+            <a:xfrm>
+              <a:off x="2947672" y="5395993"/>
+              <a:ext cx="1679229" cy="601883"/>
+            </a:xfrm>
+            <a:prstGeom prst="rect">
+              <a:avLst/>
+            </a:prstGeom>
+            <a:solidFill>
+              <a:srgbClr val="00B0F0"/>
+            </a:solidFill>
+            <a:ln>
+              <a:solidFill>
+                <a:schemeClr val="tx1"/>
+              </a:solidFill>
+            </a:ln>
+          </p:spPr>
+          <p:style>
+            <a:lnRef idx="0">
+              <a:schemeClr val="accent4"/>
+            </a:lnRef>
+            <a:fillRef idx="3">
+              <a:schemeClr val="accent4"/>
+            </a:fillRef>
+            <a:effectRef idx="3">
+              <a:schemeClr val="accent4"/>
+            </a:effectRef>
+            <a:fontRef idx="minor">
+              <a:schemeClr val="lt1"/>
+            </a:fontRef>
+          </p:style>
+          <p:txBody>
+            <a:bodyPr rtlCol="0" anchor="ctr"/>
+            <a:lstStyle/>
+            <a:p>
+              <a:pPr algn="ctr"/>
+              <a:r>
+                <a:rPr lang="en-US" dirty="0">
+                  <a:latin typeface="Modern No. 20" panose="02070704070505020303" pitchFamily="18" charset="77"/>
+                </a:rPr>
+                <a:t>Nacelle/Wind Dir. Calibration</a:t>
+              </a:r>
+            </a:p>
+          </p:txBody>
+        </p:sp>
+        <p:sp>
+          <p:nvSpPr>
+            <p:cNvPr id="11" name="Rectangle 10">
+              <a:extLst>
+                <a:ext uri="{FF2B5EF4-FFF2-40B4-BE49-F238E27FC236}">
+                  <a16:creationId xmlns:a16="http://schemas.microsoft.com/office/drawing/2014/main" id="{D35F28A8-CFA8-8F78-2C8E-46A33D1091AB}"/>
+                </a:ext>
+              </a:extLst>
+            </p:cNvPr>
+            <p:cNvSpPr/>
+            <p:nvPr/>
+          </p:nvSpPr>
+          <p:spPr>
+            <a:xfrm>
+              <a:off x="4851895" y="5396916"/>
+              <a:ext cx="1320579" cy="601883"/>
+            </a:xfrm>
+            <a:prstGeom prst="rect">
+              <a:avLst/>
+            </a:prstGeom>
+            <a:solidFill>
+              <a:srgbClr val="00B050"/>
+            </a:solidFill>
+            <a:ln>
+              <a:solidFill>
+                <a:schemeClr val="tx1"/>
+              </a:solidFill>
+            </a:ln>
+            <a:effectLst>
+              <a:outerShdw blurRad="50800" dist="38100" dir="5400000" algn="t" rotWithShape="0">
+                <a:prstClr val="black">
+                  <a:alpha val="40000"/>
+                </a:prstClr>
+              </a:outerShdw>
+            </a:effectLst>
+          </p:spPr>
+          <p:style>
+            <a:lnRef idx="0">
+              <a:schemeClr val="accent6"/>
+            </a:lnRef>
+            <a:fillRef idx="3">
+              <a:schemeClr val="accent6"/>
+            </a:fillRef>
+            <a:effectRef idx="3">
+              <a:schemeClr val="accent6"/>
+            </a:effectRef>
+            <a:fontRef idx="minor">
+              <a:schemeClr val="lt1"/>
+            </a:fontRef>
+          </p:style>
+          <p:txBody>
+            <a:bodyPr rtlCol="0" anchor="ctr"/>
+            <a:lstStyle/>
+            <a:p>
+              <a:pPr algn="ctr"/>
+              <a:r>
+                <a:rPr lang="en-US" dirty="0">
+                  <a:latin typeface="Modern No. 20" panose="02070704070505020303" pitchFamily="18" charset="77"/>
+                </a:rPr>
+                <a:t>Power Curve Filter</a:t>
+              </a:r>
+            </a:p>
+          </p:txBody>
+        </p:sp>
+        <p:sp>
+          <p:nvSpPr>
+            <p:cNvPr id="12" name="Rectangle 11">
+              <a:extLst>
+                <a:ext uri="{FF2B5EF4-FFF2-40B4-BE49-F238E27FC236}">
+                  <a16:creationId xmlns:a16="http://schemas.microsoft.com/office/drawing/2014/main" id="{42E0E4E2-74D4-606F-0ED8-2ACB1FB88CF7}"/>
+                </a:ext>
+              </a:extLst>
+            </p:cNvPr>
+            <p:cNvSpPr/>
+            <p:nvPr/>
+          </p:nvSpPr>
+          <p:spPr>
+            <a:xfrm>
+              <a:off x="2950883" y="6210814"/>
+              <a:ext cx="1242799" cy="601883"/>
+            </a:xfrm>
+            <a:prstGeom prst="rect">
+              <a:avLst/>
+            </a:prstGeom>
+            <a:solidFill>
+              <a:srgbClr val="00B0F0"/>
+            </a:solidFill>
+            <a:ln w="9525"/>
+            <a:effectLst>
+              <a:outerShdw blurRad="50800" dist="38100" dir="8100000" algn="tr" rotWithShape="0">
+                <a:prstClr val="black">
+                  <a:alpha val="40000"/>
+                </a:prstClr>
+              </a:outerShdw>
+            </a:effectLst>
+          </p:spPr>
+          <p:style>
+            <a:lnRef idx="2">
+              <a:schemeClr val="accent4">
+                <a:shade val="15000"/>
+              </a:schemeClr>
+            </a:lnRef>
+            <a:fillRef idx="1">
+              <a:schemeClr val="accent4"/>
+            </a:fillRef>
+            <a:effectRef idx="0">
+              <a:schemeClr val="accent4"/>
+            </a:effectRef>
+            <a:fontRef idx="minor">
+              <a:schemeClr val="lt1"/>
+            </a:fontRef>
+          </p:style>
+          <p:txBody>
+            <a:bodyPr rtlCol="0" anchor="ctr"/>
+            <a:lstStyle/>
+            <a:p>
+              <a:pPr algn="ctr"/>
+              <a:r>
+                <a:rPr lang="en-US" dirty="0">
+                  <a:latin typeface="Modern No. 20" panose="02070704070505020303" pitchFamily="18" charset="77"/>
+                </a:rPr>
+                <a:t>Feature Transform  </a:t>
+              </a:r>
+            </a:p>
+          </p:txBody>
+        </p:sp>
+        <p:sp>
+          <p:nvSpPr>
+            <p:cNvPr id="13" name="Rectangle 12">
+              <a:extLst>
+                <a:ext uri="{FF2B5EF4-FFF2-40B4-BE49-F238E27FC236}">
+                  <a16:creationId xmlns:a16="http://schemas.microsoft.com/office/drawing/2014/main" id="{B3757315-F2E2-333E-C758-94E2A8ED7695}"/>
+                </a:ext>
+              </a:extLst>
+            </p:cNvPr>
+            <p:cNvSpPr/>
+            <p:nvPr/>
+          </p:nvSpPr>
+          <p:spPr>
+            <a:xfrm>
+              <a:off x="4409627" y="6210814"/>
+              <a:ext cx="1017564" cy="601883"/>
+            </a:xfrm>
+            <a:prstGeom prst="rect">
+              <a:avLst/>
+            </a:prstGeom>
+            <a:solidFill>
+              <a:srgbClr val="00B050"/>
+            </a:solidFill>
+            <a:ln>
+              <a:solidFill>
+                <a:schemeClr val="tx1"/>
+              </a:solidFill>
+            </a:ln>
+            <a:effectLst>
+              <a:outerShdw blurRad="50800" dist="38100" dir="5400000" algn="t" rotWithShape="0">
+                <a:prstClr val="black">
+                  <a:alpha val="40000"/>
+                </a:prstClr>
+              </a:outerShdw>
+            </a:effectLst>
+          </p:spPr>
+          <p:style>
+            <a:lnRef idx="0">
+              <a:schemeClr val="accent6"/>
+            </a:lnRef>
+            <a:fillRef idx="3">
+              <a:schemeClr val="accent6"/>
+            </a:fillRef>
+            <a:effectRef idx="3">
+              <a:schemeClr val="accent6"/>
+            </a:effectRef>
+            <a:fontRef idx="minor">
+              <a:schemeClr val="lt1"/>
+            </a:fontRef>
+          </p:style>
+          <p:txBody>
+            <a:bodyPr rtlCol="0" anchor="ctr"/>
+            <a:lstStyle/>
+            <a:p>
+              <a:pPr algn="ctr"/>
+              <a:r>
+                <a:rPr lang="en-US" dirty="0">
+                  <a:latin typeface="Modern No. 20" panose="02070704070505020303" pitchFamily="18" charset="77"/>
+                </a:rPr>
+                <a:t>Std. Dev. Filter</a:t>
+              </a:r>
+            </a:p>
+          </p:txBody>
+        </p:sp>
+        <p:sp>
+          <p:nvSpPr>
+            <p:cNvPr id="14" name="Rectangle 13">
+              <a:extLst>
+                <a:ext uri="{FF2B5EF4-FFF2-40B4-BE49-F238E27FC236}">
+                  <a16:creationId xmlns:a16="http://schemas.microsoft.com/office/drawing/2014/main" id="{1EEA77DC-F060-06DB-7309-D7A949E55D92}"/>
+                </a:ext>
+              </a:extLst>
+            </p:cNvPr>
+            <p:cNvSpPr/>
+            <p:nvPr/>
+          </p:nvSpPr>
+          <p:spPr>
+            <a:xfrm>
+              <a:off x="5652073" y="6210858"/>
+              <a:ext cx="687118" cy="601883"/>
+            </a:xfrm>
+            <a:prstGeom prst="rect">
+              <a:avLst/>
+            </a:prstGeom>
+            <a:solidFill>
+              <a:schemeClr val="accent2"/>
+            </a:solidFill>
+            <a:ln w="9525">
+              <a:solidFill>
+                <a:schemeClr val="tx1"/>
+              </a:solidFill>
+            </a:ln>
+            <a:effectLst>
+              <a:outerShdw blurRad="50800" dist="38100" dir="5400000" algn="t" rotWithShape="0">
+                <a:prstClr val="black">
+                  <a:alpha val="40000"/>
+                </a:prstClr>
+              </a:outerShdw>
+            </a:effectLst>
+          </p:spPr>
+          <p:style>
+            <a:lnRef idx="3">
+              <a:schemeClr val="lt1"/>
+            </a:lnRef>
+            <a:fillRef idx="1">
+              <a:schemeClr val="accent2"/>
+            </a:fillRef>
+            <a:effectRef idx="1">
+              <a:schemeClr val="accent2"/>
+            </a:effectRef>
+            <a:fontRef idx="minor">
+              <a:schemeClr val="lt1"/>
+            </a:fontRef>
+          </p:style>
+          <p:txBody>
+            <a:bodyPr rtlCol="0" anchor="ctr"/>
+            <a:lstStyle/>
+            <a:p>
+              <a:pPr algn="ctr"/>
+              <a:r>
+                <a:rPr lang="en-US" dirty="0">
+                  <a:latin typeface="Modern No. 20" panose="02070704070505020303" pitchFamily="18" charset="77"/>
+                </a:rPr>
+                <a:t>Split</a:t>
+              </a:r>
+            </a:p>
+          </p:txBody>
+        </p:sp>
+        <p:sp>
+          <p:nvSpPr>
+            <p:cNvPr id="16" name="Rectangle 15">
+              <a:extLst>
+                <a:ext uri="{FF2B5EF4-FFF2-40B4-BE49-F238E27FC236}">
+                  <a16:creationId xmlns:a16="http://schemas.microsoft.com/office/drawing/2014/main" id="{4A595934-9AE8-C4A8-9503-75BC08B67270}"/>
+                </a:ext>
+              </a:extLst>
+            </p:cNvPr>
+            <p:cNvSpPr/>
+            <p:nvPr/>
+          </p:nvSpPr>
+          <p:spPr>
+            <a:xfrm>
+              <a:off x="6569159" y="6210814"/>
+              <a:ext cx="913821" cy="601883"/>
+            </a:xfrm>
+            <a:prstGeom prst="rect">
+              <a:avLst/>
+            </a:prstGeom>
+            <a:ln w="9525">
+              <a:solidFill>
+                <a:schemeClr val="tx1"/>
+              </a:solidFill>
+            </a:ln>
+            <a:effectLst>
+              <a:outerShdw blurRad="50800" dist="38100" dir="5400000" algn="t" rotWithShape="0">
+                <a:prstClr val="black">
+                  <a:alpha val="40000"/>
+                </a:prstClr>
+              </a:outerShdw>
+            </a:effectLst>
+          </p:spPr>
+          <p:style>
+            <a:lnRef idx="3">
+              <a:schemeClr val="lt1"/>
+            </a:lnRef>
+            <a:fillRef idx="1">
+              <a:schemeClr val="accent5"/>
+            </a:fillRef>
+            <a:effectRef idx="1">
+              <a:schemeClr val="accent5"/>
+            </a:effectRef>
+            <a:fontRef idx="minor">
+              <a:schemeClr val="lt1"/>
+            </a:fontRef>
+          </p:style>
+          <p:txBody>
+            <a:bodyPr rtlCol="0" anchor="ctr"/>
+            <a:lstStyle/>
+            <a:p>
+              <a:pPr algn="ctr"/>
+              <a:r>
+                <a:rPr lang="en-US" dirty="0">
+                  <a:latin typeface="Modern No. 20" panose="02070704070505020303" pitchFamily="18" charset="77"/>
+                </a:rPr>
+                <a:t>Impute</a:t>
+              </a:r>
+            </a:p>
+          </p:txBody>
+        </p:sp>
+        <p:sp>
+          <p:nvSpPr>
+            <p:cNvPr id="22" name="Right Arrow 21">
+              <a:extLst>
+                <a:ext uri="{FF2B5EF4-FFF2-40B4-BE49-F238E27FC236}">
+                  <a16:creationId xmlns:a16="http://schemas.microsoft.com/office/drawing/2014/main" id="{3F42AE10-13C3-F062-E2EF-44A6762FF2B0}"/>
+                </a:ext>
+              </a:extLst>
+            </p:cNvPr>
+            <p:cNvSpPr/>
+            <p:nvPr/>
+          </p:nvSpPr>
+          <p:spPr>
+            <a:xfrm rot="5400000">
+              <a:off x="7744508" y="5238055"/>
+              <a:ext cx="201021" cy="107992"/>
+            </a:xfrm>
+            <a:prstGeom prst="rightArrow">
+              <a:avLst/>
+            </a:prstGeom>
+          </p:spPr>
+          <p:style>
+            <a:lnRef idx="2">
+              <a:schemeClr val="dk1">
+                <a:shade val="15000"/>
+              </a:schemeClr>
+            </a:lnRef>
+            <a:fillRef idx="1">
+              <a:schemeClr val="dk1"/>
+            </a:fillRef>
+            <a:effectRef idx="0">
+              <a:schemeClr val="dk1"/>
+            </a:effectRef>
+            <a:fontRef idx="minor">
+              <a:schemeClr val="lt1"/>
+            </a:fontRef>
+          </p:style>
+          <p:txBody>
+            <a:bodyPr rtlCol="0" anchor="ctr"/>
+            <a:lstStyle/>
+            <a:p>
+              <a:pPr algn="ctr"/>
+              <a:endParaRPr lang="en-US" dirty="0"/>
+            </a:p>
+          </p:txBody>
+        </p:sp>
+        <p:sp>
+          <p:nvSpPr>
+            <p:cNvPr id="24" name="Right Arrow 23">
+              <a:extLst>
+                <a:ext uri="{FF2B5EF4-FFF2-40B4-BE49-F238E27FC236}">
+                  <a16:creationId xmlns:a16="http://schemas.microsoft.com/office/drawing/2014/main" id="{7D34DA64-88CC-7A1A-AB2C-34220D46F3D6}"/>
+                </a:ext>
+              </a:extLst>
+            </p:cNvPr>
+            <p:cNvSpPr/>
+            <p:nvPr/>
+          </p:nvSpPr>
+          <p:spPr>
+            <a:xfrm rot="10800000">
+              <a:off x="4642665" y="5647940"/>
+              <a:ext cx="201021" cy="107992"/>
+            </a:xfrm>
+            <a:prstGeom prst="rightArrow">
+              <a:avLst/>
+            </a:prstGeom>
+          </p:spPr>
+          <p:style>
+            <a:lnRef idx="2">
+              <a:schemeClr val="dk1">
+                <a:shade val="15000"/>
+              </a:schemeClr>
+            </a:lnRef>
+            <a:fillRef idx="1">
+              <a:schemeClr val="dk1"/>
+            </a:fillRef>
+            <a:effectRef idx="0">
+              <a:schemeClr val="dk1"/>
+            </a:effectRef>
+            <a:fontRef idx="minor">
+              <a:schemeClr val="lt1"/>
+            </a:fontRef>
+          </p:style>
+          <p:txBody>
+            <a:bodyPr rtlCol="0" anchor="ctr"/>
+            <a:lstStyle/>
+            <a:p>
+              <a:pPr algn="ctr"/>
+              <a:endParaRPr lang="en-US" dirty="0"/>
+            </a:p>
+          </p:txBody>
+        </p:sp>
+        <p:sp>
+          <p:nvSpPr>
+            <p:cNvPr id="18" name="Rectangle 17">
+              <a:extLst>
+                <a:ext uri="{FF2B5EF4-FFF2-40B4-BE49-F238E27FC236}">
+                  <a16:creationId xmlns:a16="http://schemas.microsoft.com/office/drawing/2014/main" id="{A840F2FC-EF4D-4EAA-AEB9-ADDF05E55FAE}"/>
+                </a:ext>
+              </a:extLst>
+            </p:cNvPr>
+            <p:cNvSpPr/>
+            <p:nvPr/>
+          </p:nvSpPr>
+          <p:spPr>
+            <a:xfrm>
+              <a:off x="1976611" y="7094202"/>
+              <a:ext cx="502256" cy="199821"/>
+            </a:xfrm>
+            <a:prstGeom prst="rect">
+              <a:avLst/>
+            </a:prstGeom>
+            <a:solidFill>
+              <a:srgbClr val="00B050"/>
+            </a:solidFill>
+            <a:ln>
+              <a:solidFill>
+                <a:schemeClr val="tx1"/>
+              </a:solidFill>
+            </a:ln>
+          </p:spPr>
+          <p:style>
+            <a:lnRef idx="0">
+              <a:schemeClr val="accent6"/>
+            </a:lnRef>
+            <a:fillRef idx="3">
+              <a:schemeClr val="accent6"/>
+            </a:fillRef>
+            <a:effectRef idx="3">
+              <a:schemeClr val="accent6"/>
+            </a:effectRef>
+            <a:fontRef idx="minor">
+              <a:schemeClr val="lt1"/>
+            </a:fontRef>
+          </p:style>
+          <p:txBody>
+            <a:bodyPr rtlCol="0" anchor="ctr"/>
+            <a:lstStyle/>
+            <a:p>
+              <a:pPr algn="ctr"/>
+              <a:endParaRPr lang="en-US" dirty="0">
+                <a:latin typeface="Modern No. 20" panose="02070704070505020303" pitchFamily="18" charset="77"/>
+              </a:endParaRPr>
+            </a:p>
+          </p:txBody>
+        </p:sp>
+        <p:sp>
+          <p:nvSpPr>
+            <p:cNvPr id="29" name="Rectangle 28">
+              <a:extLst>
+                <a:ext uri="{FF2B5EF4-FFF2-40B4-BE49-F238E27FC236}">
+                  <a16:creationId xmlns:a16="http://schemas.microsoft.com/office/drawing/2014/main" id="{CC0A7475-B59F-7697-752E-05F9BA21E1C1}"/>
+                </a:ext>
+              </a:extLst>
+            </p:cNvPr>
+            <p:cNvSpPr/>
+            <p:nvPr/>
+          </p:nvSpPr>
+          <p:spPr>
+            <a:xfrm>
+              <a:off x="1976610" y="7349013"/>
+              <a:ext cx="502257" cy="199821"/>
+            </a:xfrm>
+            <a:prstGeom prst="rect">
+              <a:avLst/>
+            </a:prstGeom>
+            <a:ln w="9525">
+              <a:solidFill>
+                <a:schemeClr val="tx1"/>
+              </a:solidFill>
+            </a:ln>
+            <a:effectLst>
+              <a:outerShdw blurRad="50800" dist="38100" dir="5400000" algn="t" rotWithShape="0">
+                <a:prstClr val="black">
+                  <a:alpha val="40000"/>
+                </a:prstClr>
+              </a:outerShdw>
+            </a:effectLst>
+          </p:spPr>
+          <p:style>
+            <a:lnRef idx="3">
+              <a:schemeClr val="lt1"/>
+            </a:lnRef>
+            <a:fillRef idx="1">
+              <a:schemeClr val="accent2"/>
+            </a:fillRef>
+            <a:effectRef idx="1">
+              <a:schemeClr val="accent2"/>
+            </a:effectRef>
+            <a:fontRef idx="minor">
+              <a:schemeClr val="lt1"/>
+            </a:fontRef>
+          </p:style>
+          <p:txBody>
+            <a:bodyPr rtlCol="0" anchor="ctr"/>
+            <a:lstStyle/>
+            <a:p>
+              <a:pPr algn="ctr"/>
+              <a:endParaRPr lang="en-US" dirty="0">
+                <a:latin typeface="Modern No. 20" panose="02070704070505020303" pitchFamily="18" charset="77"/>
+              </a:endParaRPr>
+            </a:p>
+          </p:txBody>
+        </p:sp>
+        <p:sp>
+          <p:nvSpPr>
+            <p:cNvPr id="30" name="Rectangle 29">
+              <a:extLst>
+                <a:ext uri="{FF2B5EF4-FFF2-40B4-BE49-F238E27FC236}">
+                  <a16:creationId xmlns:a16="http://schemas.microsoft.com/office/drawing/2014/main" id="{F1528259-1A52-7806-3A78-73B173F37E3E}"/>
+                </a:ext>
+              </a:extLst>
+            </p:cNvPr>
+            <p:cNvSpPr/>
+            <p:nvPr/>
+          </p:nvSpPr>
+          <p:spPr>
+            <a:xfrm>
+              <a:off x="4140026" y="7094202"/>
+              <a:ext cx="502256" cy="199821"/>
+            </a:xfrm>
+            <a:prstGeom prst="rect">
+              <a:avLst/>
+            </a:prstGeom>
+            <a:ln w="9525">
+              <a:solidFill>
+                <a:schemeClr val="tx1"/>
+              </a:solidFill>
+            </a:ln>
+            <a:effectLst>
+              <a:outerShdw blurRad="50800" dist="38100" dir="5400000" algn="t" rotWithShape="0">
+                <a:prstClr val="black">
+                  <a:alpha val="40000"/>
+                </a:prstClr>
+              </a:outerShdw>
+            </a:effectLst>
+          </p:spPr>
+          <p:style>
+            <a:lnRef idx="3">
+              <a:schemeClr val="lt1"/>
+            </a:lnRef>
+            <a:fillRef idx="1">
+              <a:schemeClr val="accent5"/>
+            </a:fillRef>
+            <a:effectRef idx="1">
+              <a:schemeClr val="accent5"/>
+            </a:effectRef>
+            <a:fontRef idx="minor">
+              <a:schemeClr val="lt1"/>
+            </a:fontRef>
+          </p:style>
+          <p:txBody>
+            <a:bodyPr rtlCol="0" anchor="ctr"/>
+            <a:lstStyle/>
+            <a:p>
+              <a:pPr algn="ctr"/>
+              <a:endParaRPr lang="en-US" dirty="0">
+                <a:latin typeface="Modern No. 20" panose="02070704070505020303" pitchFamily="18" charset="77"/>
+              </a:endParaRPr>
+            </a:p>
+          </p:txBody>
+        </p:sp>
+        <p:sp>
+          <p:nvSpPr>
+            <p:cNvPr id="31" name="Rectangle 30">
+              <a:extLst>
+                <a:ext uri="{FF2B5EF4-FFF2-40B4-BE49-F238E27FC236}">
+                  <a16:creationId xmlns:a16="http://schemas.microsoft.com/office/drawing/2014/main" id="{CA92C061-1DBD-1A5A-C34F-9FBF03284DD6}"/>
+                </a:ext>
+              </a:extLst>
+            </p:cNvPr>
+            <p:cNvSpPr/>
+            <p:nvPr/>
+          </p:nvSpPr>
+          <p:spPr>
+            <a:xfrm>
+              <a:off x="4140025" y="7349013"/>
+              <a:ext cx="502258" cy="199821"/>
+            </a:xfrm>
+            <a:prstGeom prst="rect">
+              <a:avLst/>
+            </a:prstGeom>
+            <a:solidFill>
+              <a:srgbClr val="00B0F0"/>
+            </a:solidFill>
+            <a:ln>
+              <a:solidFill>
+                <a:schemeClr val="tx1"/>
+              </a:solidFill>
+            </a:ln>
+          </p:spPr>
+          <p:style>
+            <a:lnRef idx="0">
+              <a:schemeClr val="accent4"/>
+            </a:lnRef>
+            <a:fillRef idx="3">
+              <a:schemeClr val="accent4"/>
+            </a:fillRef>
+            <a:effectRef idx="3">
+              <a:schemeClr val="accent4"/>
+            </a:effectRef>
+            <a:fontRef idx="minor">
+              <a:schemeClr val="lt1"/>
+            </a:fontRef>
+          </p:style>
+          <p:txBody>
+            <a:bodyPr rtlCol="0" anchor="ctr"/>
+            <a:lstStyle/>
+            <a:p>
+              <a:pPr algn="ctr"/>
+              <a:endParaRPr lang="en-US" dirty="0">
+                <a:latin typeface="Modern No. 20" panose="02070704070505020303" pitchFamily="18" charset="77"/>
+              </a:endParaRPr>
+            </a:p>
+          </p:txBody>
+        </p:sp>
+        <p:sp>
+          <p:nvSpPr>
+            <p:cNvPr id="32" name="TextBox 31">
+              <a:extLst>
+                <a:ext uri="{FF2B5EF4-FFF2-40B4-BE49-F238E27FC236}">
+                  <a16:creationId xmlns:a16="http://schemas.microsoft.com/office/drawing/2014/main" id="{3C2889D2-234C-E7CA-D82C-C29D3BCC2A56}"/>
+                </a:ext>
+              </a:extLst>
+            </p:cNvPr>
+            <p:cNvSpPr txBox="1"/>
+            <p:nvPr/>
+          </p:nvSpPr>
+          <p:spPr>
+            <a:xfrm>
+              <a:off x="2460178" y="7040224"/>
+              <a:ext cx="1303562" cy="307777"/>
+            </a:xfrm>
+            <a:prstGeom prst="rect">
+              <a:avLst/>
+            </a:prstGeom>
+            <a:noFill/>
+          </p:spPr>
+          <p:txBody>
+            <a:bodyPr wrap="none" rtlCol="0">
+              <a:spAutoFit/>
+            </a:bodyPr>
+            <a:lstStyle/>
+            <a:p>
+              <a:r>
+                <a:rPr lang="en-US" sz="1400" dirty="0">
+                  <a:latin typeface="Modern No. 20" panose="02070704070505020303" pitchFamily="18" charset="77"/>
+                </a:rPr>
+                <a:t>Removing Data</a:t>
+              </a:r>
+            </a:p>
+          </p:txBody>
+        </p:sp>
+        <p:sp>
+          <p:nvSpPr>
+            <p:cNvPr id="33" name="TextBox 32">
+              <a:extLst>
+                <a:ext uri="{FF2B5EF4-FFF2-40B4-BE49-F238E27FC236}">
+                  <a16:creationId xmlns:a16="http://schemas.microsoft.com/office/drawing/2014/main" id="{4C919189-B9F4-5AA2-3B4E-9DD358FBC9D5}"/>
+                </a:ext>
+              </a:extLst>
+            </p:cNvPr>
+            <p:cNvSpPr txBox="1"/>
+            <p:nvPr/>
+          </p:nvSpPr>
+          <p:spPr>
+            <a:xfrm>
+              <a:off x="2466091" y="7295035"/>
+              <a:ext cx="1713931" cy="307777"/>
+            </a:xfrm>
+            <a:prstGeom prst="rect">
+              <a:avLst/>
+            </a:prstGeom>
+            <a:noFill/>
+          </p:spPr>
+          <p:txBody>
+            <a:bodyPr wrap="none" rtlCol="0">
+              <a:spAutoFit/>
+            </a:bodyPr>
+            <a:lstStyle/>
+            <a:p>
+              <a:r>
+                <a:rPr lang="en-US" sz="1400" dirty="0">
+                  <a:latin typeface="Modern No. 20" panose="02070704070505020303" pitchFamily="18" charset="77"/>
+                </a:rPr>
+                <a:t>Rearranging in Time</a:t>
+              </a:r>
+            </a:p>
+          </p:txBody>
+        </p:sp>
+        <p:sp>
+          <p:nvSpPr>
+            <p:cNvPr id="34" name="TextBox 33">
+              <a:extLst>
+                <a:ext uri="{FF2B5EF4-FFF2-40B4-BE49-F238E27FC236}">
+                  <a16:creationId xmlns:a16="http://schemas.microsoft.com/office/drawing/2014/main" id="{C5F02DD1-37BE-8E37-6E74-BF989D04753A}"/>
+                </a:ext>
+              </a:extLst>
+            </p:cNvPr>
+            <p:cNvSpPr txBox="1"/>
+            <p:nvPr/>
+          </p:nvSpPr>
+          <p:spPr>
+            <a:xfrm>
+              <a:off x="4642281" y="7040224"/>
+              <a:ext cx="1096775" cy="307777"/>
+            </a:xfrm>
+            <a:prstGeom prst="rect">
+              <a:avLst/>
+            </a:prstGeom>
+            <a:noFill/>
+          </p:spPr>
+          <p:txBody>
+            <a:bodyPr wrap="none" rtlCol="0">
+              <a:spAutoFit/>
+            </a:bodyPr>
+            <a:lstStyle/>
+            <a:p>
+              <a:r>
+                <a:rPr lang="en-US" sz="1400" dirty="0">
+                  <a:latin typeface="Modern No. 20" panose="02070704070505020303" pitchFamily="18" charset="77"/>
+                </a:rPr>
+                <a:t>Filling Data</a:t>
+              </a:r>
+            </a:p>
+          </p:txBody>
+        </p:sp>
+        <p:sp>
+          <p:nvSpPr>
+            <p:cNvPr id="35" name="TextBox 34">
+              <a:extLst>
+                <a:ext uri="{FF2B5EF4-FFF2-40B4-BE49-F238E27FC236}">
+                  <a16:creationId xmlns:a16="http://schemas.microsoft.com/office/drawing/2014/main" id="{1235D203-7AC0-9986-B6F4-8D245635DFB4}"/>
+                </a:ext>
+              </a:extLst>
+            </p:cNvPr>
+            <p:cNvSpPr txBox="1"/>
+            <p:nvPr/>
+          </p:nvSpPr>
+          <p:spPr>
+            <a:xfrm>
+              <a:off x="4642280" y="7295035"/>
+              <a:ext cx="1269899" cy="307777"/>
+            </a:xfrm>
+            <a:prstGeom prst="rect">
+              <a:avLst/>
+            </a:prstGeom>
+            <a:noFill/>
+          </p:spPr>
+          <p:txBody>
+            <a:bodyPr wrap="none" rtlCol="0">
+              <a:spAutoFit/>
+            </a:bodyPr>
+            <a:lstStyle/>
+            <a:p>
+              <a:r>
+                <a:rPr lang="en-US" sz="1400" dirty="0">
+                  <a:latin typeface="Modern No. 20" panose="02070704070505020303" pitchFamily="18" charset="77"/>
+                </a:rPr>
+                <a:t>Changing Data</a:t>
+              </a:r>
+            </a:p>
+          </p:txBody>
+        </p:sp>
+        <p:sp>
+          <p:nvSpPr>
+            <p:cNvPr id="39" name="Parallelogram 38">
+              <a:extLst>
+                <a:ext uri="{FF2B5EF4-FFF2-40B4-BE49-F238E27FC236}">
+                  <a16:creationId xmlns:a16="http://schemas.microsoft.com/office/drawing/2014/main" id="{FDA5EA7C-51D1-15F7-A2F3-AEF94CA4BBD8}"/>
+                </a:ext>
+              </a:extLst>
+            </p:cNvPr>
+            <p:cNvSpPr/>
+            <p:nvPr/>
+          </p:nvSpPr>
+          <p:spPr>
+            <a:xfrm>
+              <a:off x="7626741" y="6210814"/>
+              <a:ext cx="2240280" cy="602847"/>
+            </a:xfrm>
+            <a:prstGeom prst="parallelogram">
+              <a:avLst/>
+            </a:prstGeom>
+            <a:ln w="9525">
+              <a:solidFill>
+                <a:schemeClr val="tx1"/>
+              </a:solidFill>
+            </a:ln>
+            <a:effectLst>
+              <a:outerShdw blurRad="50800" dist="38100" dir="5400000" algn="t" rotWithShape="0">
+                <a:prstClr val="black">
+                  <a:alpha val="40000"/>
+                </a:prstClr>
+              </a:outerShdw>
+            </a:effectLst>
+          </p:spPr>
+          <p:style>
+            <a:lnRef idx="2">
+              <a:schemeClr val="accent1">
+                <a:shade val="15000"/>
+              </a:schemeClr>
+            </a:lnRef>
+            <a:fillRef idx="1">
+              <a:schemeClr val="accent1"/>
+            </a:fillRef>
+            <a:effectRef idx="0">
+              <a:schemeClr val="accent1"/>
+            </a:effectRef>
+            <a:fontRef idx="minor">
+              <a:schemeClr val="lt1"/>
+            </a:fontRef>
+          </p:style>
+          <p:txBody>
+            <a:bodyPr rtlCol="0" anchor="ctr"/>
+            <a:lstStyle/>
+            <a:p>
+              <a:pPr algn="ctr"/>
+              <a:r>
+                <a:rPr lang="en-US" dirty="0">
+                  <a:latin typeface="Modern No. 20" panose="02070704070505020303" pitchFamily="18" charset="77"/>
+                </a:rPr>
+                <a:t>Filtered, Continuous Data</a:t>
+              </a:r>
+            </a:p>
+          </p:txBody>
+        </p:sp>
+        <p:sp>
+          <p:nvSpPr>
+            <p:cNvPr id="6" name="Rectangle 5">
+              <a:extLst>
+                <a:ext uri="{FF2B5EF4-FFF2-40B4-BE49-F238E27FC236}">
+                  <a16:creationId xmlns:a16="http://schemas.microsoft.com/office/drawing/2014/main" id="{9F32C008-A23C-A358-EBB5-A68B34198C77}"/>
+                </a:ext>
+              </a:extLst>
+            </p:cNvPr>
+            <p:cNvSpPr/>
+            <p:nvPr/>
+          </p:nvSpPr>
+          <p:spPr>
+            <a:xfrm>
+              <a:off x="7064273" y="4582432"/>
+              <a:ext cx="1409479" cy="601883"/>
+            </a:xfrm>
+            <a:prstGeom prst="rect">
+              <a:avLst/>
+            </a:prstGeom>
+            <a:solidFill>
+              <a:srgbClr val="00B050"/>
+            </a:solidFill>
+            <a:ln>
+              <a:solidFill>
+                <a:schemeClr val="tx1"/>
+              </a:solidFill>
+            </a:ln>
+            <a:effectLst>
+              <a:outerShdw blurRad="50800" dist="38100" dir="5400000" algn="t" rotWithShape="0">
+                <a:prstClr val="black">
+                  <a:alpha val="40000"/>
+                </a:prstClr>
+              </a:outerShdw>
+            </a:effectLst>
+          </p:spPr>
+          <p:style>
+            <a:lnRef idx="0">
+              <a:schemeClr val="accent6"/>
+            </a:lnRef>
+            <a:fillRef idx="3">
+              <a:schemeClr val="accent6"/>
+            </a:fillRef>
+            <a:effectRef idx="3">
+              <a:schemeClr val="accent6"/>
+            </a:effectRef>
+            <a:fontRef idx="minor">
+              <a:schemeClr val="lt1"/>
+            </a:fontRef>
+          </p:style>
+          <p:txBody>
+            <a:bodyPr rtlCol="0" anchor="ctr"/>
+            <a:lstStyle/>
+            <a:p>
+              <a:pPr algn="ctr"/>
+              <a:r>
+                <a:rPr lang="en-US" dirty="0">
+                  <a:latin typeface="Modern No. 20" panose="02070704070505020303" pitchFamily="18" charset="77"/>
+                </a:rPr>
+                <a:t>Wind Mag. Range Filter</a:t>
+              </a:r>
+            </a:p>
+          </p:txBody>
+        </p:sp>
+        <p:sp>
+          <p:nvSpPr>
+            <p:cNvPr id="17" name="Right Arrow 16">
+              <a:extLst>
+                <a:ext uri="{FF2B5EF4-FFF2-40B4-BE49-F238E27FC236}">
+                  <a16:creationId xmlns:a16="http://schemas.microsoft.com/office/drawing/2014/main" id="{921AAC4B-9EB2-22B3-E3D0-E1282F403612}"/>
+                </a:ext>
+              </a:extLst>
+            </p:cNvPr>
+            <p:cNvSpPr/>
+            <p:nvPr/>
+          </p:nvSpPr>
+          <p:spPr>
+            <a:xfrm rot="5400000">
+              <a:off x="3525021" y="6050349"/>
+              <a:ext cx="201021" cy="107992"/>
+            </a:xfrm>
+            <a:prstGeom prst="rightArrow">
+              <a:avLst/>
+            </a:prstGeom>
+          </p:spPr>
+          <p:style>
+            <a:lnRef idx="2">
+              <a:schemeClr val="dk1">
+                <a:shade val="15000"/>
+              </a:schemeClr>
+            </a:lnRef>
+            <a:fillRef idx="1">
+              <a:schemeClr val="dk1"/>
+            </a:fillRef>
+            <a:effectRef idx="0">
+              <a:schemeClr val="dk1"/>
+            </a:effectRef>
+            <a:fontRef idx="minor">
+              <a:schemeClr val="lt1"/>
+            </a:fontRef>
+          </p:style>
+          <p:txBody>
+            <a:bodyPr rtlCol="0" anchor="ctr"/>
+            <a:lstStyle/>
+            <a:p>
+              <a:pPr algn="ctr"/>
+              <a:endParaRPr lang="en-US" dirty="0"/>
+            </a:p>
+          </p:txBody>
+        </p:sp>
+        <p:sp>
+          <p:nvSpPr>
+            <p:cNvPr id="41" name="Right Arrow 40">
+              <a:extLst>
+                <a:ext uri="{FF2B5EF4-FFF2-40B4-BE49-F238E27FC236}">
+                  <a16:creationId xmlns:a16="http://schemas.microsoft.com/office/drawing/2014/main" id="{7F0EA875-9320-77C3-463D-B3802F4E65EC}"/>
+                </a:ext>
+              </a:extLst>
+            </p:cNvPr>
+            <p:cNvSpPr/>
+            <p:nvPr/>
+          </p:nvSpPr>
+          <p:spPr>
+            <a:xfrm>
+              <a:off x="6849594" y="4828724"/>
+              <a:ext cx="201021" cy="107992"/>
+            </a:xfrm>
+            <a:prstGeom prst="rightArrow">
+              <a:avLst/>
+            </a:prstGeom>
+          </p:spPr>
+          <p:style>
+            <a:lnRef idx="2">
+              <a:schemeClr val="dk1">
+                <a:shade val="15000"/>
+              </a:schemeClr>
+            </a:lnRef>
+            <a:fillRef idx="1">
+              <a:schemeClr val="dk1"/>
+            </a:fillRef>
+            <a:effectRef idx="0">
+              <a:schemeClr val="dk1"/>
+            </a:effectRef>
+            <a:fontRef idx="minor">
+              <a:schemeClr val="lt1"/>
+            </a:fontRef>
+          </p:style>
+          <p:txBody>
+            <a:bodyPr rtlCol="0" anchor="ctr"/>
+            <a:lstStyle/>
+            <a:p>
+              <a:pPr algn="ctr"/>
+              <a:endParaRPr lang="en-US" dirty="0"/>
+            </a:p>
+          </p:txBody>
+        </p:sp>
+        <p:sp>
+          <p:nvSpPr>
+            <p:cNvPr id="42" name="Right Arrow 41">
+              <a:extLst>
+                <a:ext uri="{FF2B5EF4-FFF2-40B4-BE49-F238E27FC236}">
+                  <a16:creationId xmlns:a16="http://schemas.microsoft.com/office/drawing/2014/main" id="{B4D351F7-DFC8-A7DB-BE99-C494A14FABBE}"/>
+                </a:ext>
+              </a:extLst>
+            </p:cNvPr>
+            <p:cNvSpPr/>
+            <p:nvPr/>
+          </p:nvSpPr>
+          <p:spPr>
+            <a:xfrm rot="10800000">
+              <a:off x="6180684" y="5643840"/>
+              <a:ext cx="201021" cy="107992"/>
+            </a:xfrm>
+            <a:prstGeom prst="rightArrow">
+              <a:avLst/>
+            </a:prstGeom>
+          </p:spPr>
+          <p:style>
+            <a:lnRef idx="2">
+              <a:schemeClr val="dk1">
+                <a:shade val="15000"/>
+              </a:schemeClr>
+            </a:lnRef>
+            <a:fillRef idx="1">
+              <a:schemeClr val="dk1"/>
+            </a:fillRef>
+            <a:effectRef idx="0">
+              <a:schemeClr val="dk1"/>
+            </a:effectRef>
+            <a:fontRef idx="minor">
+              <a:schemeClr val="lt1"/>
+            </a:fontRef>
+          </p:style>
+          <p:txBody>
+            <a:bodyPr rtlCol="0" anchor="ctr"/>
+            <a:lstStyle/>
+            <a:p>
+              <a:pPr algn="ctr"/>
+              <a:endParaRPr lang="en-US" dirty="0"/>
+            </a:p>
+          </p:txBody>
+        </p:sp>
+        <p:sp>
+          <p:nvSpPr>
+            <p:cNvPr id="43" name="Right Arrow 42">
+              <a:extLst>
+                <a:ext uri="{FF2B5EF4-FFF2-40B4-BE49-F238E27FC236}">
+                  <a16:creationId xmlns:a16="http://schemas.microsoft.com/office/drawing/2014/main" id="{E11D6FD3-2041-3783-0135-9A00C405A498}"/>
+                </a:ext>
+              </a:extLst>
+            </p:cNvPr>
+            <p:cNvSpPr/>
+            <p:nvPr/>
+          </p:nvSpPr>
+          <p:spPr>
+            <a:xfrm>
+              <a:off x="7491478" y="6457760"/>
+              <a:ext cx="201021" cy="107992"/>
+            </a:xfrm>
+            <a:prstGeom prst="rightArrow">
+              <a:avLst/>
+            </a:prstGeom>
+          </p:spPr>
+          <p:style>
+            <a:lnRef idx="2">
+              <a:schemeClr val="dk1">
+                <a:shade val="15000"/>
+              </a:schemeClr>
+            </a:lnRef>
+            <a:fillRef idx="1">
+              <a:schemeClr val="dk1"/>
+            </a:fillRef>
+            <a:effectRef idx="0">
+              <a:schemeClr val="dk1"/>
+            </a:effectRef>
+            <a:fontRef idx="minor">
+              <a:schemeClr val="lt1"/>
+            </a:fontRef>
+          </p:style>
+          <p:txBody>
+            <a:bodyPr rtlCol="0" anchor="ctr"/>
+            <a:lstStyle/>
+            <a:p>
+              <a:pPr algn="ctr"/>
+              <a:endParaRPr lang="en-US" dirty="0"/>
+            </a:p>
+          </p:txBody>
+        </p:sp>
+        <p:sp>
+          <p:nvSpPr>
+            <p:cNvPr id="44" name="Right Arrow 43">
+              <a:extLst>
+                <a:ext uri="{FF2B5EF4-FFF2-40B4-BE49-F238E27FC236}">
+                  <a16:creationId xmlns:a16="http://schemas.microsoft.com/office/drawing/2014/main" id="{F0E99AE0-4FF2-6503-BB76-E738750F0D11}"/>
+                </a:ext>
+              </a:extLst>
+            </p:cNvPr>
+            <p:cNvSpPr/>
+            <p:nvPr/>
+          </p:nvSpPr>
+          <p:spPr>
+            <a:xfrm>
+              <a:off x="4202149" y="6477606"/>
+              <a:ext cx="201021" cy="107992"/>
+            </a:xfrm>
+            <a:prstGeom prst="rightArrow">
+              <a:avLst/>
+            </a:prstGeom>
+          </p:spPr>
+          <p:style>
+            <a:lnRef idx="2">
+              <a:schemeClr val="dk1">
+                <a:shade val="15000"/>
+              </a:schemeClr>
+            </a:lnRef>
+            <a:fillRef idx="1">
+              <a:schemeClr val="dk1"/>
+            </a:fillRef>
+            <a:effectRef idx="0">
+              <a:schemeClr val="dk1"/>
+            </a:effectRef>
+            <a:fontRef idx="minor">
+              <a:schemeClr val="lt1"/>
+            </a:fontRef>
+          </p:style>
+          <p:txBody>
+            <a:bodyPr rtlCol="0" anchor="ctr"/>
+            <a:lstStyle/>
+            <a:p>
+              <a:pPr algn="ctr"/>
+              <a:r>
+                <a:rPr lang="en-US" dirty="0"/>
+                <a:t>    </a:t>
+              </a:r>
+            </a:p>
+          </p:txBody>
+        </p:sp>
+        <p:sp>
+          <p:nvSpPr>
+            <p:cNvPr id="10" name="Right Arrow 9">
+              <a:extLst>
+                <a:ext uri="{FF2B5EF4-FFF2-40B4-BE49-F238E27FC236}">
+                  <a16:creationId xmlns:a16="http://schemas.microsoft.com/office/drawing/2014/main" id="{8D87CEBC-B562-369C-9272-65E20ECB56E8}"/>
+                </a:ext>
+              </a:extLst>
+            </p:cNvPr>
+            <p:cNvSpPr/>
+            <p:nvPr/>
+          </p:nvSpPr>
+          <p:spPr>
+            <a:xfrm>
+              <a:off x="6359640" y="6457760"/>
+              <a:ext cx="201021" cy="107992"/>
+            </a:xfrm>
+            <a:prstGeom prst="rightArrow">
+              <a:avLst/>
+            </a:prstGeom>
+          </p:spPr>
+          <p:style>
+            <a:lnRef idx="2">
+              <a:schemeClr val="dk1">
+                <a:shade val="15000"/>
+              </a:schemeClr>
+            </a:lnRef>
+            <a:fillRef idx="1">
+              <a:schemeClr val="dk1"/>
+            </a:fillRef>
+            <a:effectRef idx="0">
+              <a:schemeClr val="dk1"/>
+            </a:effectRef>
+            <a:fontRef idx="minor">
+              <a:schemeClr val="lt1"/>
+            </a:fontRef>
+          </p:style>
+          <p:txBody>
+            <a:bodyPr rtlCol="0" anchor="ctr"/>
+            <a:lstStyle/>
+            <a:p>
+              <a:pPr algn="ctr"/>
+              <a:endParaRPr lang="en-US" dirty="0"/>
+            </a:p>
+          </p:txBody>
+        </p:sp>
+        <p:sp>
+          <p:nvSpPr>
+            <p:cNvPr id="37" name="Parallelogram 36">
+              <a:extLst>
+                <a:ext uri="{FF2B5EF4-FFF2-40B4-BE49-F238E27FC236}">
+                  <a16:creationId xmlns:a16="http://schemas.microsoft.com/office/drawing/2014/main" id="{5DEDDE0A-57BD-D69C-6320-F06E9956EF93}"/>
+                </a:ext>
+              </a:extLst>
+            </p:cNvPr>
+            <p:cNvSpPr/>
+            <p:nvPr/>
+          </p:nvSpPr>
+          <p:spPr>
+            <a:xfrm>
+              <a:off x="7495793" y="7121086"/>
+              <a:ext cx="1792224" cy="380491"/>
+            </a:xfrm>
+            <a:prstGeom prst="parallelogram">
+              <a:avLst/>
+            </a:prstGeom>
+            <a:ln w="9525">
+              <a:solidFill>
+                <a:schemeClr val="tx1"/>
+              </a:solidFill>
+            </a:ln>
+            <a:effectLst>
+              <a:outerShdw blurRad="50800" dist="38100" dir="5400000" algn="t" rotWithShape="0">
+                <a:prstClr val="black">
+                  <a:alpha val="40000"/>
+                </a:prstClr>
+              </a:outerShdw>
+            </a:effectLst>
+          </p:spPr>
+          <p:style>
+            <a:lnRef idx="2">
+              <a:schemeClr val="accent1">
+                <a:shade val="15000"/>
+              </a:schemeClr>
+            </a:lnRef>
+            <a:fillRef idx="1">
+              <a:schemeClr val="accent1"/>
+            </a:fillRef>
+            <a:effectRef idx="0">
+              <a:schemeClr val="accent1"/>
+            </a:effectRef>
+            <a:fontRef idx="minor">
+              <a:schemeClr val="lt1"/>
+            </a:fontRef>
+          </p:style>
+          <p:txBody>
+            <a:bodyPr rtlCol="0" anchor="ctr"/>
+            <a:lstStyle/>
+            <a:p>
+              <a:pPr algn="ctr"/>
+              <a:r>
+                <a:rPr lang="en-US" sz="1600" dirty="0">
+                  <a:latin typeface="Modern No. 20" panose="02070704070505020303" pitchFamily="18" charset="77"/>
+                </a:rPr>
+                <a:t>Tr</a:t>
+              </a:r>
+              <a:endParaRPr lang="en-US" dirty="0">
+                <a:latin typeface="Modern No. 20" panose="02070704070505020303" pitchFamily="18" charset="77"/>
+              </a:endParaRPr>
+            </a:p>
+          </p:txBody>
+        </p:sp>
+        <p:sp>
+          <p:nvSpPr>
+            <p:cNvPr id="38" name="Parallelogram 37">
+              <a:extLst>
+                <a:ext uri="{FF2B5EF4-FFF2-40B4-BE49-F238E27FC236}">
+                  <a16:creationId xmlns:a16="http://schemas.microsoft.com/office/drawing/2014/main" id="{7E40B525-E0B0-3096-CE51-7EA04F8017C9}"/>
+                </a:ext>
+              </a:extLst>
+            </p:cNvPr>
+            <p:cNvSpPr/>
+            <p:nvPr/>
+          </p:nvSpPr>
+          <p:spPr>
+            <a:xfrm>
+              <a:off x="9278363" y="7109664"/>
+              <a:ext cx="228600" cy="388962"/>
+            </a:xfrm>
+            <a:prstGeom prst="parallelogram">
+              <a:avLst/>
+            </a:prstGeom>
+            <a:ln w="9525">
+              <a:solidFill>
+                <a:schemeClr val="tx1"/>
+              </a:solidFill>
+            </a:ln>
+            <a:effectLst>
+              <a:outerShdw blurRad="50800" dist="38100" dir="5400000" algn="t" rotWithShape="0">
+                <a:prstClr val="black">
+                  <a:alpha val="40000"/>
+                </a:prstClr>
+              </a:outerShdw>
+            </a:effectLst>
+          </p:spPr>
+          <p:style>
+            <a:lnRef idx="2">
+              <a:schemeClr val="accent1">
+                <a:shade val="15000"/>
+              </a:schemeClr>
+            </a:lnRef>
+            <a:fillRef idx="1">
+              <a:schemeClr val="accent1"/>
+            </a:fillRef>
+            <a:effectRef idx="0">
+              <a:schemeClr val="accent1"/>
+            </a:effectRef>
+            <a:fontRef idx="minor">
+              <a:schemeClr val="lt1"/>
+            </a:fontRef>
+          </p:style>
+          <p:txBody>
+            <a:bodyPr rtlCol="0" anchor="ctr"/>
+            <a:lstStyle/>
+            <a:p>
+              <a:pPr algn="ctr"/>
+              <a:r>
+                <a:rPr lang="en-US" sz="1600" dirty="0">
+                  <a:latin typeface="Modern No. 20" panose="02070704070505020303" pitchFamily="18" charset="77"/>
+                </a:rPr>
+                <a:t>V</a:t>
+              </a:r>
+              <a:endParaRPr lang="en-US" dirty="0">
+                <a:latin typeface="Modern No. 20" panose="02070704070505020303" pitchFamily="18" charset="77"/>
+              </a:endParaRPr>
+            </a:p>
+          </p:txBody>
+        </p:sp>
+        <p:sp>
+          <p:nvSpPr>
+            <p:cNvPr id="40" name="Parallelogram 39">
+              <a:extLst>
+                <a:ext uri="{FF2B5EF4-FFF2-40B4-BE49-F238E27FC236}">
+                  <a16:creationId xmlns:a16="http://schemas.microsoft.com/office/drawing/2014/main" id="{6FAB8EC8-A30F-7819-C249-BF72B2F69D38}"/>
+                </a:ext>
+              </a:extLst>
+            </p:cNvPr>
+            <p:cNvSpPr/>
+            <p:nvPr/>
+          </p:nvSpPr>
+          <p:spPr>
+            <a:xfrm>
+              <a:off x="9497309" y="7121086"/>
+              <a:ext cx="228600" cy="380491"/>
+            </a:xfrm>
+            <a:prstGeom prst="parallelogram">
+              <a:avLst/>
+            </a:prstGeom>
+            <a:ln w="9525">
+              <a:solidFill>
+                <a:schemeClr val="tx1"/>
+              </a:solidFill>
+            </a:ln>
+            <a:effectLst>
+              <a:outerShdw blurRad="50800" dist="38100" dir="5400000" algn="t" rotWithShape="0">
+                <a:prstClr val="black">
+                  <a:alpha val="40000"/>
+                </a:prstClr>
+              </a:outerShdw>
+            </a:effectLst>
+          </p:spPr>
+          <p:style>
+            <a:lnRef idx="2">
+              <a:schemeClr val="accent1">
+                <a:shade val="15000"/>
+              </a:schemeClr>
+            </a:lnRef>
+            <a:fillRef idx="1">
+              <a:schemeClr val="accent1"/>
+            </a:fillRef>
+            <a:effectRef idx="0">
+              <a:schemeClr val="accent1"/>
+            </a:effectRef>
+            <a:fontRef idx="minor">
+              <a:schemeClr val="lt1"/>
+            </a:fontRef>
+          </p:style>
+          <p:txBody>
+            <a:bodyPr rtlCol="0" anchor="ctr"/>
+            <a:lstStyle/>
+            <a:p>
+              <a:pPr algn="ctr"/>
+              <a:r>
+                <a:rPr lang="en-US" sz="1600" dirty="0">
+                  <a:latin typeface="Modern No. 20" panose="02070704070505020303" pitchFamily="18" charset="77"/>
+                </a:rPr>
+                <a:t>T</a:t>
+              </a:r>
+              <a:endParaRPr lang="en-US" dirty="0">
+                <a:latin typeface="Modern No. 20" panose="02070704070505020303" pitchFamily="18" charset="77"/>
+              </a:endParaRPr>
+            </a:p>
+          </p:txBody>
+        </p:sp>
+        <p:sp>
+          <p:nvSpPr>
+            <p:cNvPr id="47" name="Right Arrow 46">
+              <a:extLst>
+                <a:ext uri="{FF2B5EF4-FFF2-40B4-BE49-F238E27FC236}">
+                  <a16:creationId xmlns:a16="http://schemas.microsoft.com/office/drawing/2014/main" id="{F9E11317-E49E-98EB-0C17-99360D8E2674}"/>
+                </a:ext>
+              </a:extLst>
+            </p:cNvPr>
+            <p:cNvSpPr/>
+            <p:nvPr/>
+          </p:nvSpPr>
+          <p:spPr>
+            <a:xfrm rot="5400000" flipV="1">
+              <a:off x="8250558" y="6905541"/>
+              <a:ext cx="282695" cy="112246"/>
+            </a:xfrm>
+            <a:prstGeom prst="rightArrow">
+              <a:avLst/>
+            </a:prstGeom>
+          </p:spPr>
+          <p:style>
+            <a:lnRef idx="2">
+              <a:schemeClr val="dk1">
+                <a:shade val="15000"/>
+              </a:schemeClr>
+            </a:lnRef>
+            <a:fillRef idx="1">
+              <a:schemeClr val="dk1"/>
+            </a:fillRef>
+            <a:effectRef idx="0">
+              <a:schemeClr val="dk1"/>
+            </a:effectRef>
+            <a:fontRef idx="minor">
+              <a:schemeClr val="lt1"/>
+            </a:fontRef>
+          </p:style>
+          <p:txBody>
+            <a:bodyPr rtlCol="0" anchor="ctr"/>
+            <a:lstStyle/>
+            <a:p>
+              <a:pPr algn="ctr"/>
+              <a:endParaRPr lang="en-US" dirty="0"/>
+            </a:p>
+          </p:txBody>
+        </p:sp>
+        <p:sp>
+          <p:nvSpPr>
+            <p:cNvPr id="23" name="Rectangle 22">
+              <a:extLst>
+                <a:ext uri="{FF2B5EF4-FFF2-40B4-BE49-F238E27FC236}">
+                  <a16:creationId xmlns:a16="http://schemas.microsoft.com/office/drawing/2014/main" id="{0D6CFBD9-42FC-96BA-0880-09B9B2157721}"/>
+                </a:ext>
+              </a:extLst>
+            </p:cNvPr>
+            <p:cNvSpPr/>
+            <p:nvPr/>
+          </p:nvSpPr>
+          <p:spPr>
+            <a:xfrm>
+              <a:off x="6387431" y="5400994"/>
+              <a:ext cx="2026308" cy="601883"/>
+            </a:xfrm>
+            <a:prstGeom prst="rect">
+              <a:avLst/>
+            </a:prstGeom>
+            <a:solidFill>
+              <a:srgbClr val="00B050"/>
+            </a:solidFill>
+            <a:ln>
+              <a:solidFill>
+                <a:schemeClr val="tx1"/>
+              </a:solidFill>
+            </a:ln>
+            <a:effectLst>
+              <a:outerShdw blurRad="50800" dist="38100" dir="5400000" algn="t" rotWithShape="0">
+                <a:prstClr val="black">
+                  <a:alpha val="40000"/>
+                </a:prstClr>
+              </a:outerShdw>
+            </a:effectLst>
+          </p:spPr>
+          <p:style>
+            <a:lnRef idx="0">
+              <a:schemeClr val="accent6"/>
+            </a:lnRef>
+            <a:fillRef idx="3">
+              <a:schemeClr val="accent6"/>
+            </a:fillRef>
+            <a:effectRef idx="3">
+              <a:schemeClr val="accent6"/>
+            </a:effectRef>
+            <a:fontRef idx="minor">
+              <a:schemeClr val="lt1"/>
+            </a:fontRef>
+          </p:style>
+          <p:txBody>
+            <a:bodyPr rtlCol="0" anchor="ctr"/>
+            <a:lstStyle/>
+            <a:p>
+              <a:pPr algn="ctr"/>
+              <a:r>
+                <a:rPr lang="en-US">
+                  <a:latin typeface="Modern No. 20" panose="02070704070505020303" pitchFamily="18" charset="77"/>
+                </a:rPr>
+                <a:t>Power-Wind Mag. </a:t>
+              </a:r>
+              <a:r>
+                <a:rPr lang="en-US" dirty="0">
+                  <a:latin typeface="Modern No. 20" panose="02070704070505020303" pitchFamily="18" charset="77"/>
+                </a:rPr>
+                <a:t>Window Filter</a:t>
+              </a:r>
+            </a:p>
+          </p:txBody>
+        </p:sp>
+        <p:sp>
+          <p:nvSpPr>
+            <p:cNvPr id="25" name="Right Arrow 24">
+              <a:extLst>
+                <a:ext uri="{FF2B5EF4-FFF2-40B4-BE49-F238E27FC236}">
+                  <a16:creationId xmlns:a16="http://schemas.microsoft.com/office/drawing/2014/main" id="{80E55F7C-A5D7-F1AD-7805-DB1FEA80D4F6}"/>
+                </a:ext>
+              </a:extLst>
+            </p:cNvPr>
+            <p:cNvSpPr/>
+            <p:nvPr/>
+          </p:nvSpPr>
+          <p:spPr>
+            <a:xfrm>
+              <a:off x="5444125" y="6476086"/>
+              <a:ext cx="201021" cy="107992"/>
+            </a:xfrm>
+            <a:prstGeom prst="rightArrow">
+              <a:avLst/>
+            </a:prstGeom>
+          </p:spPr>
+          <p:style>
+            <a:lnRef idx="2">
+              <a:schemeClr val="dk1">
+                <a:shade val="15000"/>
+              </a:schemeClr>
+            </a:lnRef>
+            <a:fillRef idx="1">
+              <a:schemeClr val="dk1"/>
+            </a:fillRef>
+            <a:effectRef idx="0">
+              <a:schemeClr val="dk1"/>
+            </a:effectRef>
+            <a:fontRef idx="minor">
+              <a:schemeClr val="lt1"/>
+            </a:fontRef>
+          </p:style>
+          <p:txBody>
+            <a:bodyPr rtlCol="0" anchor="ctr"/>
+            <a:lstStyle/>
+            <a:p>
+              <a:pPr algn="ctr"/>
+              <a:endParaRPr lang="en-US" dirty="0"/>
+            </a:p>
+          </p:txBody>
+        </p:sp>
+        <p:sp>
+          <p:nvSpPr>
+            <p:cNvPr id="26" name="Right Arrow 25">
+              <a:extLst>
+                <a:ext uri="{FF2B5EF4-FFF2-40B4-BE49-F238E27FC236}">
+                  <a16:creationId xmlns:a16="http://schemas.microsoft.com/office/drawing/2014/main" id="{3C4BC39C-E64F-6673-DF2F-30FDF3D12B79}"/>
+                </a:ext>
+              </a:extLst>
+            </p:cNvPr>
+            <p:cNvSpPr/>
+            <p:nvPr/>
+          </p:nvSpPr>
+          <p:spPr>
+            <a:xfrm rot="5400000" flipV="1">
+              <a:off x="9276256" y="6905540"/>
+              <a:ext cx="282695" cy="112246"/>
+            </a:xfrm>
+            <a:prstGeom prst="rightArrow">
+              <a:avLst/>
+            </a:prstGeom>
+          </p:spPr>
+          <p:style>
+            <a:lnRef idx="2">
+              <a:schemeClr val="dk1">
+                <a:shade val="15000"/>
+              </a:schemeClr>
+            </a:lnRef>
+            <a:fillRef idx="1">
+              <a:schemeClr val="dk1"/>
+            </a:fillRef>
+            <a:effectRef idx="0">
+              <a:schemeClr val="dk1"/>
+            </a:effectRef>
+            <a:fontRef idx="minor">
+              <a:schemeClr val="lt1"/>
+            </a:fontRef>
+          </p:style>
+          <p:txBody>
+            <a:bodyPr rtlCol="0" anchor="ctr"/>
+            <a:lstStyle/>
+            <a:p>
+              <a:pPr algn="ctr"/>
+              <a:endParaRPr lang="en-US" dirty="0"/>
+            </a:p>
+          </p:txBody>
+        </p:sp>
+        <p:sp>
+          <p:nvSpPr>
+            <p:cNvPr id="27" name="Right Arrow 26">
+              <a:extLst>
+                <a:ext uri="{FF2B5EF4-FFF2-40B4-BE49-F238E27FC236}">
+                  <a16:creationId xmlns:a16="http://schemas.microsoft.com/office/drawing/2014/main" id="{181A606F-CC52-9FF9-9C5F-48527BA7F013}"/>
+                </a:ext>
+              </a:extLst>
+            </p:cNvPr>
+            <p:cNvSpPr/>
+            <p:nvPr/>
+          </p:nvSpPr>
+          <p:spPr>
+            <a:xfrm rot="5400000" flipV="1">
+              <a:off x="9492223" y="6906198"/>
+              <a:ext cx="282695" cy="112246"/>
+            </a:xfrm>
+            <a:prstGeom prst="rightArrow">
+              <a:avLst/>
+            </a:prstGeom>
+          </p:spPr>
+          <p:style>
+            <a:lnRef idx="2">
+              <a:schemeClr val="dk1">
+                <a:shade val="15000"/>
+              </a:schemeClr>
+            </a:lnRef>
+            <a:fillRef idx="1">
+              <a:schemeClr val="dk1"/>
+            </a:fillRef>
+            <a:effectRef idx="0">
+              <a:schemeClr val="dk1"/>
+            </a:effectRef>
+            <a:fontRef idx="minor">
+              <a:schemeClr val="lt1"/>
+            </a:fontRef>
+          </p:style>
+          <p:txBody>
+            <a:bodyPr rtlCol="0" anchor="ctr"/>
+            <a:lstStyle/>
+            <a:p>
+              <a:pPr algn="ctr"/>
+              <a:endParaRPr lang="en-US" dirty="0"/>
+            </a:p>
+          </p:txBody>
+        </p:sp>
+      </p:grpSp>
+    </p:spTree>
+    <p:extLst>
+      <p:ext uri="{BB962C8B-B14F-4D97-AF65-F5344CB8AC3E}">
+        <p14:creationId xmlns:p14="http://schemas.microsoft.com/office/powerpoint/2010/main" val="1842382080"/>
+      </p:ext>
+    </p:extLst>
+  </p:cSld>
+  <p:clrMapOvr>
+    <a:masterClrMapping/>
+  </p:clrMapOvr>
+</p:sld>
+</file>
+
+<file path=ppt/slides/slide3.xml><?xml version="1.0" encoding="utf-8"?>
+<p:sld xmlns:a="http://schemas.openxmlformats.org/drawingml/2006/main" xmlns:r="http://schemas.openxmlformats.org/officeDocument/2006/relationships" xmlns:p="http://schemas.openxmlformats.org/presentationml/2006/main">
+  <p:cSld>
+    <p:spTree>
+      <p:nvGrpSpPr>
+        <p:cNvPr id="1" name="">
+          <a:extLst>
+            <a:ext uri="{FF2B5EF4-FFF2-40B4-BE49-F238E27FC236}">
+              <a16:creationId xmlns:a16="http://schemas.microsoft.com/office/drawing/2014/main" id="{49C400EA-970F-579A-C9BC-A63BD7C4F7D3}"/>
+            </a:ext>
+          </a:extLst>
+        </p:cNvPr>
+        <p:cNvGrpSpPr/>
+        <p:nvPr/>
+      </p:nvGrpSpPr>
+      <p:grpSpPr>
+        <a:xfrm>
+          <a:off x="0" y="0"/>
+          <a:ext cx="0" cy="0"/>
+          <a:chOff x="0" y="0"/>
+          <a:chExt cx="0" cy="0"/>
+        </a:xfrm>
+      </p:grpSpPr>
+      <p:sp>
+        <p:nvSpPr>
+          <p:cNvPr id="15" name="TextBox 14">
+            <a:extLst>
+              <a:ext uri="{FF2B5EF4-FFF2-40B4-BE49-F238E27FC236}">
+                <a16:creationId xmlns:a16="http://schemas.microsoft.com/office/drawing/2014/main" id="{9307B4F7-5C38-A2C7-0DD0-2258D2951207}"/>
+              </a:ext>
+            </a:extLst>
+          </p:cNvPr>
+          <p:cNvSpPr txBox="1"/>
+          <p:nvPr/>
+        </p:nvSpPr>
+        <p:spPr>
+          <a:xfrm>
+            <a:off x="6108585" y="1806370"/>
+            <a:ext cx="3270708" cy="1200329"/>
+          </a:xfrm>
+          <a:prstGeom prst="rect">
+            <a:avLst/>
+          </a:prstGeom>
+          <a:noFill/>
+        </p:spPr>
+        <p:txBody>
+          <a:bodyPr wrap="square" rtlCol="0">
+            <a:spAutoFit/>
+          </a:bodyPr>
+          <a:lstStyle/>
+          <a:p>
+            <a:r>
+              <a:rPr lang="en-US" dirty="0"/>
+              <a:t>Green – removing data</a:t>
+            </a:r>
+          </a:p>
+          <a:p>
+            <a:r>
+              <a:rPr lang="en-US" dirty="0"/>
+              <a:t>Purple – filling data</a:t>
+            </a:r>
+          </a:p>
+          <a:p>
+            <a:r>
+              <a:rPr lang="en-US" dirty="0"/>
+              <a:t>Blue – changing data</a:t>
+            </a:r>
+          </a:p>
+          <a:p>
+            <a:r>
+              <a:rPr lang="en-US" dirty="0"/>
+              <a:t>Orange – rearranging in time</a:t>
+            </a:r>
+          </a:p>
+        </p:txBody>
+      </p:sp>
+      <p:sp>
+        <p:nvSpPr>
+          <p:cNvPr id="3" name="TextBox 2">
+            <a:extLst>
+              <a:ext uri="{FF2B5EF4-FFF2-40B4-BE49-F238E27FC236}">
+                <a16:creationId xmlns:a16="http://schemas.microsoft.com/office/drawing/2014/main" id="{D1EC6E9F-6C46-A6BA-C989-E25604AB9C23}"/>
+              </a:ext>
+            </a:extLst>
+          </p:cNvPr>
+          <p:cNvSpPr txBox="1"/>
+          <p:nvPr/>
+        </p:nvSpPr>
+        <p:spPr>
+          <a:xfrm>
+            <a:off x="2460178" y="2479690"/>
+            <a:ext cx="6096000" cy="369332"/>
+          </a:xfrm>
+          <a:prstGeom prst="rect">
+            <a:avLst/>
+          </a:prstGeom>
+          <a:noFill/>
+        </p:spPr>
+        <p:txBody>
+          <a:bodyPr wrap="square">
+            <a:spAutoFit/>
+          </a:bodyPr>
+          <a:lstStyle/>
+          <a:p>
+            <a:r>
+              <a:rPr lang="en-US" dirty="0"/>
+              <a:t>Power-Wind Speed Window Filter</a:t>
+            </a:r>
+          </a:p>
+        </p:txBody>
+      </p:sp>
+      <p:sp>
+        <p:nvSpPr>
+          <p:cNvPr id="2" name="Rectangle 1">
+            <a:extLst>
+              <a:ext uri="{FF2B5EF4-FFF2-40B4-BE49-F238E27FC236}">
+                <a16:creationId xmlns:a16="http://schemas.microsoft.com/office/drawing/2014/main" id="{632E7F5A-DBDA-F32D-2403-434B22C90B14}"/>
+              </a:ext>
+            </a:extLst>
+          </p:cNvPr>
+          <p:cNvSpPr/>
+          <p:nvPr/>
+        </p:nvSpPr>
+        <p:spPr>
+          <a:xfrm>
+            <a:off x="9505605" y="9191309"/>
             <a:ext cx="1561651" cy="601883"/>
           </a:xfrm>
           <a:prstGeom prst="rect">
@@ -5467,7 +7864,7 @@
           <p:cNvPr id="51" name="Group 50">
             <a:extLst>
               <a:ext uri="{FF2B5EF4-FFF2-40B4-BE49-F238E27FC236}">
-                <a16:creationId xmlns:a16="http://schemas.microsoft.com/office/drawing/2014/main" id="{FCEBFED8-F0E4-3613-F646-75B6370F81C1}"/>
+                <a16:creationId xmlns:a16="http://schemas.microsoft.com/office/drawing/2014/main" id="{B1BBDBB9-0A1F-1134-0644-1EB791F34170}"/>
               </a:ext>
             </a:extLst>
           </p:cNvPr>
@@ -5487,7 +7884,7 @@
             <p:cNvPr id="21" name="Right Arrow 20">
               <a:extLst>
                 <a:ext uri="{FF2B5EF4-FFF2-40B4-BE49-F238E27FC236}">
-                  <a16:creationId xmlns:a16="http://schemas.microsoft.com/office/drawing/2014/main" id="{972D87A0-813A-6720-06C8-195C4CEF8F1E}"/>
+                  <a16:creationId xmlns:a16="http://schemas.microsoft.com/office/drawing/2014/main" id="{B7BB0EBC-D8B5-41B0-4921-A91E70B63BED}"/>
                 </a:ext>
               </a:extLst>
             </p:cNvPr>
@@ -5533,7 +7930,7 @@
             <p:cNvPr id="20" name="Right Arrow 19">
               <a:extLst>
                 <a:ext uri="{FF2B5EF4-FFF2-40B4-BE49-F238E27FC236}">
-                  <a16:creationId xmlns:a16="http://schemas.microsoft.com/office/drawing/2014/main" id="{A2D00AFB-F89B-D8CD-EA56-7595E83F4EFF}"/>
+                  <a16:creationId xmlns:a16="http://schemas.microsoft.com/office/drawing/2014/main" id="{9CE2C308-3B95-7336-43E1-C7BF9EEEAD99}"/>
                 </a:ext>
               </a:extLst>
             </p:cNvPr>
@@ -5579,7 +7976,7 @@
             <p:cNvPr id="19" name="Right Arrow 18">
               <a:extLst>
                 <a:ext uri="{FF2B5EF4-FFF2-40B4-BE49-F238E27FC236}">
-                  <a16:creationId xmlns:a16="http://schemas.microsoft.com/office/drawing/2014/main" id="{1C6324EA-D5D9-F6BF-0FAF-EDC99A6CDEB3}"/>
+                  <a16:creationId xmlns:a16="http://schemas.microsoft.com/office/drawing/2014/main" id="{625E9557-E26B-D0A5-7AA5-87F9C923F385}"/>
                 </a:ext>
               </a:extLst>
             </p:cNvPr>
@@ -5625,7 +8022,7 @@
             <p:cNvPr id="4" name="Parallelogram 3">
               <a:extLst>
                 <a:ext uri="{FF2B5EF4-FFF2-40B4-BE49-F238E27FC236}">
-                  <a16:creationId xmlns:a16="http://schemas.microsoft.com/office/drawing/2014/main" id="{6B03AEB8-C88E-C0FB-DA3B-9F1BE318DF69}"/>
+                  <a16:creationId xmlns:a16="http://schemas.microsoft.com/office/drawing/2014/main" id="{8D42C8C0-5F0E-AD21-5790-9131443CBF0B}"/>
                 </a:ext>
               </a:extLst>
             </p:cNvPr>
@@ -5688,7 +8085,7 @@
             <p:cNvPr id="5" name="Rectangle 4">
               <a:extLst>
                 <a:ext uri="{FF2B5EF4-FFF2-40B4-BE49-F238E27FC236}">
-                  <a16:creationId xmlns:a16="http://schemas.microsoft.com/office/drawing/2014/main" id="{6C6CA136-BDF8-76C8-DDA8-8145CD97CC1B}"/>
+                  <a16:creationId xmlns:a16="http://schemas.microsoft.com/office/drawing/2014/main" id="{BB09F15C-02F2-70B8-C189-0DE540003023}"/>
                 </a:ext>
               </a:extLst>
             </p:cNvPr>
@@ -5749,7 +8146,7 @@
             <p:cNvPr id="7" name="Rectangle 6">
               <a:extLst>
                 <a:ext uri="{FF2B5EF4-FFF2-40B4-BE49-F238E27FC236}">
-                  <a16:creationId xmlns:a16="http://schemas.microsoft.com/office/drawing/2014/main" id="{BDA98530-CC36-DEBA-0FE0-0E5BCEFCB24E}"/>
+                  <a16:creationId xmlns:a16="http://schemas.microsoft.com/office/drawing/2014/main" id="{C3024E56-ECDA-4C58-25E5-DB00333683D1}"/>
                 </a:ext>
               </a:extLst>
             </p:cNvPr>
@@ -5810,7 +8207,7 @@
             <p:cNvPr id="8" name="Rectangle 7">
               <a:extLst>
                 <a:ext uri="{FF2B5EF4-FFF2-40B4-BE49-F238E27FC236}">
-                  <a16:creationId xmlns:a16="http://schemas.microsoft.com/office/drawing/2014/main" id="{6EC75A86-D67A-0F09-3FF1-6FC3754075B2}"/>
+                  <a16:creationId xmlns:a16="http://schemas.microsoft.com/office/drawing/2014/main" id="{A2907C4D-C665-431E-F273-EE37258D0977}"/>
                 </a:ext>
               </a:extLst>
             </p:cNvPr>
@@ -5874,7 +8271,7 @@
             <p:cNvPr id="9" name="Rectangle 8">
               <a:extLst>
                 <a:ext uri="{FF2B5EF4-FFF2-40B4-BE49-F238E27FC236}">
-                  <a16:creationId xmlns:a16="http://schemas.microsoft.com/office/drawing/2014/main" id="{0FBE1F1E-A304-0DA0-ABBB-34D7CA8CF43A}"/>
+                  <a16:creationId xmlns:a16="http://schemas.microsoft.com/office/drawing/2014/main" id="{ECCB9FF6-FFBE-ECC5-1E0C-BAA4D665294A}"/>
                 </a:ext>
               </a:extLst>
             </p:cNvPr>
@@ -5931,7 +8328,7 @@
             <p:cNvPr id="11" name="Rectangle 10">
               <a:extLst>
                 <a:ext uri="{FF2B5EF4-FFF2-40B4-BE49-F238E27FC236}">
-                  <a16:creationId xmlns:a16="http://schemas.microsoft.com/office/drawing/2014/main" id="{D35F28A8-CFA8-8F78-2C8E-46A33D1091AB}"/>
+                  <a16:creationId xmlns:a16="http://schemas.microsoft.com/office/drawing/2014/main" id="{1FD69CFF-D418-DF47-D080-EF9F7F1B4565}"/>
                 </a:ext>
               </a:extLst>
             </p:cNvPr>
@@ -5995,7 +8392,7 @@
             <p:cNvPr id="12" name="Rectangle 11">
               <a:extLst>
                 <a:ext uri="{FF2B5EF4-FFF2-40B4-BE49-F238E27FC236}">
-                  <a16:creationId xmlns:a16="http://schemas.microsoft.com/office/drawing/2014/main" id="{42E0E4E2-74D4-606F-0ED8-2ACB1FB88CF7}"/>
+                  <a16:creationId xmlns:a16="http://schemas.microsoft.com/office/drawing/2014/main" id="{9D785C71-20F8-1826-564A-17F14BA6CE8B}"/>
                 </a:ext>
               </a:extLst>
             </p:cNvPr>
@@ -6057,7 +8454,7 @@
             <p:cNvPr id="13" name="Rectangle 12">
               <a:extLst>
                 <a:ext uri="{FF2B5EF4-FFF2-40B4-BE49-F238E27FC236}">
-                  <a16:creationId xmlns:a16="http://schemas.microsoft.com/office/drawing/2014/main" id="{B3757315-F2E2-333E-C758-94E2A8ED7695}"/>
+                  <a16:creationId xmlns:a16="http://schemas.microsoft.com/office/drawing/2014/main" id="{8EAB3F0E-68FE-ED2A-CCD5-155167AB4833}"/>
                 </a:ext>
               </a:extLst>
             </p:cNvPr>
@@ -6121,7 +8518,7 @@
             <p:cNvPr id="14" name="Rectangle 13">
               <a:extLst>
                 <a:ext uri="{FF2B5EF4-FFF2-40B4-BE49-F238E27FC236}">
-                  <a16:creationId xmlns:a16="http://schemas.microsoft.com/office/drawing/2014/main" id="{1EEA77DC-F060-06DB-7309-D7A949E55D92}"/>
+                  <a16:creationId xmlns:a16="http://schemas.microsoft.com/office/drawing/2014/main" id="{1409E980-CAF4-708D-317A-2415D8EA769A}"/>
                 </a:ext>
               </a:extLst>
             </p:cNvPr>
@@ -6185,7 +8582,7 @@
             <p:cNvPr id="16" name="Rectangle 15">
               <a:extLst>
                 <a:ext uri="{FF2B5EF4-FFF2-40B4-BE49-F238E27FC236}">
-                  <a16:creationId xmlns:a16="http://schemas.microsoft.com/office/drawing/2014/main" id="{4A595934-9AE8-C4A8-9503-75BC08B67270}"/>
+                  <a16:creationId xmlns:a16="http://schemas.microsoft.com/office/drawing/2014/main" id="{A74F44C5-B49F-6970-7718-DABBAB2C4E9D}"/>
                 </a:ext>
               </a:extLst>
             </p:cNvPr>
@@ -6246,7 +8643,7 @@
             <p:cNvPr id="22" name="Right Arrow 21">
               <a:extLst>
                 <a:ext uri="{FF2B5EF4-FFF2-40B4-BE49-F238E27FC236}">
-                  <a16:creationId xmlns:a16="http://schemas.microsoft.com/office/drawing/2014/main" id="{3F42AE10-13C3-F062-E2EF-44A6762FF2B0}"/>
+                  <a16:creationId xmlns:a16="http://schemas.microsoft.com/office/drawing/2014/main" id="{CECF64ED-AE7A-7856-8BFD-D66997A1D722}"/>
                 </a:ext>
               </a:extLst>
             </p:cNvPr>
@@ -6292,7 +8689,7 @@
             <p:cNvPr id="24" name="Right Arrow 23">
               <a:extLst>
                 <a:ext uri="{FF2B5EF4-FFF2-40B4-BE49-F238E27FC236}">
-                  <a16:creationId xmlns:a16="http://schemas.microsoft.com/office/drawing/2014/main" id="{7D34DA64-88CC-7A1A-AB2C-34220D46F3D6}"/>
+                  <a16:creationId xmlns:a16="http://schemas.microsoft.com/office/drawing/2014/main" id="{74A1D9B5-20E9-3087-BB12-39BA991796FD}"/>
                 </a:ext>
               </a:extLst>
             </p:cNvPr>
@@ -6338,7 +8735,7 @@
             <p:cNvPr id="18" name="Rectangle 17">
               <a:extLst>
                 <a:ext uri="{FF2B5EF4-FFF2-40B4-BE49-F238E27FC236}">
-                  <a16:creationId xmlns:a16="http://schemas.microsoft.com/office/drawing/2014/main" id="{A840F2FC-EF4D-4EAA-AEB9-ADDF05E55FAE}"/>
+                  <a16:creationId xmlns:a16="http://schemas.microsoft.com/office/drawing/2014/main" id="{4F01B08C-B3CE-D05C-B536-1EF53317263F}"/>
                 </a:ext>
               </a:extLst>
             </p:cNvPr>
@@ -6392,7 +8789,7 @@
             <p:cNvPr id="29" name="Rectangle 28">
               <a:extLst>
                 <a:ext uri="{FF2B5EF4-FFF2-40B4-BE49-F238E27FC236}">
-                  <a16:creationId xmlns:a16="http://schemas.microsoft.com/office/drawing/2014/main" id="{CC0A7475-B59F-7697-752E-05F9BA21E1C1}"/>
+                  <a16:creationId xmlns:a16="http://schemas.microsoft.com/office/drawing/2014/main" id="{62DC86CF-EA5C-DF94-7B00-5A1F5429CB27}"/>
                 </a:ext>
               </a:extLst>
             </p:cNvPr>
@@ -6450,7 +8847,7 @@
             <p:cNvPr id="30" name="Rectangle 29">
               <a:extLst>
                 <a:ext uri="{FF2B5EF4-FFF2-40B4-BE49-F238E27FC236}">
-                  <a16:creationId xmlns:a16="http://schemas.microsoft.com/office/drawing/2014/main" id="{F1528259-1A52-7806-3A78-73B173F37E3E}"/>
+                  <a16:creationId xmlns:a16="http://schemas.microsoft.com/office/drawing/2014/main" id="{E47989E4-56A0-458A-55BD-E526C4FC148A}"/>
                 </a:ext>
               </a:extLst>
             </p:cNvPr>
@@ -6508,7 +8905,7 @@
             <p:cNvPr id="31" name="Rectangle 30">
               <a:extLst>
                 <a:ext uri="{FF2B5EF4-FFF2-40B4-BE49-F238E27FC236}">
-                  <a16:creationId xmlns:a16="http://schemas.microsoft.com/office/drawing/2014/main" id="{CA92C061-1DBD-1A5A-C34F-9FBF03284DD6}"/>
+                  <a16:creationId xmlns:a16="http://schemas.microsoft.com/office/drawing/2014/main" id="{7230BA1A-12D0-7582-0119-FB9B65AC52D5}"/>
                 </a:ext>
               </a:extLst>
             </p:cNvPr>
@@ -6562,7 +8959,7 @@
             <p:cNvPr id="32" name="TextBox 31">
               <a:extLst>
                 <a:ext uri="{FF2B5EF4-FFF2-40B4-BE49-F238E27FC236}">
-                  <a16:creationId xmlns:a16="http://schemas.microsoft.com/office/drawing/2014/main" id="{3C2889D2-234C-E7CA-D82C-C29D3BCC2A56}"/>
+                  <a16:creationId xmlns:a16="http://schemas.microsoft.com/office/drawing/2014/main" id="{9D2862FB-81D0-D169-AC81-C8EB4C9482E6}"/>
                 </a:ext>
               </a:extLst>
             </p:cNvPr>
@@ -6599,7 +8996,7 @@
             <p:cNvPr id="33" name="TextBox 32">
               <a:extLst>
                 <a:ext uri="{FF2B5EF4-FFF2-40B4-BE49-F238E27FC236}">
-                  <a16:creationId xmlns:a16="http://schemas.microsoft.com/office/drawing/2014/main" id="{4C919189-B9F4-5AA2-3B4E-9DD358FBC9D5}"/>
+                  <a16:creationId xmlns:a16="http://schemas.microsoft.com/office/drawing/2014/main" id="{DC00B733-C06A-DEC8-165D-8440D961F20F}"/>
                 </a:ext>
               </a:extLst>
             </p:cNvPr>
@@ -6636,7 +9033,7 @@
             <p:cNvPr id="34" name="TextBox 33">
               <a:extLst>
                 <a:ext uri="{FF2B5EF4-FFF2-40B4-BE49-F238E27FC236}">
-                  <a16:creationId xmlns:a16="http://schemas.microsoft.com/office/drawing/2014/main" id="{C5F02DD1-37BE-8E37-6E74-BF989D04753A}"/>
+                  <a16:creationId xmlns:a16="http://schemas.microsoft.com/office/drawing/2014/main" id="{452058CA-6362-F014-284C-3B35D1C6E53A}"/>
                 </a:ext>
               </a:extLst>
             </p:cNvPr>
@@ -6673,7 +9070,7 @@
             <p:cNvPr id="35" name="TextBox 34">
               <a:extLst>
                 <a:ext uri="{FF2B5EF4-FFF2-40B4-BE49-F238E27FC236}">
-                  <a16:creationId xmlns:a16="http://schemas.microsoft.com/office/drawing/2014/main" id="{1235D203-7AC0-9986-B6F4-8D245635DFB4}"/>
+                  <a16:creationId xmlns:a16="http://schemas.microsoft.com/office/drawing/2014/main" id="{63571E2E-9D13-DA43-E867-D72D811B37C1}"/>
                 </a:ext>
               </a:extLst>
             </p:cNvPr>
@@ -6710,7 +9107,7 @@
             <p:cNvPr id="39" name="Parallelogram 38">
               <a:extLst>
                 <a:ext uri="{FF2B5EF4-FFF2-40B4-BE49-F238E27FC236}">
-                  <a16:creationId xmlns:a16="http://schemas.microsoft.com/office/drawing/2014/main" id="{FDA5EA7C-51D1-15F7-A2F3-AEF94CA4BBD8}"/>
+                  <a16:creationId xmlns:a16="http://schemas.microsoft.com/office/drawing/2014/main" id="{51552AE9-2F39-788E-E461-52D8B2ECBE7B}"/>
                 </a:ext>
               </a:extLst>
             </p:cNvPr>
@@ -6773,7 +9170,7 @@
             <p:cNvPr id="6" name="Rectangle 5">
               <a:extLst>
                 <a:ext uri="{FF2B5EF4-FFF2-40B4-BE49-F238E27FC236}">
-                  <a16:creationId xmlns:a16="http://schemas.microsoft.com/office/drawing/2014/main" id="{9F32C008-A23C-A358-EBB5-A68B34198C77}"/>
+                  <a16:creationId xmlns:a16="http://schemas.microsoft.com/office/drawing/2014/main" id="{92EE4237-A19D-9E75-6D02-880F0355711D}"/>
                 </a:ext>
               </a:extLst>
             </p:cNvPr>
@@ -6837,7 +9234,7 @@
             <p:cNvPr id="17" name="Right Arrow 16">
               <a:extLst>
                 <a:ext uri="{FF2B5EF4-FFF2-40B4-BE49-F238E27FC236}">
-                  <a16:creationId xmlns:a16="http://schemas.microsoft.com/office/drawing/2014/main" id="{921AAC4B-9EB2-22B3-E3D0-E1282F403612}"/>
+                  <a16:creationId xmlns:a16="http://schemas.microsoft.com/office/drawing/2014/main" id="{3C5B0E92-0467-7C3C-B1E4-61716672DCD0}"/>
                 </a:ext>
               </a:extLst>
             </p:cNvPr>
@@ -6883,7 +9280,7 @@
             <p:cNvPr id="41" name="Right Arrow 40">
               <a:extLst>
                 <a:ext uri="{FF2B5EF4-FFF2-40B4-BE49-F238E27FC236}">
-                  <a16:creationId xmlns:a16="http://schemas.microsoft.com/office/drawing/2014/main" id="{7F0EA875-9320-77C3-463D-B3802F4E65EC}"/>
+                  <a16:creationId xmlns:a16="http://schemas.microsoft.com/office/drawing/2014/main" id="{A1CD8255-9F3A-CEFF-06E1-4FEF169AE96D}"/>
                 </a:ext>
               </a:extLst>
             </p:cNvPr>
@@ -6929,7 +9326,7 @@
             <p:cNvPr id="42" name="Right Arrow 41">
               <a:extLst>
                 <a:ext uri="{FF2B5EF4-FFF2-40B4-BE49-F238E27FC236}">
-                  <a16:creationId xmlns:a16="http://schemas.microsoft.com/office/drawing/2014/main" id="{B4D351F7-DFC8-A7DB-BE99-C494A14FABBE}"/>
+                  <a16:creationId xmlns:a16="http://schemas.microsoft.com/office/drawing/2014/main" id="{6EF2909C-D0AF-CBBC-C323-F3ADDE22B877}"/>
                 </a:ext>
               </a:extLst>
             </p:cNvPr>
@@ -6975,7 +9372,7 @@
             <p:cNvPr id="43" name="Right Arrow 42">
               <a:extLst>
                 <a:ext uri="{FF2B5EF4-FFF2-40B4-BE49-F238E27FC236}">
-                  <a16:creationId xmlns:a16="http://schemas.microsoft.com/office/drawing/2014/main" id="{E11D6FD3-2041-3783-0135-9A00C405A498}"/>
+                  <a16:creationId xmlns:a16="http://schemas.microsoft.com/office/drawing/2014/main" id="{7FB8A7F9-EA11-C4C7-17C9-10021F5BE645}"/>
                 </a:ext>
               </a:extLst>
             </p:cNvPr>
@@ -7021,7 +9418,7 @@
             <p:cNvPr id="44" name="Right Arrow 43">
               <a:extLst>
                 <a:ext uri="{FF2B5EF4-FFF2-40B4-BE49-F238E27FC236}">
-                  <a16:creationId xmlns:a16="http://schemas.microsoft.com/office/drawing/2014/main" id="{F0E99AE0-4FF2-6503-BB76-E738750F0D11}"/>
+                  <a16:creationId xmlns:a16="http://schemas.microsoft.com/office/drawing/2014/main" id="{73C69EFB-394E-33B8-55B6-DE1C450ACECC}"/>
                 </a:ext>
               </a:extLst>
             </p:cNvPr>
@@ -7067,7 +9464,7 @@
             <p:cNvPr id="10" name="Right Arrow 9">
               <a:extLst>
                 <a:ext uri="{FF2B5EF4-FFF2-40B4-BE49-F238E27FC236}">
-                  <a16:creationId xmlns:a16="http://schemas.microsoft.com/office/drawing/2014/main" id="{8D87CEBC-B562-369C-9272-65E20ECB56E8}"/>
+                  <a16:creationId xmlns:a16="http://schemas.microsoft.com/office/drawing/2014/main" id="{61A6F8C8-D546-86A0-01F2-60CFFBB4F584}"/>
                 </a:ext>
               </a:extLst>
             </p:cNvPr>
@@ -7113,7 +9510,7 @@
             <p:cNvPr id="37" name="Parallelogram 36">
               <a:extLst>
                 <a:ext uri="{FF2B5EF4-FFF2-40B4-BE49-F238E27FC236}">
-                  <a16:creationId xmlns:a16="http://schemas.microsoft.com/office/drawing/2014/main" id="{5DEDDE0A-57BD-D69C-6320-F06E9956EF93}"/>
+                  <a16:creationId xmlns:a16="http://schemas.microsoft.com/office/drawing/2014/main" id="{C543B49E-C6F1-9494-6999-0F2C96A6F21D}"/>
                 </a:ext>
               </a:extLst>
             </p:cNvPr>
@@ -7179,7 +9576,7 @@
             <p:cNvPr id="38" name="Parallelogram 37">
               <a:extLst>
                 <a:ext uri="{FF2B5EF4-FFF2-40B4-BE49-F238E27FC236}">
-                  <a16:creationId xmlns:a16="http://schemas.microsoft.com/office/drawing/2014/main" id="{7E40B525-E0B0-3096-CE51-7EA04F8017C9}"/>
+                  <a16:creationId xmlns:a16="http://schemas.microsoft.com/office/drawing/2014/main" id="{B767BB0F-963E-D6C1-292C-01149DC935EF}"/>
                 </a:ext>
               </a:extLst>
             </p:cNvPr>
@@ -7245,7 +9642,7 @@
             <p:cNvPr id="40" name="Parallelogram 39">
               <a:extLst>
                 <a:ext uri="{FF2B5EF4-FFF2-40B4-BE49-F238E27FC236}">
-                  <a16:creationId xmlns:a16="http://schemas.microsoft.com/office/drawing/2014/main" id="{6FAB8EC8-A30F-7819-C249-BF72B2F69D38}"/>
+                  <a16:creationId xmlns:a16="http://schemas.microsoft.com/office/drawing/2014/main" id="{E5E8CC81-43A0-868A-A2CC-8B0F1DBC92C1}"/>
                 </a:ext>
               </a:extLst>
             </p:cNvPr>
@@ -7311,7 +9708,7 @@
             <p:cNvPr id="45" name="Right Arrow 44">
               <a:extLst>
                 <a:ext uri="{FF2B5EF4-FFF2-40B4-BE49-F238E27FC236}">
-                  <a16:creationId xmlns:a16="http://schemas.microsoft.com/office/drawing/2014/main" id="{34F8E07E-7832-B610-8AEF-A59442B53D30}"/>
+                  <a16:creationId xmlns:a16="http://schemas.microsoft.com/office/drawing/2014/main" id="{A6130F6B-7825-76F7-D59B-42886846F98E}"/>
                 </a:ext>
               </a:extLst>
             </p:cNvPr>
@@ -7357,7 +9754,7 @@
             <p:cNvPr id="46" name="Right Arrow 45">
               <a:extLst>
                 <a:ext uri="{FF2B5EF4-FFF2-40B4-BE49-F238E27FC236}">
-                  <a16:creationId xmlns:a16="http://schemas.microsoft.com/office/drawing/2014/main" id="{D9518525-8B66-4EAA-BAE3-6C20DA96C660}"/>
+                  <a16:creationId xmlns:a16="http://schemas.microsoft.com/office/drawing/2014/main" id="{8D5C1D6E-74EA-ACD2-70DA-2906B98B9861}"/>
                 </a:ext>
               </a:extLst>
             </p:cNvPr>
@@ -7403,7 +9800,7 @@
             <p:cNvPr id="47" name="Right Arrow 46">
               <a:extLst>
                 <a:ext uri="{FF2B5EF4-FFF2-40B4-BE49-F238E27FC236}">
-                  <a16:creationId xmlns:a16="http://schemas.microsoft.com/office/drawing/2014/main" id="{F9E11317-E49E-98EB-0C17-99360D8E2674}"/>
+                  <a16:creationId xmlns:a16="http://schemas.microsoft.com/office/drawing/2014/main" id="{AEDF7A12-DD2A-CF5A-4E9E-897E8B092DE9}"/>
                 </a:ext>
               </a:extLst>
             </p:cNvPr>
@@ -7448,7 +9845,7 @@
     </p:spTree>
     <p:extLst>
       <p:ext uri="{BB962C8B-B14F-4D97-AF65-F5344CB8AC3E}">
-        <p14:creationId xmlns:p14="http://schemas.microsoft.com/office/powerpoint/2010/main" val="1842382080"/>
+        <p14:creationId xmlns:p14="http://schemas.microsoft.com/office/powerpoint/2010/main" val="4126663606"/>
       </p:ext>
     </p:extLst>
   </p:cSld>
@@ -7458,7 +9855,7 @@
 </p:sld>
 </file>
 
-<file path=ppt/slides/slide3.xml><?xml version="1.0" encoding="utf-8"?>
+<file path=ppt/slides/slide4.xml><?xml version="1.0" encoding="utf-8"?>
 <p:sld xmlns:a="http://schemas.openxmlformats.org/drawingml/2006/main" xmlns:r="http://schemas.openxmlformats.org/officeDocument/2006/relationships" xmlns:p="http://schemas.openxmlformats.org/presentationml/2006/main">
   <p:cSld>
     <p:spTree>
@@ -9673,7 +12070,7 @@
 </p:sld>
 </file>
 
-<file path=ppt/slides/slide4.xml><?xml version="1.0" encoding="utf-8"?>
+<file path=ppt/slides/slide5.xml><?xml version="1.0" encoding="utf-8"?>
 <p:sld xmlns:a="http://schemas.openxmlformats.org/drawingml/2006/main" xmlns:r="http://schemas.openxmlformats.org/officeDocument/2006/relationships" xmlns:p="http://schemas.openxmlformats.org/presentationml/2006/main">
   <p:cSld>
     <p:spTree>
@@ -11507,7 +13904,7 @@
 </p:sld>
 </file>
 
-<file path=ppt/slides/slide5.xml><?xml version="1.0" encoding="utf-8"?>
+<file path=ppt/slides/slide6.xml><?xml version="1.0" encoding="utf-8"?>
 <p:sld xmlns:a="http://schemas.openxmlformats.org/drawingml/2006/main" xmlns:r="http://schemas.openxmlformats.org/officeDocument/2006/relationships" xmlns:p="http://schemas.openxmlformats.org/presentationml/2006/main">
   <p:cSld>
     <p:spTree>
@@ -16761,7 +19158,7 @@
 </p:sld>
 </file>
 
-<file path=ppt/slides/slide6.xml><?xml version="1.0" encoding="utf-8"?>
+<file path=ppt/slides/slide7.xml><?xml version="1.0" encoding="utf-8"?>
 <p:sld xmlns:a="http://schemas.openxmlformats.org/drawingml/2006/main" xmlns:r="http://schemas.openxmlformats.org/officeDocument/2006/relationships" xmlns:p="http://schemas.openxmlformats.org/presentationml/2006/main">
   <p:cSld>
     <p:spTree>
